--- a/material/[SeSAC_YDP_6] 26_React_map_filter.pptx
+++ b/material/[SeSAC_YDP_6] 26_React_map_filter.pptx
@@ -2,10 +2,10 @@
 <file path=ppt/presentation.xml><?xml version="1.0" encoding="utf-8"?>
 <p:presentation xmlns:a="http://schemas.openxmlformats.org/drawingml/2006/main" xmlns:r="http://schemas.openxmlformats.org/officeDocument/2006/relationships" xmlns:p="http://schemas.openxmlformats.org/presentationml/2006/main" saveSubsetFonts="1">
   <p:sldMasterIdLst>
-    <p:sldMasterId id="2147483673" r:id="rId1"/>
+    <p:sldMasterId id="2147483686" r:id="rId1"/>
   </p:sldMasterIdLst>
   <p:notesMasterIdLst>
-    <p:notesMasterId r:id="rId22"/>
+    <p:notesMasterId r:id="rId20"/>
   </p:notesMasterIdLst>
   <p:sldIdLst>
     <p:sldId id="256" r:id="rId2"/>
@@ -25,9 +25,7 @@
     <p:sldId id="284" r:id="rId16"/>
     <p:sldId id="285" r:id="rId17"/>
     <p:sldId id="286" r:id="rId18"/>
-    <p:sldId id="287" r:id="rId19"/>
-    <p:sldId id="288" r:id="rId20"/>
-    <p:sldId id="289" r:id="rId21"/>
+    <p:sldId id="293" r:id="rId19"/>
   </p:sldIdLst>
   <p:sldSz cx="12192000" cy="6858000"/>
   <p:notesSz cx="6858000" cy="9144000"/>
@@ -219,7 +217,7 @@
           <a:p>
             <a:fld id="{2EF3F159-7250-4DD4-91C2-13B35D56E1AF}" type="datetimeFigureOut">
               <a:rPr lang="ko-KR" altLang="en-US" smtClean="0"/>
-              <a:t>2023-10-04</a:t>
+              <a:t>2024-08-05</a:t>
             </a:fld>
             <a:endParaRPr lang="ko-KR" altLang="en-US"/>
           </a:p>
@@ -614,22 +612,6 @@
           <a:bodyPr/>
           <a:lstStyle/>
           <a:p>
-            <a:r>
-              <a:rPr lang="en-US" altLang="ko-KR" dirty="0"/>
-              <a:t>Reduce</a:t>
-            </a:r>
-            <a:r>
-              <a:rPr lang="en-US" altLang="ko-KR" baseline="0" dirty="0"/>
-              <a:t> </a:t>
-            </a:r>
-            <a:r>
-              <a:rPr lang="ko-KR" altLang="en-US" baseline="0" dirty="0"/>
-              <a:t>함수 설명도 추가 가능하다면</a:t>
-            </a:r>
-            <a:r>
-              <a:rPr lang="en-US" altLang="ko-KR" baseline="0"/>
-              <a:t>! </a:t>
-            </a:r>
             <a:endParaRPr lang="ko-KR" altLang="en-US" dirty="0"/>
           </a:p>
         </p:txBody>
@@ -651,7 +633,7 @@
           <a:p>
             <a:fld id="{C09E5BFC-1559-42F1-8940-AB342D56BF02}" type="slidenum">
               <a:rPr lang="ko-KR" altLang="en-US" smtClean="0"/>
-              <a:t>17</a:t>
+              <a:t>16</a:t>
             </a:fld>
             <a:endParaRPr lang="ko-KR" altLang="en-US"/>
           </a:p>
@@ -660,7 +642,7 @@
     </p:spTree>
     <p:extLst>
       <p:ext uri="{BB962C8B-B14F-4D97-AF65-F5344CB8AC3E}">
-        <p14:creationId xmlns:p14="http://schemas.microsoft.com/office/powerpoint/2010/main" val="2839057405"/>
+        <p14:creationId xmlns:p14="http://schemas.microsoft.com/office/powerpoint/2010/main" val="2752525777"/>
       </p:ext>
     </p:extLst>
   </p:cSld>
@@ -716,18 +698,21 @@
           <a:p>
             <a:r>
               <a:rPr lang="en-US" altLang="ko-KR" dirty="0"/>
-              <a:t>05_list_map_filter</a:t>
-            </a:r>
-          </a:p>
-          <a:p>
-            <a:r>
-              <a:rPr lang="en-US" altLang="ko-KR" dirty="0"/>
-              <a:t>1</a:t>
-            </a:r>
-            <a:r>
-              <a:rPr lang="ko-KR" altLang="en-US" dirty="0"/>
-              <a:t>문제</a:t>
-            </a:r>
+              <a:t>Reduce</a:t>
+            </a:r>
+            <a:r>
+              <a:rPr lang="en-US" altLang="ko-KR" baseline="0" dirty="0"/>
+              <a:t> </a:t>
+            </a:r>
+            <a:r>
+              <a:rPr lang="ko-KR" altLang="en-US" baseline="0" dirty="0"/>
+              <a:t>함수 설명도 추가 가능하다면</a:t>
+            </a:r>
+            <a:r>
+              <a:rPr lang="en-US" altLang="ko-KR" baseline="0"/>
+              <a:t>! </a:t>
+            </a:r>
+            <a:endParaRPr lang="ko-KR" altLang="en-US" dirty="0"/>
           </a:p>
         </p:txBody>
       </p:sp>
@@ -748,7 +733,7 @@
           <a:p>
             <a:fld id="{C09E5BFC-1559-42F1-8940-AB342D56BF02}" type="slidenum">
               <a:rPr lang="ko-KR" altLang="en-US" smtClean="0"/>
-              <a:t>18</a:t>
+              <a:t>17</a:t>
             </a:fld>
             <a:endParaRPr lang="ko-KR" altLang="en-US"/>
           </a:p>
@@ -757,7 +742,7 @@
     </p:spTree>
     <p:extLst>
       <p:ext uri="{BB962C8B-B14F-4D97-AF65-F5344CB8AC3E}">
-        <p14:creationId xmlns:p14="http://schemas.microsoft.com/office/powerpoint/2010/main" val="349745998"/>
+        <p14:creationId xmlns:p14="http://schemas.microsoft.com/office/powerpoint/2010/main" val="2839057405"/>
       </p:ext>
     </p:extLst>
   </p:cSld>
@@ -811,11 +796,7 @@
           <a:bodyPr/>
           <a:lstStyle/>
           <a:p>
-            <a:r>
-              <a:rPr lang="en-US" altLang="ko-KR" dirty="0"/>
-              <a:t>05_list_map_filter</a:t>
-            </a:r>
-            <a:endParaRPr lang="ko-KR" altLang="en-US" dirty="0"/>
+            <a:endParaRPr lang="en-US" altLang="ko-KR" dirty="0"/>
           </a:p>
         </p:txBody>
       </p:sp>
@@ -836,7 +817,7 @@
           <a:p>
             <a:fld id="{C09E5BFC-1559-42F1-8940-AB342D56BF02}" type="slidenum">
               <a:rPr lang="ko-KR" altLang="en-US" smtClean="0"/>
-              <a:t>19</a:t>
+              <a:t>18</a:t>
             </a:fld>
             <a:endParaRPr lang="ko-KR" altLang="en-US"/>
           </a:p>
@@ -845,95 +826,7 @@
     </p:spTree>
     <p:extLst>
       <p:ext uri="{BB962C8B-B14F-4D97-AF65-F5344CB8AC3E}">
-        <p14:creationId xmlns:p14="http://schemas.microsoft.com/office/powerpoint/2010/main" val="1563077614"/>
-      </p:ext>
-    </p:extLst>
-  </p:cSld>
-  <p:clrMapOvr>
-    <a:masterClrMapping/>
-  </p:clrMapOvr>
-</p:notes>
-</file>
-
-<file path=ppt/notesSlides/notesSlide13.xml><?xml version="1.0" encoding="utf-8"?>
-<p:notes xmlns:a="http://schemas.openxmlformats.org/drawingml/2006/main" xmlns:r="http://schemas.openxmlformats.org/officeDocument/2006/relationships" xmlns:p="http://schemas.openxmlformats.org/presentationml/2006/main">
-  <p:cSld>
-    <p:spTree>
-      <p:nvGrpSpPr>
-        <p:cNvPr id="1" name=""/>
-        <p:cNvGrpSpPr/>
-        <p:nvPr/>
-      </p:nvGrpSpPr>
-      <p:grpSpPr>
-        <a:xfrm>
-          <a:off x="0" y="0"/>
-          <a:ext cx="0" cy="0"/>
-          <a:chOff x="0" y="0"/>
-          <a:chExt cx="0" cy="0"/>
-        </a:xfrm>
-      </p:grpSpPr>
-      <p:sp>
-        <p:nvSpPr>
-          <p:cNvPr id="2" name="슬라이드 이미지 개체 틀 1"/>
-          <p:cNvSpPr>
-            <a:spLocks noGrp="1" noRot="1" noChangeAspect="1"/>
-          </p:cNvSpPr>
-          <p:nvPr>
-            <p:ph type="sldImg"/>
-          </p:nvPr>
-        </p:nvSpPr>
-        <p:spPr/>
-      </p:sp>
-      <p:sp>
-        <p:nvSpPr>
-          <p:cNvPr id="3" name="슬라이드 노트 개체 틀 2"/>
-          <p:cNvSpPr>
-            <a:spLocks noGrp="1"/>
-          </p:cNvSpPr>
-          <p:nvPr>
-            <p:ph type="body" idx="1"/>
-          </p:nvPr>
-        </p:nvSpPr>
-        <p:spPr/>
-        <p:txBody>
-          <a:bodyPr/>
-          <a:lstStyle/>
-          <a:p>
-            <a:r>
-              <a:rPr lang="en-US" altLang="ko-KR" dirty="0"/>
-              <a:t>05_list_map_filter</a:t>
-            </a:r>
-            <a:endParaRPr lang="ko-KR" altLang="en-US" dirty="0"/>
-          </a:p>
-        </p:txBody>
-      </p:sp>
-      <p:sp>
-        <p:nvSpPr>
-          <p:cNvPr id="4" name="슬라이드 번호 개체 틀 3"/>
-          <p:cNvSpPr>
-            <a:spLocks noGrp="1"/>
-          </p:cNvSpPr>
-          <p:nvPr>
-            <p:ph type="sldNum" sz="quarter" idx="5"/>
-          </p:nvPr>
-        </p:nvSpPr>
-        <p:spPr/>
-        <p:txBody>
-          <a:bodyPr/>
-          <a:lstStyle/>
-          <a:p>
-            <a:fld id="{C09E5BFC-1559-42F1-8940-AB342D56BF02}" type="slidenum">
-              <a:rPr lang="ko-KR" altLang="en-US" smtClean="0"/>
-              <a:t>20</a:t>
-            </a:fld>
-            <a:endParaRPr lang="ko-KR" altLang="en-US"/>
-          </a:p>
-        </p:txBody>
-      </p:sp>
-    </p:spTree>
-    <p:extLst>
-      <p:ext uri="{BB962C8B-B14F-4D97-AF65-F5344CB8AC3E}">
-        <p14:creationId xmlns:p14="http://schemas.microsoft.com/office/powerpoint/2010/main" val="1320434174"/>
+        <p14:creationId xmlns:p14="http://schemas.microsoft.com/office/powerpoint/2010/main" val="2648388206"/>
       </p:ext>
     </p:extLst>
   </p:cSld>
@@ -987,18 +880,6 @@
           <a:bodyPr/>
           <a:lstStyle/>
           <a:p>
-            <a:r>
-              <a:rPr lang="en-US" altLang="ko-KR" dirty="0"/>
-              <a:t>map</a:t>
-            </a:r>
-            <a:r>
-              <a:rPr lang="ko-KR" altLang="en-US" dirty="0"/>
-              <a:t>을 사용하면 됩니다</a:t>
-            </a:r>
-            <a:r>
-              <a:rPr lang="en-US" altLang="ko-KR" dirty="0"/>
-              <a:t>!</a:t>
-            </a:r>
             <a:endParaRPr lang="ko-KR" altLang="en-US" dirty="0"/>
           </a:p>
         </p:txBody>
@@ -1018,18 +899,18 @@
           <a:bodyPr/>
           <a:lstStyle/>
           <a:p>
-            <a:fld id="{BF7660BF-9D8A-4D9B-A2EE-C667F9509E93}" type="slidenum">
+            <a:fld id="{C09E5BFC-1559-42F1-8940-AB342D56BF02}" type="slidenum">
               <a:rPr lang="ko-KR" altLang="en-US" smtClean="0"/>
-              <a:t>4</a:t>
+              <a:t>3</a:t>
             </a:fld>
-            <a:endParaRPr lang="ko-KR" altLang="en-US" dirty="0"/>
+            <a:endParaRPr lang="ko-KR" altLang="en-US"/>
           </a:p>
         </p:txBody>
       </p:sp>
     </p:spTree>
     <p:extLst>
       <p:ext uri="{BB962C8B-B14F-4D97-AF65-F5344CB8AC3E}">
-        <p14:creationId xmlns:p14="http://schemas.microsoft.com/office/powerpoint/2010/main" val="3149561910"/>
+        <p14:creationId xmlns:p14="http://schemas.microsoft.com/office/powerpoint/2010/main" val="2568901084"/>
       </p:ext>
     </p:extLst>
   </p:cSld>
@@ -1084,110 +965,15 @@
           <a:lstStyle/>
           <a:p>
             <a:r>
+              <a:rPr lang="en-US" altLang="ko-KR" dirty="0"/>
+              <a:t>map</a:t>
+            </a:r>
+            <a:r>
               <a:rPr lang="ko-KR" altLang="en-US" dirty="0"/>
-              <a:t>물론 오브젝트로 이루어진 배열 뿐만 아니라 </a:t>
-            </a:r>
-            <a:endParaRPr lang="en-US" altLang="ko-KR" dirty="0"/>
-          </a:p>
-          <a:p>
-            <a:r>
-              <a:rPr lang="ko-KR" altLang="en-US" dirty="0" err="1"/>
-              <a:t>숫자형</a:t>
-            </a:r>
-            <a:r>
-              <a:rPr lang="ko-KR" altLang="en-US" dirty="0"/>
-              <a:t> 배열</a:t>
+              <a:t>을 사용하면 됩니다</a:t>
             </a:r>
             <a:r>
               <a:rPr lang="en-US" altLang="ko-KR" dirty="0"/>
-              <a:t>, </a:t>
-            </a:r>
-            <a:r>
-              <a:rPr lang="ko-KR" altLang="en-US" dirty="0"/>
-              <a:t>문자형 </a:t>
-            </a:r>
-            <a:r>
-              <a:rPr lang="ko-KR" altLang="en-US" dirty="0" err="1"/>
-              <a:t>배열등</a:t>
-            </a:r>
-            <a:r>
-              <a:rPr lang="ko-KR" altLang="en-US" dirty="0"/>
-              <a:t> 모든 값을 </a:t>
-            </a:r>
-            <a:r>
-              <a:rPr lang="en-US" altLang="ko-KR" dirty="0"/>
-              <a:t>props</a:t>
-            </a:r>
-            <a:r>
-              <a:rPr lang="ko-KR" altLang="en-US" dirty="0"/>
-              <a:t>로 전달할 수 있다</a:t>
-            </a:r>
-            <a:r>
-              <a:rPr lang="en-US" altLang="ko-KR" dirty="0"/>
-              <a:t>.</a:t>
-            </a:r>
-          </a:p>
-          <a:p>
-            <a:endParaRPr lang="en-US" altLang="ko-KR" dirty="0"/>
-          </a:p>
-          <a:p>
-            <a:r>
-              <a:rPr lang="ko-KR" altLang="en-US" dirty="0" err="1"/>
-              <a:t>숫자형이나</a:t>
-            </a:r>
-            <a:r>
-              <a:rPr lang="ko-KR" altLang="en-US" dirty="0"/>
-              <a:t> </a:t>
-            </a:r>
-            <a:r>
-              <a:rPr lang="ko-KR" altLang="en-US" dirty="0" err="1"/>
-              <a:t>문자형일</a:t>
-            </a:r>
-            <a:r>
-              <a:rPr lang="ko-KR" altLang="en-US" dirty="0"/>
-              <a:t> 때는 그냥 </a:t>
-            </a:r>
-            <a:r>
-              <a:rPr lang="en-US" altLang="ko-KR" dirty="0"/>
-              <a:t>el </a:t>
-            </a:r>
-            <a:r>
-              <a:rPr lang="ko-KR" altLang="en-US" dirty="0"/>
-              <a:t>자체를 </a:t>
-            </a:r>
-            <a:r>
-              <a:rPr lang="en-US" altLang="ko-KR" dirty="0"/>
-              <a:t>props</a:t>
-            </a:r>
-            <a:r>
-              <a:rPr lang="ko-KR" altLang="en-US" dirty="0"/>
-              <a:t>로 전달하면 되지만</a:t>
-            </a:r>
-            <a:endParaRPr lang="en-US" altLang="ko-KR" dirty="0"/>
-          </a:p>
-          <a:p>
-            <a:r>
-              <a:rPr lang="ko-KR" altLang="en-US" dirty="0"/>
-              <a:t>오브젝트 배열일 때는 점</a:t>
-            </a:r>
-            <a:r>
-              <a:rPr lang="en-US" altLang="ko-KR" baseline="0" dirty="0"/>
-              <a:t> </a:t>
-            </a:r>
-            <a:r>
-              <a:rPr lang="ko-KR" altLang="en-US" baseline="0" dirty="0"/>
-              <a:t>접근 법으로 </a:t>
-            </a:r>
-            <a:r>
-              <a:rPr lang="en-US" altLang="ko-KR" baseline="0" dirty="0"/>
-              <a:t>value</a:t>
-            </a:r>
-            <a:r>
-              <a:rPr lang="ko-KR" altLang="en-US" baseline="0" dirty="0"/>
-              <a:t>를 전달해야한다는 점을 주의</a:t>
-            </a:r>
-            <a:r>
-              <a:rPr lang="en-US" altLang="ko-KR" baseline="0" dirty="0"/>
               <a:t>!</a:t>
             </a:r>
             <a:endParaRPr lang="ko-KR" altLang="en-US" dirty="0"/>
@@ -1211,7 +997,7 @@
           <a:p>
             <a:fld id="{BF7660BF-9D8A-4D9B-A2EE-C667F9509E93}" type="slidenum">
               <a:rPr lang="ko-KR" altLang="en-US" smtClean="0"/>
-              <a:t>5</a:t>
+              <a:t>4</a:t>
             </a:fld>
             <a:endParaRPr lang="ko-KR" altLang="en-US" dirty="0"/>
           </a:p>
@@ -1220,7 +1006,7 @@
     </p:spTree>
     <p:extLst>
       <p:ext uri="{BB962C8B-B14F-4D97-AF65-F5344CB8AC3E}">
-        <p14:creationId xmlns:p14="http://schemas.microsoft.com/office/powerpoint/2010/main" val="2812245869"/>
+        <p14:creationId xmlns:p14="http://schemas.microsoft.com/office/powerpoint/2010/main" val="3149561910"/>
       </p:ext>
     </p:extLst>
   </p:cSld>
@@ -1274,6 +1060,113 @@
           <a:bodyPr/>
           <a:lstStyle/>
           <a:p>
+            <a:r>
+              <a:rPr lang="ko-KR" altLang="en-US" dirty="0"/>
+              <a:t>물론 오브젝트로 이루어진 배열 뿐만 아니라 </a:t>
+            </a:r>
+            <a:endParaRPr lang="en-US" altLang="ko-KR" dirty="0"/>
+          </a:p>
+          <a:p>
+            <a:r>
+              <a:rPr lang="ko-KR" altLang="en-US" dirty="0" err="1"/>
+              <a:t>숫자형</a:t>
+            </a:r>
+            <a:r>
+              <a:rPr lang="ko-KR" altLang="en-US" dirty="0"/>
+              <a:t> 배열</a:t>
+            </a:r>
+            <a:r>
+              <a:rPr lang="en-US" altLang="ko-KR" dirty="0"/>
+              <a:t>, </a:t>
+            </a:r>
+            <a:r>
+              <a:rPr lang="ko-KR" altLang="en-US" dirty="0"/>
+              <a:t>문자형 </a:t>
+            </a:r>
+            <a:r>
+              <a:rPr lang="ko-KR" altLang="en-US" dirty="0" err="1"/>
+              <a:t>배열등</a:t>
+            </a:r>
+            <a:r>
+              <a:rPr lang="ko-KR" altLang="en-US" dirty="0"/>
+              <a:t> 모든 값을 </a:t>
+            </a:r>
+            <a:r>
+              <a:rPr lang="en-US" altLang="ko-KR" dirty="0"/>
+              <a:t>props</a:t>
+            </a:r>
+            <a:r>
+              <a:rPr lang="ko-KR" altLang="en-US" dirty="0"/>
+              <a:t>로 전달할 수 있다</a:t>
+            </a:r>
+            <a:r>
+              <a:rPr lang="en-US" altLang="ko-KR" dirty="0"/>
+              <a:t>.</a:t>
+            </a:r>
+          </a:p>
+          <a:p>
+            <a:endParaRPr lang="en-US" altLang="ko-KR" dirty="0"/>
+          </a:p>
+          <a:p>
+            <a:r>
+              <a:rPr lang="ko-KR" altLang="en-US" dirty="0" err="1"/>
+              <a:t>숫자형이나</a:t>
+            </a:r>
+            <a:r>
+              <a:rPr lang="ko-KR" altLang="en-US" dirty="0"/>
+              <a:t> </a:t>
+            </a:r>
+            <a:r>
+              <a:rPr lang="ko-KR" altLang="en-US" dirty="0" err="1"/>
+              <a:t>문자형일</a:t>
+            </a:r>
+            <a:r>
+              <a:rPr lang="ko-KR" altLang="en-US" dirty="0"/>
+              <a:t> 때는 그냥 </a:t>
+            </a:r>
+            <a:r>
+              <a:rPr lang="en-US" altLang="ko-KR" dirty="0"/>
+              <a:t>el </a:t>
+            </a:r>
+            <a:r>
+              <a:rPr lang="ko-KR" altLang="en-US" dirty="0"/>
+              <a:t>자체를 </a:t>
+            </a:r>
+            <a:r>
+              <a:rPr lang="en-US" altLang="ko-KR" dirty="0"/>
+              <a:t>props</a:t>
+            </a:r>
+            <a:r>
+              <a:rPr lang="ko-KR" altLang="en-US" dirty="0"/>
+              <a:t>로 전달하면 되지만</a:t>
+            </a:r>
+            <a:endParaRPr lang="en-US" altLang="ko-KR" dirty="0"/>
+          </a:p>
+          <a:p>
+            <a:r>
+              <a:rPr lang="ko-KR" altLang="en-US" dirty="0"/>
+              <a:t>오브젝트 배열일 때는 점</a:t>
+            </a:r>
+            <a:r>
+              <a:rPr lang="en-US" altLang="ko-KR" baseline="0" dirty="0"/>
+              <a:t> </a:t>
+            </a:r>
+            <a:r>
+              <a:rPr lang="ko-KR" altLang="en-US" baseline="0" dirty="0"/>
+              <a:t>접근 법으로 </a:t>
+            </a:r>
+            <a:r>
+              <a:rPr lang="en-US" altLang="ko-KR" baseline="0" dirty="0"/>
+              <a:t>value</a:t>
+            </a:r>
+            <a:r>
+              <a:rPr lang="ko-KR" altLang="en-US" baseline="0" dirty="0"/>
+              <a:t>를 전달해야한다는 점을 주의</a:t>
+            </a:r>
+            <a:r>
+              <a:rPr lang="en-US" altLang="ko-KR" baseline="0" dirty="0"/>
+              <a:t>!</a:t>
+            </a:r>
             <a:endParaRPr lang="ko-KR" altLang="en-US" dirty="0"/>
           </a:p>
         </p:txBody>
@@ -1293,18 +1186,18 @@
           <a:bodyPr/>
           <a:lstStyle/>
           <a:p>
-            <a:fld id="{C09E5BFC-1559-42F1-8940-AB342D56BF02}" type="slidenum">
+            <a:fld id="{BF7660BF-9D8A-4D9B-A2EE-C667F9509E93}" type="slidenum">
               <a:rPr lang="ko-KR" altLang="en-US" smtClean="0"/>
-              <a:t>7</a:t>
+              <a:t>5</a:t>
             </a:fld>
-            <a:endParaRPr lang="ko-KR" altLang="en-US"/>
+            <a:endParaRPr lang="ko-KR" altLang="en-US" dirty="0"/>
           </a:p>
         </p:txBody>
       </p:sp>
     </p:spTree>
     <p:extLst>
       <p:ext uri="{BB962C8B-B14F-4D97-AF65-F5344CB8AC3E}">
-        <p14:creationId xmlns:p14="http://schemas.microsoft.com/office/powerpoint/2010/main" val="1956268237"/>
+        <p14:creationId xmlns:p14="http://schemas.microsoft.com/office/powerpoint/2010/main" val="2812245869"/>
       </p:ext>
     </p:extLst>
   </p:cSld>
@@ -1369,7 +1262,7 @@
             <a:spLocks noGrp="1"/>
           </p:cNvSpPr>
           <p:nvPr>
-            <p:ph type="sldNum" sz="quarter" idx="5"/>
+            <p:ph type="sldNum" sz="quarter" idx="10"/>
           </p:nvPr>
         </p:nvSpPr>
         <p:spPr/>
@@ -1379,7 +1272,7 @@
           <a:p>
             <a:fld id="{C09E5BFC-1559-42F1-8940-AB342D56BF02}" type="slidenum">
               <a:rPr lang="ko-KR" altLang="en-US" smtClean="0"/>
-              <a:t>8</a:t>
+              <a:t>7</a:t>
             </a:fld>
             <a:endParaRPr lang="ko-KR" altLang="en-US"/>
           </a:p>
@@ -1388,7 +1281,7 @@
     </p:spTree>
     <p:extLst>
       <p:ext uri="{BB962C8B-B14F-4D97-AF65-F5344CB8AC3E}">
-        <p14:creationId xmlns:p14="http://schemas.microsoft.com/office/powerpoint/2010/main" val="2258629992"/>
+        <p14:creationId xmlns:p14="http://schemas.microsoft.com/office/powerpoint/2010/main" val="1956268237"/>
       </p:ext>
     </p:extLst>
   </p:cSld>
@@ -1463,7 +1356,7 @@
           <a:p>
             <a:fld id="{C09E5BFC-1559-42F1-8940-AB342D56BF02}" type="slidenum">
               <a:rPr lang="ko-KR" altLang="en-US" smtClean="0"/>
-              <a:t>9</a:t>
+              <a:t>8</a:t>
             </a:fld>
             <a:endParaRPr lang="ko-KR" altLang="en-US"/>
           </a:p>
@@ -1472,7 +1365,7 @@
     </p:spTree>
     <p:extLst>
       <p:ext uri="{BB962C8B-B14F-4D97-AF65-F5344CB8AC3E}">
-        <p14:creationId xmlns:p14="http://schemas.microsoft.com/office/powerpoint/2010/main" val="4172252523"/>
+        <p14:creationId xmlns:p14="http://schemas.microsoft.com/office/powerpoint/2010/main" val="2258629992"/>
       </p:ext>
     </p:extLst>
   </p:cSld>
@@ -1547,7 +1440,7 @@
           <a:p>
             <a:fld id="{C09E5BFC-1559-42F1-8940-AB342D56BF02}" type="slidenum">
               <a:rPr lang="ko-KR" altLang="en-US" smtClean="0"/>
-              <a:t>10</a:t>
+              <a:t>9</a:t>
             </a:fld>
             <a:endParaRPr lang="ko-KR" altLang="en-US"/>
           </a:p>
@@ -1556,7 +1449,7 @@
     </p:spTree>
     <p:extLst>
       <p:ext uri="{BB962C8B-B14F-4D97-AF65-F5344CB8AC3E}">
-        <p14:creationId xmlns:p14="http://schemas.microsoft.com/office/powerpoint/2010/main" val="2309192278"/>
+        <p14:creationId xmlns:p14="http://schemas.microsoft.com/office/powerpoint/2010/main" val="4172252523"/>
       </p:ext>
     </p:extLst>
   </p:cSld>
@@ -1631,7 +1524,7 @@
           <a:p>
             <a:fld id="{C09E5BFC-1559-42F1-8940-AB342D56BF02}" type="slidenum">
               <a:rPr lang="ko-KR" altLang="en-US" smtClean="0"/>
-              <a:t>11</a:t>
+              <a:t>10</a:t>
             </a:fld>
             <a:endParaRPr lang="ko-KR" altLang="en-US"/>
           </a:p>
@@ -1640,7 +1533,7 @@
     </p:spTree>
     <p:extLst>
       <p:ext uri="{BB962C8B-B14F-4D97-AF65-F5344CB8AC3E}">
-        <p14:creationId xmlns:p14="http://schemas.microsoft.com/office/powerpoint/2010/main" val="4174695049"/>
+        <p14:creationId xmlns:p14="http://schemas.microsoft.com/office/powerpoint/2010/main" val="2309192278"/>
       </p:ext>
     </p:extLst>
   </p:cSld>
@@ -1715,7 +1608,7 @@
           <a:p>
             <a:fld id="{C09E5BFC-1559-42F1-8940-AB342D56BF02}" type="slidenum">
               <a:rPr lang="ko-KR" altLang="en-US" smtClean="0"/>
-              <a:t>16</a:t>
+              <a:t>11</a:t>
             </a:fld>
             <a:endParaRPr lang="ko-KR" altLang="en-US"/>
           </a:p>
@@ -1724,7 +1617,7 @@
     </p:spTree>
     <p:extLst>
       <p:ext uri="{BB962C8B-B14F-4D97-AF65-F5344CB8AC3E}">
-        <p14:creationId xmlns:p14="http://schemas.microsoft.com/office/powerpoint/2010/main" val="2752525777"/>
+        <p14:creationId xmlns:p14="http://schemas.microsoft.com/office/powerpoint/2010/main" val="4174695049"/>
       </p:ext>
     </p:extLst>
   </p:cSld>
@@ -1751,43 +1644,6 @@
           <a:chExt cx="0" cy="0"/>
         </a:xfrm>
       </p:grpSpPr>
-      <p:pic>
-        <p:nvPicPr>
-          <p:cNvPr id="7" name="그림 6" descr="폰트, 텍스트, 로고, 그래픽이(가) 표시된 사진&#10;&#10;자동 생성된 설명">
-            <a:extLst>
-              <a:ext uri="{FF2B5EF4-FFF2-40B4-BE49-F238E27FC236}">
-                <a16:creationId xmlns:a16="http://schemas.microsoft.com/office/drawing/2014/main" id="{01AB1409-DEDF-C824-D8D3-05B260A93BD6}"/>
-              </a:ext>
-            </a:extLst>
-          </p:cNvPr>
-          <p:cNvPicPr>
-            <a:picLocks noChangeAspect="1"/>
-          </p:cNvPicPr>
-          <p:nvPr userDrawn="1"/>
-        </p:nvPicPr>
-        <p:blipFill>
-          <a:blip r:embed="rId2">
-            <a:alphaModFix/>
-            <a:extLst>
-              <a:ext uri="{28A0092B-C50C-407E-A947-70E740481C1C}">
-                <a14:useLocalDpi xmlns:a14="http://schemas.microsoft.com/office/drawing/2010/main" val="0"/>
-              </a:ext>
-            </a:extLst>
-          </a:blip>
-          <a:stretch>
-            <a:fillRect/>
-          </a:stretch>
-        </p:blipFill>
-        <p:spPr>
-          <a:xfrm>
-            <a:off x="118533" y="103811"/>
-            <a:ext cx="4328535" cy="2280805"/>
-          </a:xfrm>
-          <a:prstGeom prst="rect">
-            <a:avLst/>
-          </a:prstGeom>
-        </p:spPr>
-      </p:pic>
       <p:sp>
         <p:nvSpPr>
           <p:cNvPr id="2" name="제목 1">
@@ -1925,7 +1781,7 @@
           <a:p>
             <a:fld id="{0E19CB95-6D28-40F1-9DA3-1BAC5D4B5B4F}" type="datetime6">
               <a:rPr lang="ko-KR" altLang="en-US" smtClean="0"/>
-              <a:t>2023년 10월</a:t>
+              <a:t>2024년 8월</a:t>
             </a:fld>
             <a:endParaRPr lang="ko-KR" altLang="en-US"/>
           </a:p>
@@ -2040,221 +1896,47 @@
           </a:p>
         </p:txBody>
       </p:sp>
-      <p:sp>
-        <p:nvSpPr>
-          <p:cNvPr id="15" name="부제목 2">
-            <a:extLst>
-              <a:ext uri="{FF2B5EF4-FFF2-40B4-BE49-F238E27FC236}">
-                <a16:creationId xmlns:a16="http://schemas.microsoft.com/office/drawing/2014/main" id="{26026682-DE15-5F01-6FA7-8F46F9ABCC2A}"/>
-              </a:ext>
-            </a:extLst>
-          </p:cNvPr>
-          <p:cNvSpPr txBox="1">
-            <a:spLocks/>
-          </p:cNvSpPr>
+      <p:pic>
+        <p:nvPicPr>
+          <p:cNvPr id="5" name="그림 4" descr="그래픽, 그래픽 디자인, 클립아트, 다채로움이(가) 표시된 사진&#10;&#10;자동 생성된 설명">
+            <a:extLst>
+              <a:ext uri="{FF2B5EF4-FFF2-40B4-BE49-F238E27FC236}">
+                <a16:creationId xmlns:a16="http://schemas.microsoft.com/office/drawing/2014/main" id="{BE5A577B-81A7-2FA6-9E57-9DCEC5BF71F7}"/>
+              </a:ext>
+            </a:extLst>
+          </p:cNvPr>
+          <p:cNvPicPr>
+            <a:picLocks noChangeAspect="1"/>
+          </p:cNvPicPr>
           <p:nvPr userDrawn="1"/>
-        </p:nvSpPr>
+        </p:nvPicPr>
+        <p:blipFill>
+          <a:blip r:embed="rId2" cstate="hqprint">
+            <a:alphaModFix amt="20000"/>
+            <a:extLst>
+              <a:ext uri="{28A0092B-C50C-407E-A947-70E740481C1C}">
+                <a14:useLocalDpi xmlns:a14="http://schemas.microsoft.com/office/drawing/2010/main" val="0"/>
+              </a:ext>
+            </a:extLst>
+          </a:blip>
+          <a:stretch>
+            <a:fillRect/>
+          </a:stretch>
+        </p:blipFill>
         <p:spPr>
           <a:xfrm>
-            <a:off x="9110749" y="5933035"/>
-            <a:ext cx="2948515" cy="365125"/>
+            <a:off x="4296000" y="1461146"/>
+            <a:ext cx="3600000" cy="3652155"/>
           </a:xfrm>
           <a:prstGeom prst="rect">
             <a:avLst/>
           </a:prstGeom>
         </p:spPr>
-        <p:txBody>
-          <a:bodyPr vert="horz" lIns="91440" tIns="45720" rIns="91440" bIns="45720" rtlCol="0" anchor="ctr">
-            <a:noAutofit/>
-          </a:bodyPr>
-          <a:lstStyle>
-            <a:lvl1pPr marL="228600" indent="-228600" algn="l" defTabSz="914400" rtl="0" eaLnBrk="1" latinLnBrk="1" hangingPunct="1">
-              <a:lnSpc>
-                <a:spcPct val="90000"/>
-              </a:lnSpc>
-              <a:spcBef>
-                <a:spcPts val="1000"/>
-              </a:spcBef>
-              <a:buFont typeface="Arial" panose="020B0604020202020204" pitchFamily="34" charset="0"/>
-              <a:buChar char="•"/>
-              <a:defRPr sz="2800" kern="1200">
-                <a:solidFill>
-                  <a:schemeClr val="tx1"/>
-                </a:solidFill>
-                <a:latin typeface="+mn-lt"/>
-                <a:ea typeface="+mn-ea"/>
-                <a:cs typeface="+mn-cs"/>
-              </a:defRPr>
-            </a:lvl1pPr>
-            <a:lvl2pPr marL="685800" indent="-228600" algn="l" defTabSz="914400" rtl="0" eaLnBrk="1" latinLnBrk="1" hangingPunct="1">
-              <a:lnSpc>
-                <a:spcPct val="90000"/>
-              </a:lnSpc>
-              <a:spcBef>
-                <a:spcPts val="500"/>
-              </a:spcBef>
-              <a:buFont typeface="Arial" panose="020B0604020202020204" pitchFamily="34" charset="0"/>
-              <a:buChar char="•"/>
-              <a:defRPr sz="2400" kern="1200">
-                <a:solidFill>
-                  <a:schemeClr val="tx1"/>
-                </a:solidFill>
-                <a:latin typeface="+mn-lt"/>
-                <a:ea typeface="+mn-ea"/>
-                <a:cs typeface="+mn-cs"/>
-              </a:defRPr>
-            </a:lvl2pPr>
-            <a:lvl3pPr marL="1143000" indent="-228600" algn="l" defTabSz="914400" rtl="0" eaLnBrk="1" latinLnBrk="1" hangingPunct="1">
-              <a:lnSpc>
-                <a:spcPct val="90000"/>
-              </a:lnSpc>
-              <a:spcBef>
-                <a:spcPts val="500"/>
-              </a:spcBef>
-              <a:buFont typeface="Arial" panose="020B0604020202020204" pitchFamily="34" charset="0"/>
-              <a:buChar char="•"/>
-              <a:defRPr sz="2000" kern="1200">
-                <a:solidFill>
-                  <a:schemeClr val="tx1"/>
-                </a:solidFill>
-                <a:latin typeface="+mn-lt"/>
-                <a:ea typeface="+mn-ea"/>
-                <a:cs typeface="+mn-cs"/>
-              </a:defRPr>
-            </a:lvl3pPr>
-            <a:lvl4pPr marL="1600200" indent="-228600" algn="l" defTabSz="914400" rtl="0" eaLnBrk="1" latinLnBrk="1" hangingPunct="1">
-              <a:lnSpc>
-                <a:spcPct val="90000"/>
-              </a:lnSpc>
-              <a:spcBef>
-                <a:spcPts val="500"/>
-              </a:spcBef>
-              <a:buFont typeface="Arial" panose="020B0604020202020204" pitchFamily="34" charset="0"/>
-              <a:buChar char="•"/>
-              <a:defRPr sz="1800" kern="1200">
-                <a:solidFill>
-                  <a:schemeClr val="tx1"/>
-                </a:solidFill>
-                <a:latin typeface="+mn-lt"/>
-                <a:ea typeface="+mn-ea"/>
-                <a:cs typeface="+mn-cs"/>
-              </a:defRPr>
-            </a:lvl4pPr>
-            <a:lvl5pPr marL="2057400" indent="-228600" algn="l" defTabSz="914400" rtl="0" eaLnBrk="1" latinLnBrk="1" hangingPunct="1">
-              <a:lnSpc>
-                <a:spcPct val="90000"/>
-              </a:lnSpc>
-              <a:spcBef>
-                <a:spcPts val="500"/>
-              </a:spcBef>
-              <a:buFont typeface="Arial" panose="020B0604020202020204" pitchFamily="34" charset="0"/>
-              <a:buChar char="•"/>
-              <a:defRPr sz="1800" kern="1200">
-                <a:solidFill>
-                  <a:schemeClr val="tx1"/>
-                </a:solidFill>
-                <a:latin typeface="+mn-lt"/>
-                <a:ea typeface="+mn-ea"/>
-                <a:cs typeface="+mn-cs"/>
-              </a:defRPr>
-            </a:lvl5pPr>
-            <a:lvl6pPr marL="2514600" indent="-228600" algn="l" defTabSz="914400" rtl="0" eaLnBrk="1" latinLnBrk="1" hangingPunct="1">
-              <a:lnSpc>
-                <a:spcPct val="90000"/>
-              </a:lnSpc>
-              <a:spcBef>
-                <a:spcPts val="500"/>
-              </a:spcBef>
-              <a:buFont typeface="Arial" panose="020B0604020202020204" pitchFamily="34" charset="0"/>
-              <a:buChar char="•"/>
-              <a:defRPr sz="1800" kern="1200">
-                <a:solidFill>
-                  <a:schemeClr val="tx1"/>
-                </a:solidFill>
-                <a:latin typeface="+mn-lt"/>
-                <a:ea typeface="+mn-ea"/>
-                <a:cs typeface="+mn-cs"/>
-              </a:defRPr>
-            </a:lvl6pPr>
-            <a:lvl7pPr marL="2971800" indent="-228600" algn="l" defTabSz="914400" rtl="0" eaLnBrk="1" latinLnBrk="1" hangingPunct="1">
-              <a:lnSpc>
-                <a:spcPct val="90000"/>
-              </a:lnSpc>
-              <a:spcBef>
-                <a:spcPts val="500"/>
-              </a:spcBef>
-              <a:buFont typeface="Arial" panose="020B0604020202020204" pitchFamily="34" charset="0"/>
-              <a:buChar char="•"/>
-              <a:defRPr sz="1800" kern="1200">
-                <a:solidFill>
-                  <a:schemeClr val="tx1"/>
-                </a:solidFill>
-                <a:latin typeface="+mn-lt"/>
-                <a:ea typeface="+mn-ea"/>
-                <a:cs typeface="+mn-cs"/>
-              </a:defRPr>
-            </a:lvl7pPr>
-            <a:lvl8pPr marL="3429000" indent="-228600" algn="l" defTabSz="914400" rtl="0" eaLnBrk="1" latinLnBrk="1" hangingPunct="1">
-              <a:lnSpc>
-                <a:spcPct val="90000"/>
-              </a:lnSpc>
-              <a:spcBef>
-                <a:spcPts val="500"/>
-              </a:spcBef>
-              <a:buFont typeface="Arial" panose="020B0604020202020204" pitchFamily="34" charset="0"/>
-              <a:buChar char="•"/>
-              <a:defRPr sz="1800" kern="1200">
-                <a:solidFill>
-                  <a:schemeClr val="tx1"/>
-                </a:solidFill>
-                <a:latin typeface="+mn-lt"/>
-                <a:ea typeface="+mn-ea"/>
-                <a:cs typeface="+mn-cs"/>
-              </a:defRPr>
-            </a:lvl8pPr>
-            <a:lvl9pPr marL="3886200" indent="-228600" algn="l" defTabSz="914400" rtl="0" eaLnBrk="1" latinLnBrk="1" hangingPunct="1">
-              <a:lnSpc>
-                <a:spcPct val="90000"/>
-              </a:lnSpc>
-              <a:spcBef>
-                <a:spcPts val="500"/>
-              </a:spcBef>
-              <a:buFont typeface="Arial" panose="020B0604020202020204" pitchFamily="34" charset="0"/>
-              <a:buChar char="•"/>
-              <a:defRPr sz="1800" kern="1200">
-                <a:solidFill>
-                  <a:schemeClr val="tx1"/>
-                </a:solidFill>
-                <a:latin typeface="+mn-lt"/>
-                <a:ea typeface="+mn-ea"/>
-                <a:cs typeface="+mn-cs"/>
-              </a:defRPr>
-            </a:lvl9pPr>
-          </a:lstStyle>
-          <a:p>
-            <a:pPr marL="0" indent="0" algn="r">
-              <a:buNone/>
-            </a:pPr>
-            <a:r>
-              <a:rPr lang="en-US" altLang="ko-KR" sz="2000" u="none" dirty="0"/>
-              <a:t>With. </a:t>
-            </a:r>
-            <a:r>
-              <a:rPr lang="ko-KR" altLang="en-US" sz="2000" u="none" dirty="0"/>
-              <a:t>팀 </a:t>
-            </a:r>
-            <a:r>
-              <a:rPr lang="ko-KR" altLang="en-US" sz="2000" u="none" dirty="0" err="1"/>
-              <a:t>뤼쳐드</a:t>
-            </a:r>
-            <a:endParaRPr lang="ko-KR" altLang="en-US" sz="2000" u="none" dirty="0"/>
-          </a:p>
-        </p:txBody>
-      </p:sp>
+      </p:pic>
     </p:spTree>
     <p:extLst>
       <p:ext uri="{BB962C8B-B14F-4D97-AF65-F5344CB8AC3E}">
-        <p14:creationId xmlns:p14="http://schemas.microsoft.com/office/powerpoint/2010/main" val="2104502687"/>
+        <p14:creationId xmlns:p14="http://schemas.microsoft.com/office/powerpoint/2010/main" val="2225826181"/>
       </p:ext>
     </p:extLst>
   </p:cSld>
@@ -2307,12 +1989,12 @@
           <a:bodyPr anchor="b"/>
           <a:lstStyle>
             <a:lvl1pPr>
-              <a:defRPr sz="3200"/>
+              <a:defRPr sz="3200" b="1"/>
             </a:lvl1pPr>
           </a:lstStyle>
           <a:p>
             <a:r>
-              <a:rPr lang="ko-KR" altLang="en-US"/>
+              <a:rPr lang="ko-KR" altLang="en-US" dirty="0"/>
               <a:t>마스터 제목 스타일 편집</a:t>
             </a:r>
           </a:p>
@@ -2479,7 +2161,7 @@
           <a:p>
             <a:fld id="{C4A39A32-5728-48B8-9F9C-437D214CCAF1}" type="datetime6">
               <a:rPr lang="ko-KR" altLang="en-US" smtClean="0"/>
-              <a:t>2023년 10월</a:t>
+              <a:t>2024년 8월</a:t>
             </a:fld>
             <a:endParaRPr lang="ko-KR" altLang="en-US"/>
           </a:p>
@@ -2542,7 +2224,7 @@
     </p:spTree>
     <p:extLst>
       <p:ext uri="{BB962C8B-B14F-4D97-AF65-F5344CB8AC3E}">
-        <p14:creationId xmlns:p14="http://schemas.microsoft.com/office/powerpoint/2010/main" val="3456815718"/>
+        <p14:creationId xmlns:p14="http://schemas.microsoft.com/office/powerpoint/2010/main" val="1585964695"/>
       </p:ext>
     </p:extLst>
   </p:cSld>
@@ -2588,10 +2270,14 @@
         <p:spPr/>
         <p:txBody>
           <a:bodyPr/>
-          <a:lstStyle/>
-          <a:p>
-            <a:r>
-              <a:rPr lang="ko-KR" altLang="en-US"/>
+          <a:lstStyle>
+            <a:lvl1pPr>
+              <a:defRPr b="1"/>
+            </a:lvl1pPr>
+          </a:lstStyle>
+          <a:p>
+            <a:r>
+              <a:rPr lang="ko-KR" altLang="en-US" dirty="0"/>
               <a:t>마스터 제목 스타일 편집</a:t>
             </a:r>
           </a:p>
@@ -2677,7 +2363,7 @@
           <a:p>
             <a:fld id="{3BECC8BA-EBCB-4BF9-8E87-970CE0138376}" type="datetime6">
               <a:rPr lang="ko-KR" altLang="en-US" smtClean="0"/>
-              <a:t>2023년 10월</a:t>
+              <a:t>2024년 8월</a:t>
             </a:fld>
             <a:endParaRPr lang="ko-KR" altLang="en-US"/>
           </a:p>
@@ -2740,7 +2426,7 @@
     </p:spTree>
     <p:extLst>
       <p:ext uri="{BB962C8B-B14F-4D97-AF65-F5344CB8AC3E}">
-        <p14:creationId xmlns:p14="http://schemas.microsoft.com/office/powerpoint/2010/main" val="3602548054"/>
+        <p14:creationId xmlns:p14="http://schemas.microsoft.com/office/powerpoint/2010/main" val="1454606813"/>
       </p:ext>
     </p:extLst>
   </p:cSld>
@@ -2885,7 +2571,7 @@
           <a:p>
             <a:fld id="{7869FA6E-4699-4AC6-B2CB-4E60A58ED7A8}" type="datetime6">
               <a:rPr lang="ko-KR" altLang="en-US" smtClean="0"/>
-              <a:t>2023년 10월</a:t>
+              <a:t>2024년 8월</a:t>
             </a:fld>
             <a:endParaRPr lang="ko-KR" altLang="en-US"/>
           </a:p>
@@ -2948,7 +2634,7 @@
     </p:spTree>
     <p:extLst>
       <p:ext uri="{BB962C8B-B14F-4D97-AF65-F5344CB8AC3E}">
-        <p14:creationId xmlns:p14="http://schemas.microsoft.com/office/powerpoint/2010/main" val="2313786568"/>
+        <p14:creationId xmlns:p14="http://schemas.microsoft.com/office/powerpoint/2010/main" val="2639700215"/>
       </p:ext>
     </p:extLst>
   </p:cSld>
@@ -2998,7 +2684,7 @@
           <a:p>
             <a:fld id="{0E19CB95-6D28-40F1-9DA3-1BAC5D4B5B4F}" type="datetime6">
               <a:rPr lang="ko-KR" altLang="en-US" smtClean="0"/>
-              <a:t>2023년 10월</a:t>
+              <a:t>2024년 8월</a:t>
             </a:fld>
             <a:endParaRPr lang="ko-KR" altLang="en-US"/>
           </a:p>
@@ -3135,7 +2821,7 @@
           </a:bodyPr>
           <a:lstStyle>
             <a:lvl1pPr algn="ctr">
-              <a:defRPr sz="8000" b="0">
+              <a:defRPr sz="8000" b="1">
                 <a:solidFill>
                   <a:srgbClr val="6EC173"/>
                 </a:solidFill>
@@ -3153,7 +2839,7 @@
     </p:spTree>
     <p:extLst>
       <p:ext uri="{BB962C8B-B14F-4D97-AF65-F5344CB8AC3E}">
-        <p14:creationId xmlns:p14="http://schemas.microsoft.com/office/powerpoint/2010/main" val="2608942727"/>
+        <p14:creationId xmlns:p14="http://schemas.microsoft.com/office/powerpoint/2010/main" val="630910014"/>
       </p:ext>
     </p:extLst>
   </p:cSld>
@@ -3260,7 +2946,7 @@
           <a:p>
             <a:fld id="{3C9CE3CE-253F-4F9D-BA15-C226C8D8501E}" type="datetime6">
               <a:rPr lang="ko-KR" altLang="en-US" smtClean="0"/>
-              <a:t>2023년 10월</a:t>
+              <a:t>2024년 8월</a:t>
             </a:fld>
             <a:endParaRPr lang="ko-KR" altLang="en-US"/>
           </a:p>
@@ -3349,7 +3035,11 @@
           <a:bodyPr vert="horz" lIns="91440" tIns="45720" rIns="91440" bIns="45720" rtlCol="0" anchor="ctr">
             <a:normAutofit/>
           </a:bodyPr>
-          <a:lstStyle/>
+          <a:lstStyle>
+            <a:lvl1pPr>
+              <a:defRPr b="1"/>
+            </a:lvl1pPr>
+          </a:lstStyle>
           <a:p>
             <a:r>
               <a:rPr lang="ko-KR" altLang="en-US" dirty="0"/>
@@ -3361,7 +3051,7 @@
     </p:spTree>
     <p:extLst>
       <p:ext uri="{BB962C8B-B14F-4D97-AF65-F5344CB8AC3E}">
-        <p14:creationId xmlns:p14="http://schemas.microsoft.com/office/powerpoint/2010/main" val="2493143943"/>
+        <p14:creationId xmlns:p14="http://schemas.microsoft.com/office/powerpoint/2010/main" val="1499747461"/>
       </p:ext>
     </p:extLst>
   </p:cSld>
@@ -3573,7 +3263,7 @@
           <a:p>
             <a:fld id="{BE5A7087-D460-46DD-B430-F8D9B9677D08}" type="datetime6">
               <a:rPr lang="ko-KR" altLang="en-US" smtClean="0"/>
-              <a:t>2023년 10월</a:t>
+              <a:t>2024년 8월</a:t>
             </a:fld>
             <a:endParaRPr lang="ko-KR" altLang="en-US"/>
           </a:p>
@@ -3636,7 +3326,7 @@
     </p:spTree>
     <p:extLst>
       <p:ext uri="{BB962C8B-B14F-4D97-AF65-F5344CB8AC3E}">
-        <p14:creationId xmlns:p14="http://schemas.microsoft.com/office/powerpoint/2010/main" val="1559029814"/>
+        <p14:creationId xmlns:p14="http://schemas.microsoft.com/office/powerpoint/2010/main" val="2047151968"/>
       </p:ext>
     </p:extLst>
   </p:cSld>
@@ -3682,10 +3372,14 @@
         <p:spPr/>
         <p:txBody>
           <a:bodyPr/>
-          <a:lstStyle/>
-          <a:p>
-            <a:r>
-              <a:rPr lang="ko-KR" altLang="en-US"/>
+          <a:lstStyle>
+            <a:lvl1pPr>
+              <a:defRPr b="1"/>
+            </a:lvl1pPr>
+          </a:lstStyle>
+          <a:p>
+            <a:r>
+              <a:rPr lang="ko-KR" altLang="en-US" dirty="0"/>
               <a:t>마스터 제목 스타일 편집</a:t>
             </a:r>
           </a:p>
@@ -3838,7 +3532,7 @@
           <a:p>
             <a:fld id="{0581BA25-D675-4234-A003-8449BDEEF18E}" type="datetime6">
               <a:rPr lang="ko-KR" altLang="en-US" smtClean="0"/>
-              <a:t>2023년 10월</a:t>
+              <a:t>2024년 8월</a:t>
             </a:fld>
             <a:endParaRPr lang="ko-KR" altLang="en-US"/>
           </a:p>
@@ -3901,7 +3595,7 @@
     </p:spTree>
     <p:extLst>
       <p:ext uri="{BB962C8B-B14F-4D97-AF65-F5344CB8AC3E}">
-        <p14:creationId xmlns:p14="http://schemas.microsoft.com/office/powerpoint/2010/main" val="947449693"/>
+        <p14:creationId xmlns:p14="http://schemas.microsoft.com/office/powerpoint/2010/main" val="1814352053"/>
       </p:ext>
     </p:extLst>
   </p:cSld>
@@ -3952,10 +3646,14 @@
         </p:spPr>
         <p:txBody>
           <a:bodyPr/>
-          <a:lstStyle/>
-          <a:p>
-            <a:r>
-              <a:rPr lang="ko-KR" altLang="en-US"/>
+          <a:lstStyle>
+            <a:lvl1pPr>
+              <a:defRPr b="1"/>
+            </a:lvl1pPr>
+          </a:lstStyle>
+          <a:p>
+            <a:r>
+              <a:rPr lang="ko-KR" altLang="en-US" dirty="0"/>
               <a:t>마스터 제목 스타일 편집</a:t>
             </a:r>
           </a:p>
@@ -4250,7 +3948,7 @@
           <a:p>
             <a:fld id="{26155C29-A87F-46F0-A24C-6C9F0A4BF6AA}" type="datetime6">
               <a:rPr lang="ko-KR" altLang="en-US" smtClean="0"/>
-              <a:t>2023년 10월</a:t>
+              <a:t>2024년 8월</a:t>
             </a:fld>
             <a:endParaRPr lang="ko-KR" altLang="en-US"/>
           </a:p>
@@ -4313,7 +4011,7 @@
     </p:spTree>
     <p:extLst>
       <p:ext uri="{BB962C8B-B14F-4D97-AF65-F5344CB8AC3E}">
-        <p14:creationId xmlns:p14="http://schemas.microsoft.com/office/powerpoint/2010/main" val="2333661961"/>
+        <p14:creationId xmlns:p14="http://schemas.microsoft.com/office/powerpoint/2010/main" val="4248302403"/>
       </p:ext>
     </p:extLst>
   </p:cSld>
@@ -4359,10 +4057,14 @@
         <p:spPr/>
         <p:txBody>
           <a:bodyPr/>
-          <a:lstStyle/>
-          <a:p>
-            <a:r>
-              <a:rPr lang="ko-KR" altLang="en-US"/>
+          <a:lstStyle>
+            <a:lvl1pPr>
+              <a:defRPr b="1"/>
+            </a:lvl1pPr>
+          </a:lstStyle>
+          <a:p>
+            <a:r>
+              <a:rPr lang="ko-KR" altLang="en-US" dirty="0"/>
               <a:t>마스터 제목 스타일 편집</a:t>
             </a:r>
           </a:p>
@@ -4391,7 +4093,7 @@
           <a:p>
             <a:fld id="{DD2EDD62-8757-43DB-BAE0-460422B548EA}" type="datetime6">
               <a:rPr lang="ko-KR" altLang="en-US" smtClean="0"/>
-              <a:t>2023년 10월</a:t>
+              <a:t>2024년 8월</a:t>
             </a:fld>
             <a:endParaRPr lang="ko-KR" altLang="en-US"/>
           </a:p>
@@ -4454,7 +4156,7 @@
     </p:spTree>
     <p:extLst>
       <p:ext uri="{BB962C8B-B14F-4D97-AF65-F5344CB8AC3E}">
-        <p14:creationId xmlns:p14="http://schemas.microsoft.com/office/powerpoint/2010/main" val="1324141276"/>
+        <p14:creationId xmlns:p14="http://schemas.microsoft.com/office/powerpoint/2010/main" val="1981089320"/>
       </p:ext>
     </p:extLst>
   </p:cSld>
@@ -4504,7 +4206,7 @@
           <a:p>
             <a:fld id="{DC6A871B-4800-495F-AC75-93D44C7DEBA5}" type="datetime6">
               <a:rPr lang="ko-KR" altLang="en-US" smtClean="0"/>
-              <a:t>2023년 10월</a:t>
+              <a:t>2024년 8월</a:t>
             </a:fld>
             <a:endParaRPr lang="ko-KR" altLang="en-US"/>
           </a:p>
@@ -4567,7 +4269,7 @@
     </p:spTree>
     <p:extLst>
       <p:ext uri="{BB962C8B-B14F-4D97-AF65-F5344CB8AC3E}">
-        <p14:creationId xmlns:p14="http://schemas.microsoft.com/office/powerpoint/2010/main" val="1014306624"/>
+        <p14:creationId xmlns:p14="http://schemas.microsoft.com/office/powerpoint/2010/main" val="4152272579"/>
       </p:ext>
     </p:extLst>
   </p:cSld>
@@ -4620,12 +4322,12 @@
           <a:bodyPr anchor="b"/>
           <a:lstStyle>
             <a:lvl1pPr>
-              <a:defRPr sz="3200"/>
+              <a:defRPr sz="3200" b="1"/>
             </a:lvl1pPr>
           </a:lstStyle>
           <a:p>
             <a:r>
-              <a:rPr lang="ko-KR" altLang="en-US"/>
+              <a:rPr lang="ko-KR" altLang="en-US" dirty="0"/>
               <a:t>마스터 제목 스타일 편집</a:t>
             </a:r>
           </a:p>
@@ -4815,7 +4517,7 @@
           <a:p>
             <a:fld id="{59605888-30A6-49BB-95E2-DEAE4E5B09E9}" type="datetime6">
               <a:rPr lang="ko-KR" altLang="en-US" smtClean="0"/>
-              <a:t>2023년 10월</a:t>
+              <a:t>2024년 8월</a:t>
             </a:fld>
             <a:endParaRPr lang="ko-KR" altLang="en-US"/>
           </a:p>
@@ -4878,7 +4580,7 @@
     </p:spTree>
     <p:extLst>
       <p:ext uri="{BB962C8B-B14F-4D97-AF65-F5344CB8AC3E}">
-        <p14:creationId xmlns:p14="http://schemas.microsoft.com/office/powerpoint/2010/main" val="2040181567"/>
+        <p14:creationId xmlns:p14="http://schemas.microsoft.com/office/powerpoint/2010/main" val="2345640581"/>
       </p:ext>
     </p:extLst>
   </p:cSld>
@@ -4981,35 +4683,35 @@
           <a:p>
             <a:pPr lvl="0"/>
             <a:r>
-              <a:rPr lang="ko-KR" altLang="en-US"/>
+              <a:rPr lang="ko-KR" altLang="en-US" dirty="0"/>
               <a:t>마스터 텍스트 스타일을 편집하려면 클릭</a:t>
             </a:r>
           </a:p>
           <a:p>
             <a:pPr lvl="1"/>
             <a:r>
-              <a:rPr lang="ko-KR" altLang="en-US"/>
+              <a:rPr lang="ko-KR" altLang="en-US" dirty="0"/>
               <a:t>두 번째 수준</a:t>
             </a:r>
           </a:p>
           <a:p>
             <a:pPr lvl="2"/>
             <a:r>
-              <a:rPr lang="ko-KR" altLang="en-US"/>
+              <a:rPr lang="ko-KR" altLang="en-US" dirty="0"/>
               <a:t>세 번째 수준</a:t>
             </a:r>
           </a:p>
           <a:p>
             <a:pPr lvl="3"/>
             <a:r>
-              <a:rPr lang="ko-KR" altLang="en-US"/>
+              <a:rPr lang="ko-KR" altLang="en-US" dirty="0"/>
               <a:t>네 번째 수준</a:t>
             </a:r>
           </a:p>
           <a:p>
             <a:pPr lvl="4"/>
             <a:r>
-              <a:rPr lang="ko-KR" altLang="en-US"/>
+              <a:rPr lang="ko-KR" altLang="en-US" dirty="0"/>
               <a:t>다섯 번째 수준</a:t>
             </a:r>
           </a:p>
@@ -5056,7 +4758,7 @@
           <a:p>
             <a:fld id="{8691C14A-5735-4A8B-B68B-DEC1DC2A3813}" type="datetime6">
               <a:rPr lang="ko-KR" altLang="en-US" smtClean="0"/>
-              <a:t>2023년 10월</a:t>
+              <a:t>2024년 8월</a:t>
             </a:fld>
             <a:endParaRPr lang="ko-KR" altLang="en-US"/>
           </a:p>
@@ -5208,10 +4910,10 @@
       </p:sp>
       <p:pic>
         <p:nvPicPr>
-          <p:cNvPr id="9" name="그림 8" descr="텍스트, 클립아트이(가) 표시된 사진&#10;&#10;자동 생성된 설명">
-            <a:extLst>
-              <a:ext uri="{FF2B5EF4-FFF2-40B4-BE49-F238E27FC236}">
-                <a16:creationId xmlns:a16="http://schemas.microsoft.com/office/drawing/2014/main" id="{CFFA81A6-6D9A-9C22-6A01-103FCC7108B8}"/>
+          <p:cNvPr id="14" name="그림 13" descr="그래픽, 그래픽 디자인, 폰트, 원이(가) 표시된 사진&#10;&#10;자동 생성된 설명">
+            <a:extLst>
+              <a:ext uri="{FF2B5EF4-FFF2-40B4-BE49-F238E27FC236}">
+                <a16:creationId xmlns:a16="http://schemas.microsoft.com/office/drawing/2014/main" id="{0EB71D7B-83F1-1414-954A-8C79751B7793}"/>
               </a:ext>
             </a:extLst>
           </p:cNvPr>
@@ -5222,7 +4924,6 @@
         </p:nvPicPr>
         <p:blipFill>
           <a:blip r:embed="rId14" cstate="hqprint">
-            <a:alphaModFix/>
             <a:extLst>
               <a:ext uri="{28A0092B-C50C-407E-A947-70E740481C1C}">
                 <a14:useLocalDpi xmlns:a14="http://schemas.microsoft.com/office/drawing/2010/main" val="0"/>
@@ -5235,136 +4936,35 @@
         </p:blipFill>
         <p:spPr>
           <a:xfrm>
-            <a:off x="11044576" y="140110"/>
-            <a:ext cx="1026976" cy="205105"/>
+            <a:off x="10835681" y="96056"/>
+            <a:ext cx="1260000" cy="270857"/>
           </a:xfrm>
           <a:prstGeom prst="rect">
             <a:avLst/>
           </a:prstGeom>
         </p:spPr>
       </p:pic>
-      <p:sp>
-        <p:nvSpPr>
-          <p:cNvPr id="10" name="TextBox 9">
-            <a:extLst>
-              <a:ext uri="{FF2B5EF4-FFF2-40B4-BE49-F238E27FC236}">
-                <a16:creationId xmlns:a16="http://schemas.microsoft.com/office/drawing/2014/main" id="{2E8CEA0B-0194-B9A0-705F-CAB04B3523DA}"/>
-              </a:ext>
-            </a:extLst>
-          </p:cNvPr>
-          <p:cNvSpPr txBox="1"/>
-          <p:nvPr userDrawn="1"/>
-        </p:nvSpPr>
-        <p:spPr>
-          <a:xfrm>
-            <a:off x="10814758" y="104713"/>
-            <a:ext cx="227015" cy="307777"/>
-          </a:xfrm>
-          <a:prstGeom prst="rect">
-            <a:avLst/>
-          </a:prstGeom>
-          <a:noFill/>
-        </p:spPr>
-        <p:txBody>
-          <a:bodyPr wrap="square" rtlCol="0">
-            <a:spAutoFit/>
-          </a:bodyPr>
-          <a:lstStyle/>
-          <a:p>
-            <a:pPr algn="ctr"/>
-            <a:r>
-              <a:rPr lang="en-US" altLang="ko-KR" sz="1400" b="1" dirty="0">
-                <a:solidFill>
-                  <a:schemeClr val="tx1"/>
-                </a:solidFill>
-              </a:rPr>
-              <a:t>X</a:t>
-            </a:r>
-            <a:endParaRPr lang="ko-KR" altLang="en-US" sz="2000" b="1" dirty="0">
-              <a:solidFill>
-                <a:schemeClr val="tx1"/>
-              </a:solidFill>
-            </a:endParaRPr>
-          </a:p>
-        </p:txBody>
-      </p:sp>
-      <p:pic>
-        <p:nvPicPr>
-          <p:cNvPr id="11" name="Picture 4" descr="청년취업사관학교, 새싹(SeSAC) - YouTube">
-            <a:extLst>
-              <a:ext uri="{FF2B5EF4-FFF2-40B4-BE49-F238E27FC236}">
-                <a16:creationId xmlns:a16="http://schemas.microsoft.com/office/drawing/2014/main" id="{AD5D531A-42B5-6D12-7A47-FFEB75D29CB0}"/>
-              </a:ext>
-            </a:extLst>
-          </p:cNvPr>
-          <p:cNvPicPr>
-            <a:picLocks noChangeAspect="1" noChangeArrowheads="1"/>
-          </p:cNvPicPr>
-          <p:nvPr userDrawn="1"/>
-        </p:nvPicPr>
-        <p:blipFill>
-          <a:blip r:embed="rId15" cstate="hqprint">
-            <a:extLst>
-              <a:ext uri="{BEBA8EAE-BF5A-486C-A8C5-ECC9F3942E4B}">
-                <a14:imgProps xmlns:a14="http://schemas.microsoft.com/office/drawing/2010/main">
-                  <a14:imgLayer r:embed="rId16">
-                    <a14:imgEffect>
-                      <a14:backgroundRemoval t="10000" b="90000" l="10000" r="90000"/>
-                    </a14:imgEffect>
-                  </a14:imgLayer>
-                </a14:imgProps>
-              </a:ext>
-              <a:ext uri="{28A0092B-C50C-407E-A947-70E740481C1C}">
-                <a14:useLocalDpi xmlns:a14="http://schemas.microsoft.com/office/drawing/2010/main" val="0"/>
-              </a:ext>
-            </a:extLst>
-          </a:blip>
-          <a:srcRect/>
-          <a:stretch>
-            <a:fillRect/>
-          </a:stretch>
-        </p:blipFill>
-        <p:spPr bwMode="auto">
-          <a:xfrm>
-            <a:off x="10492653" y="54125"/>
-            <a:ext cx="371243" cy="371243"/>
-          </a:xfrm>
-          <a:prstGeom prst="rect">
-            <a:avLst/>
-          </a:prstGeom>
-          <a:noFill/>
-          <a:extLst>
-            <a:ext uri="{909E8E84-426E-40DD-AFC4-6F175D3DCCD1}">
-              <a14:hiddenFill xmlns:a14="http://schemas.microsoft.com/office/drawing/2010/main">
-                <a:solidFill>
-                  <a:srgbClr val="FFFFFF"/>
-                </a:solidFill>
-              </a14:hiddenFill>
-            </a:ext>
-          </a:extLst>
-        </p:spPr>
-      </p:pic>
     </p:spTree>
     <p:extLst>
       <p:ext uri="{BB962C8B-B14F-4D97-AF65-F5344CB8AC3E}">
-        <p14:creationId xmlns:p14="http://schemas.microsoft.com/office/powerpoint/2010/main" val="579173985"/>
+        <p14:creationId xmlns:p14="http://schemas.microsoft.com/office/powerpoint/2010/main" val="4024067678"/>
       </p:ext>
     </p:extLst>
   </p:cSld>
   <p:clrMap bg1="lt1" tx1="dk1" bg2="lt2" tx2="dk2" accent1="accent1" accent2="accent2" accent3="accent3" accent4="accent4" accent5="accent5" accent6="accent6" hlink="hlink" folHlink="folHlink"/>
   <p:sldLayoutIdLst>
-    <p:sldLayoutId id="2147483674" r:id="rId1"/>
-    <p:sldLayoutId id="2147483675" r:id="rId2"/>
-    <p:sldLayoutId id="2147483676" r:id="rId3"/>
-    <p:sldLayoutId id="2147483677" r:id="rId4"/>
-    <p:sldLayoutId id="2147483678" r:id="rId5"/>
-    <p:sldLayoutId id="2147483679" r:id="rId6"/>
-    <p:sldLayoutId id="2147483680" r:id="rId7"/>
-    <p:sldLayoutId id="2147483681" r:id="rId8"/>
-    <p:sldLayoutId id="2147483682" r:id="rId9"/>
-    <p:sldLayoutId id="2147483683" r:id="rId10"/>
-    <p:sldLayoutId id="2147483684" r:id="rId11"/>
-    <p:sldLayoutId id="2147483685" r:id="rId12"/>
+    <p:sldLayoutId id="2147483687" r:id="rId1"/>
+    <p:sldLayoutId id="2147483688" r:id="rId2"/>
+    <p:sldLayoutId id="2147483689" r:id="rId3"/>
+    <p:sldLayoutId id="2147483690" r:id="rId4"/>
+    <p:sldLayoutId id="2147483691" r:id="rId5"/>
+    <p:sldLayoutId id="2147483692" r:id="rId6"/>
+    <p:sldLayoutId id="2147483693" r:id="rId7"/>
+    <p:sldLayoutId id="2147483694" r:id="rId8"/>
+    <p:sldLayoutId id="2147483695" r:id="rId9"/>
+    <p:sldLayoutId id="2147483696" r:id="rId10"/>
+    <p:sldLayoutId id="2147483697" r:id="rId11"/>
+    <p:sldLayoutId id="2147483698" r:id="rId12"/>
   </p:sldLayoutIdLst>
   <p:hf hdr="0" ftr="0"/>
   <p:txStyles>
@@ -5377,7 +4977,7 @@
           <a:spcPct val="0"/>
         </a:spcBef>
         <a:buNone/>
-        <a:defRPr sz="4400" kern="1200">
+        <a:defRPr sz="4400" b="1" kern="1200">
           <a:solidFill>
             <a:schemeClr val="tx1"/>
           </a:solidFill>
@@ -5743,7 +5343,7 @@
           <a:p>
             <a:fld id="{4DA02FB7-A3D0-4BF4-B23F-90A4C3B73A56}" type="datetime6">
               <a:rPr lang="ko-KR" altLang="en-US" smtClean="0"/>
-              <a:t>2023년 10월</a:t>
+              <a:t>2024년 8월</a:t>
             </a:fld>
             <a:endParaRPr lang="ko-KR" altLang="en-US" dirty="0"/>
           </a:p>
@@ -5810,104 +5410,6 @@
       </p:grpSpPr>
       <p:sp>
         <p:nvSpPr>
-          <p:cNvPr id="2" name="제목 1">
-            <a:extLst>
-              <a:ext uri="{FF2B5EF4-FFF2-40B4-BE49-F238E27FC236}">
-                <a16:creationId xmlns:a16="http://schemas.microsoft.com/office/drawing/2014/main" id="{DEEAE432-154C-1C3F-A5EC-16DFF73F5EC7}"/>
-              </a:ext>
-            </a:extLst>
-          </p:cNvPr>
-          <p:cNvSpPr>
-            <a:spLocks noGrp="1"/>
-          </p:cNvSpPr>
-          <p:nvPr>
-            <p:ph type="title"/>
-          </p:nvPr>
-        </p:nvSpPr>
-        <p:spPr/>
-        <p:txBody>
-          <a:bodyPr/>
-          <a:lstStyle/>
-          <a:p>
-            <a:r>
-              <a:rPr lang="en-US" altLang="ko-KR" dirty="0"/>
-              <a:t>Component</a:t>
-            </a:r>
-            <a:r>
-              <a:rPr lang="ko-KR" altLang="en-US" dirty="0"/>
-              <a:t>에 </a:t>
-            </a:r>
-            <a:r>
-              <a:rPr lang="en-US" altLang="ko-KR" dirty="0"/>
-              <a:t>map() </a:t>
-            </a:r>
-            <a:r>
-              <a:rPr lang="ko-KR" altLang="en-US" dirty="0"/>
-              <a:t>적용</a:t>
-            </a:r>
-          </a:p>
-        </p:txBody>
-      </p:sp>
-      <p:sp>
-        <p:nvSpPr>
-          <p:cNvPr id="4" name="날짜 개체 틀 3">
-            <a:extLst>
-              <a:ext uri="{FF2B5EF4-FFF2-40B4-BE49-F238E27FC236}">
-                <a16:creationId xmlns:a16="http://schemas.microsoft.com/office/drawing/2014/main" id="{8F058E69-2519-5C7B-E619-FCE4F8E785F7}"/>
-              </a:ext>
-            </a:extLst>
-          </p:cNvPr>
-          <p:cNvSpPr>
-            <a:spLocks noGrp="1"/>
-          </p:cNvSpPr>
-          <p:nvPr>
-            <p:ph type="dt" sz="half" idx="10"/>
-          </p:nvPr>
-        </p:nvSpPr>
-        <p:spPr/>
-        <p:txBody>
-          <a:bodyPr/>
-          <a:lstStyle/>
-          <a:p>
-            <a:fld id="{499F60AA-9663-4C10-96A7-DFE487A1DFF7}" type="datetime6">
-              <a:rPr lang="ko-KR" altLang="en-US" smtClean="0"/>
-              <a:t>2023년 10월</a:t>
-            </a:fld>
-            <a:endParaRPr lang="ko-KR" altLang="en-US"/>
-          </a:p>
-        </p:txBody>
-      </p:sp>
-      <p:sp>
-        <p:nvSpPr>
-          <p:cNvPr id="5" name="슬라이드 번호 개체 틀 4">
-            <a:extLst>
-              <a:ext uri="{FF2B5EF4-FFF2-40B4-BE49-F238E27FC236}">
-                <a16:creationId xmlns:a16="http://schemas.microsoft.com/office/drawing/2014/main" id="{4A2D925E-B075-9DDE-125B-43171B9E6A97}"/>
-              </a:ext>
-            </a:extLst>
-          </p:cNvPr>
-          <p:cNvSpPr>
-            <a:spLocks noGrp="1"/>
-          </p:cNvSpPr>
-          <p:nvPr>
-            <p:ph type="sldNum" sz="quarter" idx="12"/>
-          </p:nvPr>
-        </p:nvSpPr>
-        <p:spPr/>
-        <p:txBody>
-          <a:bodyPr/>
-          <a:lstStyle/>
-          <a:p>
-            <a:fld id="{083A2CE0-18CD-4102-B738-4ACFF9E68BA4}" type="slidenum">
-              <a:rPr lang="ko-KR" altLang="en-US" smtClean="0"/>
-              <a:t>10</a:t>
-            </a:fld>
-            <a:endParaRPr lang="ko-KR" altLang="en-US"/>
-          </a:p>
-        </p:txBody>
-      </p:sp>
-      <p:sp>
-        <p:nvSpPr>
           <p:cNvPr id="3" name="내용 개체 틀 2">
             <a:extLst>
               <a:ext uri="{FF2B5EF4-FFF2-40B4-BE49-F238E27FC236}">
@@ -5939,6 +5441,104 @@
             <a:r>
               <a:rPr lang="ko-KR" altLang="en-US" dirty="0"/>
               <a:t>으로 새로운 알파벳 추가해보기</a:t>
+            </a:r>
+          </a:p>
+        </p:txBody>
+      </p:sp>
+      <p:sp>
+        <p:nvSpPr>
+          <p:cNvPr id="4" name="날짜 개체 틀 3">
+            <a:extLst>
+              <a:ext uri="{FF2B5EF4-FFF2-40B4-BE49-F238E27FC236}">
+                <a16:creationId xmlns:a16="http://schemas.microsoft.com/office/drawing/2014/main" id="{8F058E69-2519-5C7B-E619-FCE4F8E785F7}"/>
+              </a:ext>
+            </a:extLst>
+          </p:cNvPr>
+          <p:cNvSpPr>
+            <a:spLocks noGrp="1"/>
+          </p:cNvSpPr>
+          <p:nvPr>
+            <p:ph type="dt" sz="half" idx="10"/>
+          </p:nvPr>
+        </p:nvSpPr>
+        <p:spPr/>
+        <p:txBody>
+          <a:bodyPr/>
+          <a:lstStyle/>
+          <a:p>
+            <a:fld id="{499F60AA-9663-4C10-96A7-DFE487A1DFF7}" type="datetime6">
+              <a:rPr lang="ko-KR" altLang="en-US" smtClean="0"/>
+              <a:t>2024년 8월</a:t>
+            </a:fld>
+            <a:endParaRPr lang="ko-KR" altLang="en-US"/>
+          </a:p>
+        </p:txBody>
+      </p:sp>
+      <p:sp>
+        <p:nvSpPr>
+          <p:cNvPr id="5" name="슬라이드 번호 개체 틀 4">
+            <a:extLst>
+              <a:ext uri="{FF2B5EF4-FFF2-40B4-BE49-F238E27FC236}">
+                <a16:creationId xmlns:a16="http://schemas.microsoft.com/office/drawing/2014/main" id="{4A2D925E-B075-9DDE-125B-43171B9E6A97}"/>
+              </a:ext>
+            </a:extLst>
+          </p:cNvPr>
+          <p:cNvSpPr>
+            <a:spLocks noGrp="1"/>
+          </p:cNvSpPr>
+          <p:nvPr>
+            <p:ph type="sldNum" sz="quarter" idx="12"/>
+          </p:nvPr>
+        </p:nvSpPr>
+        <p:spPr/>
+        <p:txBody>
+          <a:bodyPr/>
+          <a:lstStyle/>
+          <a:p>
+            <a:fld id="{083A2CE0-18CD-4102-B738-4ACFF9E68BA4}" type="slidenum">
+              <a:rPr lang="ko-KR" altLang="en-US" smtClean="0"/>
+              <a:t>10</a:t>
+            </a:fld>
+            <a:endParaRPr lang="ko-KR" altLang="en-US"/>
+          </a:p>
+        </p:txBody>
+      </p:sp>
+      <p:sp>
+        <p:nvSpPr>
+          <p:cNvPr id="2" name="제목 1">
+            <a:extLst>
+              <a:ext uri="{FF2B5EF4-FFF2-40B4-BE49-F238E27FC236}">
+                <a16:creationId xmlns:a16="http://schemas.microsoft.com/office/drawing/2014/main" id="{DEEAE432-154C-1C3F-A5EC-16DFF73F5EC7}"/>
+              </a:ext>
+            </a:extLst>
+          </p:cNvPr>
+          <p:cNvSpPr>
+            <a:spLocks noGrp="1"/>
+          </p:cNvSpPr>
+          <p:nvPr>
+            <p:ph type="title"/>
+          </p:nvPr>
+        </p:nvSpPr>
+        <p:spPr/>
+        <p:txBody>
+          <a:bodyPr/>
+          <a:lstStyle/>
+          <a:p>
+            <a:r>
+              <a:rPr lang="en-US" altLang="ko-KR" dirty="0"/>
+              <a:t>Component</a:t>
+            </a:r>
+            <a:r>
+              <a:rPr lang="ko-KR" altLang="en-US" dirty="0"/>
+              <a:t>에 </a:t>
+            </a:r>
+            <a:r>
+              <a:rPr lang="en-US" altLang="ko-KR" dirty="0"/>
+              <a:t>map() </a:t>
+            </a:r>
+            <a:r>
+              <a:rPr lang="ko-KR" altLang="en-US" dirty="0"/>
+              <a:t>적용</a:t>
             </a:r>
           </a:p>
         </p:txBody>
@@ -6147,104 +5747,6 @@
       </p:grpSpPr>
       <p:sp>
         <p:nvSpPr>
-          <p:cNvPr id="2" name="제목 1">
-            <a:extLst>
-              <a:ext uri="{FF2B5EF4-FFF2-40B4-BE49-F238E27FC236}">
-                <a16:creationId xmlns:a16="http://schemas.microsoft.com/office/drawing/2014/main" id="{DEEAE432-154C-1C3F-A5EC-16DFF73F5EC7}"/>
-              </a:ext>
-            </a:extLst>
-          </p:cNvPr>
-          <p:cNvSpPr>
-            <a:spLocks noGrp="1"/>
-          </p:cNvSpPr>
-          <p:nvPr>
-            <p:ph type="title"/>
-          </p:nvPr>
-        </p:nvSpPr>
-        <p:spPr/>
-        <p:txBody>
-          <a:bodyPr/>
-          <a:lstStyle/>
-          <a:p>
-            <a:r>
-              <a:rPr lang="en-US" altLang="ko-KR" dirty="0"/>
-              <a:t>Component</a:t>
-            </a:r>
-            <a:r>
-              <a:rPr lang="ko-KR" altLang="en-US" dirty="0"/>
-              <a:t>에 </a:t>
-            </a:r>
-            <a:r>
-              <a:rPr lang="en-US" altLang="ko-KR" dirty="0"/>
-              <a:t>map() </a:t>
-            </a:r>
-            <a:r>
-              <a:rPr lang="ko-KR" altLang="en-US" dirty="0"/>
-              <a:t>적용</a:t>
-            </a:r>
-          </a:p>
-        </p:txBody>
-      </p:sp>
-      <p:sp>
-        <p:nvSpPr>
-          <p:cNvPr id="4" name="날짜 개체 틀 3">
-            <a:extLst>
-              <a:ext uri="{FF2B5EF4-FFF2-40B4-BE49-F238E27FC236}">
-                <a16:creationId xmlns:a16="http://schemas.microsoft.com/office/drawing/2014/main" id="{8F058E69-2519-5C7B-E619-FCE4F8E785F7}"/>
-              </a:ext>
-            </a:extLst>
-          </p:cNvPr>
-          <p:cNvSpPr>
-            <a:spLocks noGrp="1"/>
-          </p:cNvSpPr>
-          <p:nvPr>
-            <p:ph type="dt" sz="half" idx="10"/>
-          </p:nvPr>
-        </p:nvSpPr>
-        <p:spPr/>
-        <p:txBody>
-          <a:bodyPr/>
-          <a:lstStyle/>
-          <a:p>
-            <a:fld id="{499F60AA-9663-4C10-96A7-DFE487A1DFF7}" type="datetime6">
-              <a:rPr lang="ko-KR" altLang="en-US" smtClean="0"/>
-              <a:t>2023년 10월</a:t>
-            </a:fld>
-            <a:endParaRPr lang="ko-KR" altLang="en-US"/>
-          </a:p>
-        </p:txBody>
-      </p:sp>
-      <p:sp>
-        <p:nvSpPr>
-          <p:cNvPr id="5" name="슬라이드 번호 개체 틀 4">
-            <a:extLst>
-              <a:ext uri="{FF2B5EF4-FFF2-40B4-BE49-F238E27FC236}">
-                <a16:creationId xmlns:a16="http://schemas.microsoft.com/office/drawing/2014/main" id="{4A2D925E-B075-9DDE-125B-43171B9E6A97}"/>
-              </a:ext>
-            </a:extLst>
-          </p:cNvPr>
-          <p:cNvSpPr>
-            <a:spLocks noGrp="1"/>
-          </p:cNvSpPr>
-          <p:nvPr>
-            <p:ph type="sldNum" sz="quarter" idx="12"/>
-          </p:nvPr>
-        </p:nvSpPr>
-        <p:spPr/>
-        <p:txBody>
-          <a:bodyPr/>
-          <a:lstStyle/>
-          <a:p>
-            <a:fld id="{083A2CE0-18CD-4102-B738-4ACFF9E68BA4}" type="slidenum">
-              <a:rPr lang="ko-KR" altLang="en-US" smtClean="0"/>
-              <a:t>11</a:t>
-            </a:fld>
-            <a:endParaRPr lang="ko-KR" altLang="en-US"/>
-          </a:p>
-        </p:txBody>
-      </p:sp>
-      <p:sp>
-        <p:nvSpPr>
           <p:cNvPr id="3" name="내용 개체 틀 2">
             <a:extLst>
               <a:ext uri="{FF2B5EF4-FFF2-40B4-BE49-F238E27FC236}">
@@ -6276,6 +5778,104 @@
             <a:r>
               <a:rPr lang="ko-KR" altLang="en-US" dirty="0"/>
               <a:t>으로 새로운 알파벳 추가해보기</a:t>
+            </a:r>
+          </a:p>
+        </p:txBody>
+      </p:sp>
+      <p:sp>
+        <p:nvSpPr>
+          <p:cNvPr id="4" name="날짜 개체 틀 3">
+            <a:extLst>
+              <a:ext uri="{FF2B5EF4-FFF2-40B4-BE49-F238E27FC236}">
+                <a16:creationId xmlns:a16="http://schemas.microsoft.com/office/drawing/2014/main" id="{8F058E69-2519-5C7B-E619-FCE4F8E785F7}"/>
+              </a:ext>
+            </a:extLst>
+          </p:cNvPr>
+          <p:cNvSpPr>
+            <a:spLocks noGrp="1"/>
+          </p:cNvSpPr>
+          <p:nvPr>
+            <p:ph type="dt" sz="half" idx="10"/>
+          </p:nvPr>
+        </p:nvSpPr>
+        <p:spPr/>
+        <p:txBody>
+          <a:bodyPr/>
+          <a:lstStyle/>
+          <a:p>
+            <a:fld id="{499F60AA-9663-4C10-96A7-DFE487A1DFF7}" type="datetime6">
+              <a:rPr lang="ko-KR" altLang="en-US" smtClean="0"/>
+              <a:t>2024년 8월</a:t>
+            </a:fld>
+            <a:endParaRPr lang="ko-KR" altLang="en-US"/>
+          </a:p>
+        </p:txBody>
+      </p:sp>
+      <p:sp>
+        <p:nvSpPr>
+          <p:cNvPr id="5" name="슬라이드 번호 개체 틀 4">
+            <a:extLst>
+              <a:ext uri="{FF2B5EF4-FFF2-40B4-BE49-F238E27FC236}">
+                <a16:creationId xmlns:a16="http://schemas.microsoft.com/office/drawing/2014/main" id="{4A2D925E-B075-9DDE-125B-43171B9E6A97}"/>
+              </a:ext>
+            </a:extLst>
+          </p:cNvPr>
+          <p:cNvSpPr>
+            <a:spLocks noGrp="1"/>
+          </p:cNvSpPr>
+          <p:nvPr>
+            <p:ph type="sldNum" sz="quarter" idx="12"/>
+          </p:nvPr>
+        </p:nvSpPr>
+        <p:spPr/>
+        <p:txBody>
+          <a:bodyPr/>
+          <a:lstStyle/>
+          <a:p>
+            <a:fld id="{083A2CE0-18CD-4102-B738-4ACFF9E68BA4}" type="slidenum">
+              <a:rPr lang="ko-KR" altLang="en-US" smtClean="0"/>
+              <a:t>11</a:t>
+            </a:fld>
+            <a:endParaRPr lang="ko-KR" altLang="en-US"/>
+          </a:p>
+        </p:txBody>
+      </p:sp>
+      <p:sp>
+        <p:nvSpPr>
+          <p:cNvPr id="2" name="제목 1">
+            <a:extLst>
+              <a:ext uri="{FF2B5EF4-FFF2-40B4-BE49-F238E27FC236}">
+                <a16:creationId xmlns:a16="http://schemas.microsoft.com/office/drawing/2014/main" id="{DEEAE432-154C-1C3F-A5EC-16DFF73F5EC7}"/>
+              </a:ext>
+            </a:extLst>
+          </p:cNvPr>
+          <p:cNvSpPr>
+            <a:spLocks noGrp="1"/>
+          </p:cNvSpPr>
+          <p:nvPr>
+            <p:ph type="title"/>
+          </p:nvPr>
+        </p:nvSpPr>
+        <p:spPr/>
+        <p:txBody>
+          <a:bodyPr/>
+          <a:lstStyle/>
+          <a:p>
+            <a:r>
+              <a:rPr lang="en-US" altLang="ko-KR" dirty="0"/>
+              <a:t>Component</a:t>
+            </a:r>
+            <a:r>
+              <a:rPr lang="ko-KR" altLang="en-US" dirty="0"/>
+              <a:t>에 </a:t>
+            </a:r>
+            <a:r>
+              <a:rPr lang="en-US" altLang="ko-KR" dirty="0"/>
+              <a:t>map() </a:t>
+            </a:r>
+            <a:r>
+              <a:rPr lang="ko-KR" altLang="en-US" dirty="0"/>
+              <a:t>적용</a:t>
             </a:r>
           </a:p>
         </p:txBody>
@@ -6357,7 +5957,7 @@
           <a:p>
             <a:fld id="{0E19CB95-6D28-40F1-9DA3-1BAC5D4B5B4F}" type="datetime6">
               <a:rPr lang="ko-KR" altLang="en-US" smtClean="0"/>
-              <a:t>2023년 10월</a:t>
+              <a:t>2024년 8월</a:t>
             </a:fld>
             <a:endParaRPr lang="ko-KR" altLang="en-US"/>
           </a:p>
@@ -6402,18 +6002,18 @@
           <a:lstStyle/>
           <a:p>
             <a:r>
-              <a:rPr lang="en-US" altLang="ko-KR" dirty="0"/>
+              <a:rPr lang="en-US" altLang="ko-KR" sz="7200" dirty="0"/>
               <a:t>filter()</a:t>
             </a:r>
             <a:r>
-              <a:rPr lang="ko-KR" altLang="en-US" dirty="0"/>
+              <a:rPr lang="ko-KR" altLang="en-US" sz="7200" dirty="0"/>
               <a:t>를 이용한 </a:t>
             </a:r>
             <a:r>
-              <a:rPr lang="ko-KR" altLang="en-US" dirty="0" err="1"/>
+              <a:rPr lang="ko-KR" altLang="en-US" sz="7200" dirty="0" err="1"/>
               <a:t>필터링</a:t>
             </a:r>
-            <a:endParaRPr lang="ko-KR" altLang="en-US" dirty="0"/>
+            <a:endParaRPr lang="ko-KR" altLang="en-US" sz="7200" dirty="0"/>
           </a:p>
         </p:txBody>
       </p:sp>
@@ -6449,96 +6049,6 @@
       </p:grpSpPr>
       <p:sp>
         <p:nvSpPr>
-          <p:cNvPr id="2" name="제목 1">
-            <a:extLst>
-              <a:ext uri="{FF2B5EF4-FFF2-40B4-BE49-F238E27FC236}">
-                <a16:creationId xmlns:a16="http://schemas.microsoft.com/office/drawing/2014/main" id="{45FB17D5-C686-6D90-A10C-DFBDB6D2FE1F}"/>
-              </a:ext>
-            </a:extLst>
-          </p:cNvPr>
-          <p:cNvSpPr>
-            <a:spLocks noGrp="1"/>
-          </p:cNvSpPr>
-          <p:nvPr>
-            <p:ph type="title"/>
-          </p:nvPr>
-        </p:nvSpPr>
-        <p:spPr/>
-        <p:txBody>
-          <a:bodyPr/>
-          <a:lstStyle/>
-          <a:p>
-            <a:r>
-              <a:rPr lang="en-US" altLang="ko-KR" dirty="0"/>
-              <a:t>filter()</a:t>
-            </a:r>
-            <a:r>
-              <a:rPr lang="ko-KR" altLang="en-US" dirty="0"/>
-              <a:t> 함수</a:t>
-            </a:r>
-          </a:p>
-        </p:txBody>
-      </p:sp>
-      <p:sp>
-        <p:nvSpPr>
-          <p:cNvPr id="4" name="날짜 개체 틀 3">
-            <a:extLst>
-              <a:ext uri="{FF2B5EF4-FFF2-40B4-BE49-F238E27FC236}">
-                <a16:creationId xmlns:a16="http://schemas.microsoft.com/office/drawing/2014/main" id="{AD912659-0178-7724-84E7-F9804EEB516A}"/>
-              </a:ext>
-            </a:extLst>
-          </p:cNvPr>
-          <p:cNvSpPr>
-            <a:spLocks noGrp="1"/>
-          </p:cNvSpPr>
-          <p:nvPr>
-            <p:ph type="dt" sz="half" idx="10"/>
-          </p:nvPr>
-        </p:nvSpPr>
-        <p:spPr/>
-        <p:txBody>
-          <a:bodyPr/>
-          <a:lstStyle/>
-          <a:p>
-            <a:fld id="{ECE2EEAA-2D64-41F3-9CC6-1D2C9158BEA1}" type="datetime6">
-              <a:rPr lang="ko-KR" altLang="en-US" smtClean="0"/>
-              <a:t>2023년 10월</a:t>
-            </a:fld>
-            <a:endParaRPr lang="ko-KR" altLang="en-US" dirty="0"/>
-          </a:p>
-        </p:txBody>
-      </p:sp>
-      <p:sp>
-        <p:nvSpPr>
-          <p:cNvPr id="5" name="슬라이드 번호 개체 틀 4">
-            <a:extLst>
-              <a:ext uri="{FF2B5EF4-FFF2-40B4-BE49-F238E27FC236}">
-                <a16:creationId xmlns:a16="http://schemas.microsoft.com/office/drawing/2014/main" id="{E038AD2A-D098-5002-7259-7C0CF8DAB853}"/>
-              </a:ext>
-            </a:extLst>
-          </p:cNvPr>
-          <p:cNvSpPr>
-            <a:spLocks noGrp="1"/>
-          </p:cNvSpPr>
-          <p:nvPr>
-            <p:ph type="sldNum" sz="quarter" idx="12"/>
-          </p:nvPr>
-        </p:nvSpPr>
-        <p:spPr/>
-        <p:txBody>
-          <a:bodyPr/>
-          <a:lstStyle/>
-          <a:p>
-            <a:fld id="{083A2CE0-18CD-4102-B738-4ACFF9E68BA4}" type="slidenum">
-              <a:rPr lang="ko-KR" altLang="en-US" smtClean="0"/>
-              <a:t>13</a:t>
-            </a:fld>
-            <a:endParaRPr lang="ko-KR" altLang="en-US" dirty="0"/>
-          </a:p>
-        </p:txBody>
-      </p:sp>
-      <p:sp>
-        <p:nvSpPr>
           <p:cNvPr id="3" name="내용 개체 틀 2">
             <a:extLst>
               <a:ext uri="{FF2B5EF4-FFF2-40B4-BE49-F238E27FC236}">
@@ -6648,6 +6158,96 @@
               <a:buNone/>
             </a:pPr>
             <a:endParaRPr lang="en-US" altLang="ko-KR" sz="4000" dirty="0"/>
+          </a:p>
+        </p:txBody>
+      </p:sp>
+      <p:sp>
+        <p:nvSpPr>
+          <p:cNvPr id="4" name="날짜 개체 틀 3">
+            <a:extLst>
+              <a:ext uri="{FF2B5EF4-FFF2-40B4-BE49-F238E27FC236}">
+                <a16:creationId xmlns:a16="http://schemas.microsoft.com/office/drawing/2014/main" id="{AD912659-0178-7724-84E7-F9804EEB516A}"/>
+              </a:ext>
+            </a:extLst>
+          </p:cNvPr>
+          <p:cNvSpPr>
+            <a:spLocks noGrp="1"/>
+          </p:cNvSpPr>
+          <p:nvPr>
+            <p:ph type="dt" sz="half" idx="10"/>
+          </p:nvPr>
+        </p:nvSpPr>
+        <p:spPr/>
+        <p:txBody>
+          <a:bodyPr/>
+          <a:lstStyle/>
+          <a:p>
+            <a:fld id="{ECE2EEAA-2D64-41F3-9CC6-1D2C9158BEA1}" type="datetime6">
+              <a:rPr lang="ko-KR" altLang="en-US" smtClean="0"/>
+              <a:t>2024년 8월</a:t>
+            </a:fld>
+            <a:endParaRPr lang="ko-KR" altLang="en-US" dirty="0"/>
+          </a:p>
+        </p:txBody>
+      </p:sp>
+      <p:sp>
+        <p:nvSpPr>
+          <p:cNvPr id="5" name="슬라이드 번호 개체 틀 4">
+            <a:extLst>
+              <a:ext uri="{FF2B5EF4-FFF2-40B4-BE49-F238E27FC236}">
+                <a16:creationId xmlns:a16="http://schemas.microsoft.com/office/drawing/2014/main" id="{E038AD2A-D098-5002-7259-7C0CF8DAB853}"/>
+              </a:ext>
+            </a:extLst>
+          </p:cNvPr>
+          <p:cNvSpPr>
+            <a:spLocks noGrp="1"/>
+          </p:cNvSpPr>
+          <p:nvPr>
+            <p:ph type="sldNum" sz="quarter" idx="12"/>
+          </p:nvPr>
+        </p:nvSpPr>
+        <p:spPr/>
+        <p:txBody>
+          <a:bodyPr/>
+          <a:lstStyle/>
+          <a:p>
+            <a:fld id="{083A2CE0-18CD-4102-B738-4ACFF9E68BA4}" type="slidenum">
+              <a:rPr lang="ko-KR" altLang="en-US" smtClean="0"/>
+              <a:t>13</a:t>
+            </a:fld>
+            <a:endParaRPr lang="ko-KR" altLang="en-US" dirty="0"/>
+          </a:p>
+        </p:txBody>
+      </p:sp>
+      <p:sp>
+        <p:nvSpPr>
+          <p:cNvPr id="2" name="제목 1">
+            <a:extLst>
+              <a:ext uri="{FF2B5EF4-FFF2-40B4-BE49-F238E27FC236}">
+                <a16:creationId xmlns:a16="http://schemas.microsoft.com/office/drawing/2014/main" id="{45FB17D5-C686-6D90-A10C-DFBDB6D2FE1F}"/>
+              </a:ext>
+            </a:extLst>
+          </p:cNvPr>
+          <p:cNvSpPr>
+            <a:spLocks noGrp="1"/>
+          </p:cNvSpPr>
+          <p:nvPr>
+            <p:ph type="title"/>
+          </p:nvPr>
+        </p:nvSpPr>
+        <p:spPr/>
+        <p:txBody>
+          <a:bodyPr/>
+          <a:lstStyle/>
+          <a:p>
+            <a:r>
+              <a:rPr lang="en-US" altLang="ko-KR" dirty="0"/>
+              <a:t>filter()</a:t>
+            </a:r>
+            <a:r>
+              <a:rPr lang="ko-KR" altLang="en-US" dirty="0"/>
+              <a:t> 함수</a:t>
+            </a:r>
           </a:p>
         </p:txBody>
       </p:sp>
@@ -6683,38 +6283,6 @@
       </p:grpSpPr>
       <p:sp>
         <p:nvSpPr>
-          <p:cNvPr id="2" name="제목 1">
-            <a:extLst>
-              <a:ext uri="{FF2B5EF4-FFF2-40B4-BE49-F238E27FC236}">
-                <a16:creationId xmlns:a16="http://schemas.microsoft.com/office/drawing/2014/main" id="{EA522050-7763-6208-1396-B5F36655ACC7}"/>
-              </a:ext>
-            </a:extLst>
-          </p:cNvPr>
-          <p:cNvSpPr>
-            <a:spLocks noGrp="1"/>
-          </p:cNvSpPr>
-          <p:nvPr>
-            <p:ph type="title"/>
-          </p:nvPr>
-        </p:nvSpPr>
-        <p:spPr/>
-        <p:txBody>
-          <a:bodyPr/>
-          <a:lstStyle/>
-          <a:p>
-            <a:r>
-              <a:rPr lang="en-US" altLang="ko-KR" dirty="0"/>
-              <a:t>filter() </a:t>
-            </a:r>
-            <a:r>
-              <a:rPr lang="ko-KR" altLang="en-US" dirty="0"/>
-              <a:t>함수</a:t>
-            </a:r>
-          </a:p>
-        </p:txBody>
-      </p:sp>
-      <p:sp>
-        <p:nvSpPr>
           <p:cNvPr id="4" name="날짜 개체 틀 3">
             <a:extLst>
               <a:ext uri="{FF2B5EF4-FFF2-40B4-BE49-F238E27FC236}">
@@ -6736,7 +6304,7 @@
           <a:p>
             <a:fld id="{46B2C582-12D8-4D41-A2C5-A40388E0E0C0}" type="datetime6">
               <a:rPr lang="ko-KR" altLang="en-US" smtClean="0"/>
-              <a:t>2023년 10월</a:t>
+              <a:t>2024년 8월</a:t>
             </a:fld>
             <a:endParaRPr lang="ko-KR" altLang="en-US"/>
           </a:p>
@@ -6768,6 +6336,38 @@
               <a:t>14</a:t>
             </a:fld>
             <a:endParaRPr lang="ko-KR" altLang="en-US"/>
+          </a:p>
+        </p:txBody>
+      </p:sp>
+      <p:sp>
+        <p:nvSpPr>
+          <p:cNvPr id="2" name="제목 1">
+            <a:extLst>
+              <a:ext uri="{FF2B5EF4-FFF2-40B4-BE49-F238E27FC236}">
+                <a16:creationId xmlns:a16="http://schemas.microsoft.com/office/drawing/2014/main" id="{EA522050-7763-6208-1396-B5F36655ACC7}"/>
+              </a:ext>
+            </a:extLst>
+          </p:cNvPr>
+          <p:cNvSpPr>
+            <a:spLocks noGrp="1"/>
+          </p:cNvSpPr>
+          <p:nvPr>
+            <p:ph type="title"/>
+          </p:nvPr>
+        </p:nvSpPr>
+        <p:spPr/>
+        <p:txBody>
+          <a:bodyPr/>
+          <a:lstStyle/>
+          <a:p>
+            <a:r>
+              <a:rPr lang="en-US" altLang="ko-KR" dirty="0"/>
+              <a:t>filter() </a:t>
+            </a:r>
+            <a:r>
+              <a:rPr lang="ko-KR" altLang="en-US" dirty="0"/>
+              <a:t>함수</a:t>
+            </a:r>
           </a:p>
         </p:txBody>
       </p:sp>
@@ -6893,33 +6493,26 @@
       </p:grpSpPr>
       <p:sp>
         <p:nvSpPr>
-          <p:cNvPr id="2" name="제목 1">
-            <a:extLst>
-              <a:ext uri="{FF2B5EF4-FFF2-40B4-BE49-F238E27FC236}">
-                <a16:creationId xmlns:a16="http://schemas.microsoft.com/office/drawing/2014/main" id="{EA522050-7763-6208-1396-B5F36655ACC7}"/>
-              </a:ext>
-            </a:extLst>
-          </p:cNvPr>
-          <p:cNvSpPr>
-            <a:spLocks noGrp="1"/>
-          </p:cNvSpPr>
-          <p:nvPr>
-            <p:ph type="title"/>
-          </p:nvPr>
-        </p:nvSpPr>
-        <p:spPr/>
-        <p:txBody>
-          <a:bodyPr/>
-          <a:lstStyle/>
-          <a:p>
-            <a:r>
-              <a:rPr lang="en-US" altLang="ko-KR" dirty="0"/>
-              <a:t>filter() </a:t>
-            </a:r>
-            <a:r>
-              <a:rPr lang="ko-KR" altLang="en-US" dirty="0"/>
-              <a:t>함수</a:t>
-            </a:r>
+          <p:cNvPr id="3" name="내용 개체 틀 2">
+            <a:extLst>
+              <a:ext uri="{FF2B5EF4-FFF2-40B4-BE49-F238E27FC236}">
+                <a16:creationId xmlns:a16="http://schemas.microsoft.com/office/drawing/2014/main" id="{848B3227-CF71-B240-EE62-0C1CBB1DFA72}"/>
+              </a:ext>
+            </a:extLst>
+          </p:cNvPr>
+          <p:cNvSpPr>
+            <a:spLocks noGrp="1"/>
+          </p:cNvSpPr>
+          <p:nvPr>
+            <p:ph idx="1"/>
+          </p:nvPr>
+        </p:nvSpPr>
+        <p:spPr/>
+        <p:txBody>
+          <a:bodyPr/>
+          <a:lstStyle/>
+          <a:p>
+            <a:endParaRPr lang="ko-KR" altLang="en-US"/>
           </a:p>
         </p:txBody>
       </p:sp>
@@ -6946,7 +6539,7 @@
           <a:p>
             <a:fld id="{8A388F0C-5E74-4ECC-96D5-84470E352FFC}" type="datetime6">
               <a:rPr lang="ko-KR" altLang="en-US" smtClean="0"/>
-              <a:t>2023년 10월</a:t>
+              <a:t>2024년 8월</a:t>
             </a:fld>
             <a:endParaRPr lang="ko-KR" altLang="en-US"/>
           </a:p>
@@ -6983,26 +6576,33 @@
       </p:sp>
       <p:sp>
         <p:nvSpPr>
-          <p:cNvPr id="3" name="내용 개체 틀 2">
-            <a:extLst>
-              <a:ext uri="{FF2B5EF4-FFF2-40B4-BE49-F238E27FC236}">
-                <a16:creationId xmlns:a16="http://schemas.microsoft.com/office/drawing/2014/main" id="{848B3227-CF71-B240-EE62-0C1CBB1DFA72}"/>
-              </a:ext>
-            </a:extLst>
-          </p:cNvPr>
-          <p:cNvSpPr>
-            <a:spLocks noGrp="1"/>
-          </p:cNvSpPr>
-          <p:nvPr>
-            <p:ph idx="1"/>
-          </p:nvPr>
-        </p:nvSpPr>
-        <p:spPr/>
-        <p:txBody>
-          <a:bodyPr/>
-          <a:lstStyle/>
-          <a:p>
-            <a:endParaRPr lang="ko-KR" altLang="en-US"/>
+          <p:cNvPr id="2" name="제목 1">
+            <a:extLst>
+              <a:ext uri="{FF2B5EF4-FFF2-40B4-BE49-F238E27FC236}">
+                <a16:creationId xmlns:a16="http://schemas.microsoft.com/office/drawing/2014/main" id="{EA522050-7763-6208-1396-B5F36655ACC7}"/>
+              </a:ext>
+            </a:extLst>
+          </p:cNvPr>
+          <p:cNvSpPr>
+            <a:spLocks noGrp="1"/>
+          </p:cNvSpPr>
+          <p:nvPr>
+            <p:ph type="title"/>
+          </p:nvPr>
+        </p:nvSpPr>
+        <p:spPr/>
+        <p:txBody>
+          <a:bodyPr/>
+          <a:lstStyle/>
+          <a:p>
+            <a:r>
+              <a:rPr lang="en-US" altLang="ko-KR" dirty="0"/>
+              <a:t>filter() </a:t>
+            </a:r>
+            <a:r>
+              <a:rPr lang="ko-KR" altLang="en-US" dirty="0"/>
+              <a:t>함수</a:t>
+            </a:r>
           </a:p>
         </p:txBody>
       </p:sp>
@@ -7068,96 +6668,6 @@
       </p:grpSpPr>
       <p:sp>
         <p:nvSpPr>
-          <p:cNvPr id="2" name="제목 1">
-            <a:extLst>
-              <a:ext uri="{FF2B5EF4-FFF2-40B4-BE49-F238E27FC236}">
-                <a16:creationId xmlns:a16="http://schemas.microsoft.com/office/drawing/2014/main" id="{DEEAE432-154C-1C3F-A5EC-16DFF73F5EC7}"/>
-              </a:ext>
-            </a:extLst>
-          </p:cNvPr>
-          <p:cNvSpPr>
-            <a:spLocks noGrp="1"/>
-          </p:cNvSpPr>
-          <p:nvPr>
-            <p:ph type="title"/>
-          </p:nvPr>
-        </p:nvSpPr>
-        <p:spPr/>
-        <p:txBody>
-          <a:bodyPr/>
-          <a:lstStyle/>
-          <a:p>
-            <a:r>
-              <a:rPr lang="en-US" altLang="ko-KR" dirty="0"/>
-              <a:t>filter() </a:t>
-            </a:r>
-            <a:r>
-              <a:rPr lang="ko-KR" altLang="en-US" dirty="0"/>
-              <a:t>응용</a:t>
-            </a:r>
-          </a:p>
-        </p:txBody>
-      </p:sp>
-      <p:sp>
-        <p:nvSpPr>
-          <p:cNvPr id="4" name="날짜 개체 틀 3">
-            <a:extLst>
-              <a:ext uri="{FF2B5EF4-FFF2-40B4-BE49-F238E27FC236}">
-                <a16:creationId xmlns:a16="http://schemas.microsoft.com/office/drawing/2014/main" id="{8F058E69-2519-5C7B-E619-FCE4F8E785F7}"/>
-              </a:ext>
-            </a:extLst>
-          </p:cNvPr>
-          <p:cNvSpPr>
-            <a:spLocks noGrp="1"/>
-          </p:cNvSpPr>
-          <p:nvPr>
-            <p:ph type="dt" sz="half" idx="10"/>
-          </p:nvPr>
-        </p:nvSpPr>
-        <p:spPr/>
-        <p:txBody>
-          <a:bodyPr/>
-          <a:lstStyle/>
-          <a:p>
-            <a:fld id="{499F60AA-9663-4C10-96A7-DFE487A1DFF7}" type="datetime6">
-              <a:rPr lang="ko-KR" altLang="en-US" smtClean="0"/>
-              <a:t>2023년 10월</a:t>
-            </a:fld>
-            <a:endParaRPr lang="ko-KR" altLang="en-US"/>
-          </a:p>
-        </p:txBody>
-      </p:sp>
-      <p:sp>
-        <p:nvSpPr>
-          <p:cNvPr id="5" name="슬라이드 번호 개체 틀 4">
-            <a:extLst>
-              <a:ext uri="{FF2B5EF4-FFF2-40B4-BE49-F238E27FC236}">
-                <a16:creationId xmlns:a16="http://schemas.microsoft.com/office/drawing/2014/main" id="{4A2D925E-B075-9DDE-125B-43171B9E6A97}"/>
-              </a:ext>
-            </a:extLst>
-          </p:cNvPr>
-          <p:cNvSpPr>
-            <a:spLocks noGrp="1"/>
-          </p:cNvSpPr>
-          <p:nvPr>
-            <p:ph type="sldNum" sz="quarter" idx="12"/>
-          </p:nvPr>
-        </p:nvSpPr>
-        <p:spPr/>
-        <p:txBody>
-          <a:bodyPr/>
-          <a:lstStyle/>
-          <a:p>
-            <a:fld id="{083A2CE0-18CD-4102-B738-4ACFF9E68BA4}" type="slidenum">
-              <a:rPr lang="ko-KR" altLang="en-US" smtClean="0"/>
-              <a:t>16</a:t>
-            </a:fld>
-            <a:endParaRPr lang="ko-KR" altLang="en-US"/>
-          </a:p>
-        </p:txBody>
-      </p:sp>
-      <p:sp>
-        <p:nvSpPr>
           <p:cNvPr id="3" name="내용 개체 틀 2">
             <a:extLst>
               <a:ext uri="{FF2B5EF4-FFF2-40B4-BE49-F238E27FC236}">
@@ -7185,6 +6695,96 @@
             <a:r>
               <a:rPr lang="ko-KR" altLang="en-US" dirty="0"/>
               <a:t>알파벳을 더블 클릭 했을 때 알파벳 삭제해보기</a:t>
+            </a:r>
+          </a:p>
+        </p:txBody>
+      </p:sp>
+      <p:sp>
+        <p:nvSpPr>
+          <p:cNvPr id="4" name="날짜 개체 틀 3">
+            <a:extLst>
+              <a:ext uri="{FF2B5EF4-FFF2-40B4-BE49-F238E27FC236}">
+                <a16:creationId xmlns:a16="http://schemas.microsoft.com/office/drawing/2014/main" id="{8F058E69-2519-5C7B-E619-FCE4F8E785F7}"/>
+              </a:ext>
+            </a:extLst>
+          </p:cNvPr>
+          <p:cNvSpPr>
+            <a:spLocks noGrp="1"/>
+          </p:cNvSpPr>
+          <p:nvPr>
+            <p:ph type="dt" sz="half" idx="10"/>
+          </p:nvPr>
+        </p:nvSpPr>
+        <p:spPr/>
+        <p:txBody>
+          <a:bodyPr/>
+          <a:lstStyle/>
+          <a:p>
+            <a:fld id="{499F60AA-9663-4C10-96A7-DFE487A1DFF7}" type="datetime6">
+              <a:rPr lang="ko-KR" altLang="en-US" smtClean="0"/>
+              <a:t>2024년 8월</a:t>
+            </a:fld>
+            <a:endParaRPr lang="ko-KR" altLang="en-US"/>
+          </a:p>
+        </p:txBody>
+      </p:sp>
+      <p:sp>
+        <p:nvSpPr>
+          <p:cNvPr id="5" name="슬라이드 번호 개체 틀 4">
+            <a:extLst>
+              <a:ext uri="{FF2B5EF4-FFF2-40B4-BE49-F238E27FC236}">
+                <a16:creationId xmlns:a16="http://schemas.microsoft.com/office/drawing/2014/main" id="{4A2D925E-B075-9DDE-125B-43171B9E6A97}"/>
+              </a:ext>
+            </a:extLst>
+          </p:cNvPr>
+          <p:cNvSpPr>
+            <a:spLocks noGrp="1"/>
+          </p:cNvSpPr>
+          <p:nvPr>
+            <p:ph type="sldNum" sz="quarter" idx="12"/>
+          </p:nvPr>
+        </p:nvSpPr>
+        <p:spPr/>
+        <p:txBody>
+          <a:bodyPr/>
+          <a:lstStyle/>
+          <a:p>
+            <a:fld id="{083A2CE0-18CD-4102-B738-4ACFF9E68BA4}" type="slidenum">
+              <a:rPr lang="ko-KR" altLang="en-US" smtClean="0"/>
+              <a:t>16</a:t>
+            </a:fld>
+            <a:endParaRPr lang="ko-KR" altLang="en-US"/>
+          </a:p>
+        </p:txBody>
+      </p:sp>
+      <p:sp>
+        <p:nvSpPr>
+          <p:cNvPr id="2" name="제목 1">
+            <a:extLst>
+              <a:ext uri="{FF2B5EF4-FFF2-40B4-BE49-F238E27FC236}">
+                <a16:creationId xmlns:a16="http://schemas.microsoft.com/office/drawing/2014/main" id="{DEEAE432-154C-1C3F-A5EC-16DFF73F5EC7}"/>
+              </a:ext>
+            </a:extLst>
+          </p:cNvPr>
+          <p:cNvSpPr>
+            <a:spLocks noGrp="1"/>
+          </p:cNvSpPr>
+          <p:nvPr>
+            <p:ph type="title"/>
+          </p:nvPr>
+        </p:nvSpPr>
+        <p:spPr/>
+        <p:txBody>
+          <a:bodyPr/>
+          <a:lstStyle/>
+          <a:p>
+            <a:r>
+              <a:rPr lang="en-US" altLang="ko-KR" dirty="0"/>
+              <a:t>filter() </a:t>
+            </a:r>
+            <a:r>
+              <a:rPr lang="ko-KR" altLang="en-US" dirty="0"/>
+              <a:t>응용</a:t>
             </a:r>
           </a:p>
         </p:txBody>
@@ -7393,38 +6993,6 @@
       </p:grpSpPr>
       <p:sp>
         <p:nvSpPr>
-          <p:cNvPr id="2" name="제목 1">
-            <a:extLst>
-              <a:ext uri="{FF2B5EF4-FFF2-40B4-BE49-F238E27FC236}">
-                <a16:creationId xmlns:a16="http://schemas.microsoft.com/office/drawing/2014/main" id="{DEEAE432-154C-1C3F-A5EC-16DFF73F5EC7}"/>
-              </a:ext>
-            </a:extLst>
-          </p:cNvPr>
-          <p:cNvSpPr>
-            <a:spLocks noGrp="1"/>
-          </p:cNvSpPr>
-          <p:nvPr>
-            <p:ph type="title"/>
-          </p:nvPr>
-        </p:nvSpPr>
-        <p:spPr/>
-        <p:txBody>
-          <a:bodyPr/>
-          <a:lstStyle/>
-          <a:p>
-            <a:r>
-              <a:rPr lang="en-US" altLang="ko-KR" dirty="0"/>
-              <a:t>filter() </a:t>
-            </a:r>
-            <a:r>
-              <a:rPr lang="ko-KR" altLang="en-US" dirty="0"/>
-              <a:t>응용</a:t>
-            </a:r>
-          </a:p>
-        </p:txBody>
-      </p:sp>
-      <p:sp>
-        <p:nvSpPr>
           <p:cNvPr id="4" name="날짜 개체 틀 3">
             <a:extLst>
               <a:ext uri="{FF2B5EF4-FFF2-40B4-BE49-F238E27FC236}">
@@ -7446,7 +7014,7 @@
           <a:p>
             <a:fld id="{499F60AA-9663-4C10-96A7-DFE487A1DFF7}" type="datetime6">
               <a:rPr lang="ko-KR" altLang="en-US" smtClean="0"/>
-              <a:t>2023년 10월</a:t>
+              <a:t>2024년 8월</a:t>
             </a:fld>
             <a:endParaRPr lang="ko-KR" altLang="en-US"/>
           </a:p>
@@ -7478,6 +7046,38 @@
               <a:t>17</a:t>
             </a:fld>
             <a:endParaRPr lang="ko-KR" altLang="en-US"/>
+          </a:p>
+        </p:txBody>
+      </p:sp>
+      <p:sp>
+        <p:nvSpPr>
+          <p:cNvPr id="2" name="제목 1">
+            <a:extLst>
+              <a:ext uri="{FF2B5EF4-FFF2-40B4-BE49-F238E27FC236}">
+                <a16:creationId xmlns:a16="http://schemas.microsoft.com/office/drawing/2014/main" id="{DEEAE432-154C-1C3F-A5EC-16DFF73F5EC7}"/>
+              </a:ext>
+            </a:extLst>
+          </p:cNvPr>
+          <p:cNvSpPr>
+            <a:spLocks noGrp="1"/>
+          </p:cNvSpPr>
+          <p:nvPr>
+            <p:ph type="title"/>
+          </p:nvPr>
+        </p:nvSpPr>
+        <p:spPr/>
+        <p:txBody>
+          <a:bodyPr/>
+          <a:lstStyle/>
+          <a:p>
+            <a:r>
+              <a:rPr lang="en-US" altLang="ko-KR" dirty="0"/>
+              <a:t>filter() </a:t>
+            </a:r>
+            <a:r>
+              <a:rPr lang="ko-KR" altLang="en-US" dirty="0"/>
+              <a:t>응용</a:t>
+            </a:r>
           </a:p>
         </p:txBody>
       </p:sp>
@@ -7645,515 +7245,689 @@
           <a:chExt cx="0" cy="0"/>
         </a:xfrm>
       </p:grpSpPr>
-      <p:pic>
-        <p:nvPicPr>
-          <p:cNvPr id="7" name="그림 6">
-            <a:extLst>
-              <a:ext uri="{FF2B5EF4-FFF2-40B4-BE49-F238E27FC236}">
-                <a16:creationId xmlns:a16="http://schemas.microsoft.com/office/drawing/2014/main" id="{757ECE3F-9D7E-9A94-0C19-BEF8339E01D3}"/>
-              </a:ext>
-            </a:extLst>
-          </p:cNvPr>
-          <p:cNvPicPr>
-            <a:picLocks noChangeAspect="1"/>
-          </p:cNvPicPr>
-          <p:nvPr/>
-        </p:nvPicPr>
-        <p:blipFill>
-          <a:blip r:embed="rId3"/>
-          <a:stretch>
-            <a:fillRect/>
-          </a:stretch>
-        </p:blipFill>
+      <p:sp>
+        <p:nvSpPr>
+          <p:cNvPr id="13" name="내용 개체 틀 2">
+            <a:extLst>
+              <a:ext uri="{FF2B5EF4-FFF2-40B4-BE49-F238E27FC236}">
+                <a16:creationId xmlns:a16="http://schemas.microsoft.com/office/drawing/2014/main" id="{847FD532-7F61-A001-537F-B970BD821AF3}"/>
+              </a:ext>
+            </a:extLst>
+          </p:cNvPr>
+          <p:cNvSpPr>
+            <a:spLocks noGrp="1"/>
+          </p:cNvSpPr>
+          <p:nvPr>
+            <p:ph idx="1"/>
+          </p:nvPr>
+        </p:nvSpPr>
         <p:spPr>
           <a:xfrm>
-            <a:off x="6096000" y="3429000"/>
-            <a:ext cx="5155254" cy="2105287"/>
+            <a:off x="510988" y="1328391"/>
+            <a:ext cx="11260802" cy="5328442"/>
+          </a:xfrm>
+        </p:spPr>
+        <p:txBody>
+          <a:bodyPr>
+            <a:normAutofit/>
+          </a:bodyPr>
+          <a:lstStyle/>
+          <a:p>
+            <a:endParaRPr lang="en-US" altLang="ko-KR" dirty="0"/>
+          </a:p>
+          <a:p>
+            <a:pPr marL="0" indent="0">
+              <a:buNone/>
+            </a:pPr>
+            <a:endParaRPr lang="en-US" altLang="ko-KR" dirty="0"/>
+          </a:p>
+          <a:p>
+            <a:endParaRPr lang="en-US" altLang="ko-KR" dirty="0"/>
+          </a:p>
+        </p:txBody>
+      </p:sp>
+      <p:sp>
+        <p:nvSpPr>
+          <p:cNvPr id="4" name="날짜 개체 틀 3">
+            <a:extLst>
+              <a:ext uri="{FF2B5EF4-FFF2-40B4-BE49-F238E27FC236}">
+                <a16:creationId xmlns:a16="http://schemas.microsoft.com/office/drawing/2014/main" id="{A695DDE5-0A39-A366-4CFE-A283911999CD}"/>
+              </a:ext>
+            </a:extLst>
+          </p:cNvPr>
+          <p:cNvSpPr>
+            <a:spLocks noGrp="1"/>
+          </p:cNvSpPr>
+          <p:nvPr>
+            <p:ph type="dt" sz="half" idx="10"/>
+          </p:nvPr>
+        </p:nvSpPr>
+        <p:spPr/>
+        <p:txBody>
+          <a:bodyPr/>
+          <a:lstStyle/>
+          <a:p>
+            <a:fld id="{0F78D9C4-20C1-4B15-A116-16DC77AD9A1E}" type="datetime1">
+              <a:rPr lang="ko-KR" altLang="en-US" smtClean="0"/>
+              <a:t>2024-08-05</a:t>
+            </a:fld>
+            <a:endParaRPr lang="ko-KR" altLang="en-US"/>
+          </a:p>
+        </p:txBody>
+      </p:sp>
+      <p:sp>
+        <p:nvSpPr>
+          <p:cNvPr id="5" name="슬라이드 번호 개체 틀 4">
+            <a:extLst>
+              <a:ext uri="{FF2B5EF4-FFF2-40B4-BE49-F238E27FC236}">
+                <a16:creationId xmlns:a16="http://schemas.microsoft.com/office/drawing/2014/main" id="{5E040F43-60A7-C50D-1F5B-F984054F2D7C}"/>
+              </a:ext>
+            </a:extLst>
+          </p:cNvPr>
+          <p:cNvSpPr>
+            <a:spLocks noGrp="1"/>
+          </p:cNvSpPr>
+          <p:nvPr>
+            <p:ph type="sldNum" sz="quarter" idx="12"/>
+          </p:nvPr>
+        </p:nvSpPr>
+        <p:spPr/>
+        <p:txBody>
+          <a:bodyPr/>
+          <a:lstStyle/>
+          <a:p>
+            <a:fld id="{083A2CE0-18CD-4102-B738-4ACFF9E68BA4}" type="slidenum">
+              <a:rPr lang="ko-KR" altLang="en-US" smtClean="0"/>
+              <a:t>18</a:t>
+            </a:fld>
+            <a:endParaRPr lang="ko-KR" altLang="en-US"/>
+          </a:p>
+        </p:txBody>
+      </p:sp>
+      <p:sp>
+        <p:nvSpPr>
+          <p:cNvPr id="2" name="제목 1">
+            <a:extLst>
+              <a:ext uri="{FF2B5EF4-FFF2-40B4-BE49-F238E27FC236}">
+                <a16:creationId xmlns:a16="http://schemas.microsoft.com/office/drawing/2014/main" id="{5FAC57F5-99D7-9C46-B6C1-D16224151FE9}"/>
+              </a:ext>
+            </a:extLst>
+          </p:cNvPr>
+          <p:cNvSpPr>
+            <a:spLocks noGrp="1"/>
+          </p:cNvSpPr>
+          <p:nvPr>
+            <p:ph type="title"/>
+          </p:nvPr>
+        </p:nvSpPr>
+        <p:spPr/>
+        <p:txBody>
+          <a:bodyPr/>
+          <a:lstStyle/>
+          <a:p>
+            <a:r>
+              <a:rPr lang="ko-KR" altLang="en-US" dirty="0">
+                <a:solidFill>
+                  <a:srgbClr val="6EC173"/>
+                </a:solidFill>
+              </a:rPr>
+              <a:t>실습</a:t>
+            </a:r>
+            <a:r>
+              <a:rPr lang="en-US" altLang="ko-KR" dirty="0">
+                <a:solidFill>
+                  <a:srgbClr val="6EC173"/>
+                </a:solidFill>
+              </a:rPr>
+              <a:t>.  </a:t>
+            </a:r>
+            <a:r>
+              <a:rPr lang="en-US" altLang="ko-KR" dirty="0"/>
+              <a:t> </a:t>
+            </a:r>
+            <a:r>
+              <a:rPr lang="en-US" altLang="ko-KR" dirty="0" smtClean="0"/>
+              <a:t>Map &amp; Filter </a:t>
+            </a:r>
+            <a:r>
+              <a:rPr lang="ko-KR" altLang="en-US" dirty="0"/>
+              <a:t>실습</a:t>
+            </a:r>
+          </a:p>
+        </p:txBody>
+      </p:sp>
+      <p:sp>
+        <p:nvSpPr>
+          <p:cNvPr id="6" name="내용 개체 틀 1">
+            <a:extLst>
+              <a:ext uri="{FF2B5EF4-FFF2-40B4-BE49-F238E27FC236}">
+                <a16:creationId xmlns:a16="http://schemas.microsoft.com/office/drawing/2014/main" id="{70C2BA37-BE91-39C4-AC08-0E8A1052E2F7}"/>
+              </a:ext>
+            </a:extLst>
+          </p:cNvPr>
+          <p:cNvSpPr txBox="1">
+            <a:spLocks/>
+          </p:cNvSpPr>
+          <p:nvPr/>
+        </p:nvSpPr>
+        <p:spPr>
+          <a:xfrm>
+            <a:off x="838200" y="1825625"/>
+            <a:ext cx="10515600" cy="4351338"/>
           </a:xfrm>
           <a:prstGeom prst="rect">
             <a:avLst/>
           </a:prstGeom>
         </p:spPr>
-      </p:pic>
-      <p:sp>
-        <p:nvSpPr>
-          <p:cNvPr id="2" name="제목 1">
-            <a:extLst>
-              <a:ext uri="{FF2B5EF4-FFF2-40B4-BE49-F238E27FC236}">
-                <a16:creationId xmlns:a16="http://schemas.microsoft.com/office/drawing/2014/main" id="{6C705268-880D-AF4E-8A90-8B152EB81097}"/>
-              </a:ext>
-            </a:extLst>
-          </p:cNvPr>
-          <p:cNvSpPr>
-            <a:spLocks noGrp="1"/>
-          </p:cNvSpPr>
-          <p:nvPr>
-            <p:ph type="title"/>
-          </p:nvPr>
-        </p:nvSpPr>
-        <p:spPr/>
-        <p:txBody>
-          <a:bodyPr/>
-          <a:lstStyle/>
-          <a:p>
+        <p:txBody>
+          <a:bodyPr vert="horz" lIns="91440" tIns="45720" rIns="91440" bIns="45720" rtlCol="0">
+            <a:normAutofit/>
+          </a:bodyPr>
+          <a:lstStyle>
+            <a:lvl1pPr marL="228600" indent="-228600" algn="l" defTabSz="914400" rtl="0" eaLnBrk="1" latinLnBrk="1" hangingPunct="1">
+              <a:lnSpc>
+                <a:spcPct val="90000"/>
+              </a:lnSpc>
+              <a:spcBef>
+                <a:spcPts val="1000"/>
+              </a:spcBef>
+              <a:buFont typeface="Arial" panose="020B0604020202020204" pitchFamily="34" charset="0"/>
+              <a:buChar char="•"/>
+              <a:defRPr sz="2800" kern="1200">
+                <a:solidFill>
+                  <a:schemeClr val="tx1"/>
+                </a:solidFill>
+                <a:latin typeface="+mn-lt"/>
+                <a:ea typeface="+mn-ea"/>
+                <a:cs typeface="+mn-cs"/>
+              </a:defRPr>
+            </a:lvl1pPr>
+            <a:lvl2pPr marL="685800" indent="-228600" algn="l" defTabSz="914400" rtl="0" eaLnBrk="1" latinLnBrk="1" hangingPunct="1">
+              <a:lnSpc>
+                <a:spcPct val="90000"/>
+              </a:lnSpc>
+              <a:spcBef>
+                <a:spcPts val="500"/>
+              </a:spcBef>
+              <a:buFont typeface="Arial" panose="020B0604020202020204" pitchFamily="34" charset="0"/>
+              <a:buChar char="•"/>
+              <a:defRPr sz="2400" kern="1200">
+                <a:solidFill>
+                  <a:schemeClr val="tx1"/>
+                </a:solidFill>
+                <a:latin typeface="+mn-lt"/>
+                <a:ea typeface="+mn-ea"/>
+                <a:cs typeface="+mn-cs"/>
+              </a:defRPr>
+            </a:lvl2pPr>
+            <a:lvl3pPr marL="1143000" indent="-228600" algn="l" defTabSz="914400" rtl="0" eaLnBrk="1" latinLnBrk="1" hangingPunct="1">
+              <a:lnSpc>
+                <a:spcPct val="90000"/>
+              </a:lnSpc>
+              <a:spcBef>
+                <a:spcPts val="500"/>
+              </a:spcBef>
+              <a:buFont typeface="Arial" panose="020B0604020202020204" pitchFamily="34" charset="0"/>
+              <a:buChar char="•"/>
+              <a:defRPr sz="2000" kern="1200">
+                <a:solidFill>
+                  <a:schemeClr val="tx1"/>
+                </a:solidFill>
+                <a:latin typeface="+mn-lt"/>
+                <a:ea typeface="+mn-ea"/>
+                <a:cs typeface="+mn-cs"/>
+              </a:defRPr>
+            </a:lvl3pPr>
+            <a:lvl4pPr marL="1600200" indent="-228600" algn="l" defTabSz="914400" rtl="0" eaLnBrk="1" latinLnBrk="1" hangingPunct="1">
+              <a:lnSpc>
+                <a:spcPct val="90000"/>
+              </a:lnSpc>
+              <a:spcBef>
+                <a:spcPts val="500"/>
+              </a:spcBef>
+              <a:buFont typeface="Arial" panose="020B0604020202020204" pitchFamily="34" charset="0"/>
+              <a:buChar char="•"/>
+              <a:defRPr sz="1800" kern="1200">
+                <a:solidFill>
+                  <a:schemeClr val="tx1"/>
+                </a:solidFill>
+                <a:latin typeface="+mn-lt"/>
+                <a:ea typeface="+mn-ea"/>
+                <a:cs typeface="+mn-cs"/>
+              </a:defRPr>
+            </a:lvl4pPr>
+            <a:lvl5pPr marL="2057400" indent="-228600" algn="l" defTabSz="914400" rtl="0" eaLnBrk="1" latinLnBrk="1" hangingPunct="1">
+              <a:lnSpc>
+                <a:spcPct val="90000"/>
+              </a:lnSpc>
+              <a:spcBef>
+                <a:spcPts val="500"/>
+              </a:spcBef>
+              <a:buFont typeface="Arial" panose="020B0604020202020204" pitchFamily="34" charset="0"/>
+              <a:buChar char="•"/>
+              <a:defRPr sz="1800" kern="1200">
+                <a:solidFill>
+                  <a:schemeClr val="tx1"/>
+                </a:solidFill>
+                <a:latin typeface="+mn-lt"/>
+                <a:ea typeface="+mn-ea"/>
+                <a:cs typeface="+mn-cs"/>
+              </a:defRPr>
+            </a:lvl5pPr>
+            <a:lvl6pPr marL="2514600" indent="-228600" algn="l" defTabSz="914400" rtl="0" eaLnBrk="1" latinLnBrk="1" hangingPunct="1">
+              <a:lnSpc>
+                <a:spcPct val="90000"/>
+              </a:lnSpc>
+              <a:spcBef>
+                <a:spcPts val="500"/>
+              </a:spcBef>
+              <a:buFont typeface="Arial" panose="020B0604020202020204" pitchFamily="34" charset="0"/>
+              <a:buChar char="•"/>
+              <a:defRPr sz="1800" kern="1200">
+                <a:solidFill>
+                  <a:schemeClr val="tx1"/>
+                </a:solidFill>
+                <a:latin typeface="+mn-lt"/>
+                <a:ea typeface="+mn-ea"/>
+                <a:cs typeface="+mn-cs"/>
+              </a:defRPr>
+            </a:lvl6pPr>
+            <a:lvl7pPr marL="2971800" indent="-228600" algn="l" defTabSz="914400" rtl="0" eaLnBrk="1" latinLnBrk="1" hangingPunct="1">
+              <a:lnSpc>
+                <a:spcPct val="90000"/>
+              </a:lnSpc>
+              <a:spcBef>
+                <a:spcPts val="500"/>
+              </a:spcBef>
+              <a:buFont typeface="Arial" panose="020B0604020202020204" pitchFamily="34" charset="0"/>
+              <a:buChar char="•"/>
+              <a:defRPr sz="1800" kern="1200">
+                <a:solidFill>
+                  <a:schemeClr val="tx1"/>
+                </a:solidFill>
+                <a:latin typeface="+mn-lt"/>
+                <a:ea typeface="+mn-ea"/>
+                <a:cs typeface="+mn-cs"/>
+              </a:defRPr>
+            </a:lvl7pPr>
+            <a:lvl8pPr marL="3429000" indent="-228600" algn="l" defTabSz="914400" rtl="0" eaLnBrk="1" latinLnBrk="1" hangingPunct="1">
+              <a:lnSpc>
+                <a:spcPct val="90000"/>
+              </a:lnSpc>
+              <a:spcBef>
+                <a:spcPts val="500"/>
+              </a:spcBef>
+              <a:buFont typeface="Arial" panose="020B0604020202020204" pitchFamily="34" charset="0"/>
+              <a:buChar char="•"/>
+              <a:defRPr sz="1800" kern="1200">
+                <a:solidFill>
+                  <a:schemeClr val="tx1"/>
+                </a:solidFill>
+                <a:latin typeface="+mn-lt"/>
+                <a:ea typeface="+mn-ea"/>
+                <a:cs typeface="+mn-cs"/>
+              </a:defRPr>
+            </a:lvl8pPr>
+            <a:lvl9pPr marL="3886200" indent="-228600" algn="l" defTabSz="914400" rtl="0" eaLnBrk="1" latinLnBrk="1" hangingPunct="1">
+              <a:lnSpc>
+                <a:spcPct val="90000"/>
+              </a:lnSpc>
+              <a:spcBef>
+                <a:spcPts val="500"/>
+              </a:spcBef>
+              <a:buFont typeface="Arial" panose="020B0604020202020204" pitchFamily="34" charset="0"/>
+              <a:buChar char="•"/>
+              <a:defRPr sz="1800" kern="1200">
+                <a:solidFill>
+                  <a:schemeClr val="tx1"/>
+                </a:solidFill>
+                <a:latin typeface="+mn-lt"/>
+                <a:ea typeface="+mn-ea"/>
+                <a:cs typeface="+mn-cs"/>
+              </a:defRPr>
+            </a:lvl9pPr>
+          </a:lstStyle>
+          <a:p>
+            <a:pPr marL="457200" lvl="1" indent="0">
+              <a:buFont typeface="Arial" panose="020B0604020202020204" pitchFamily="34" charset="0"/>
+              <a:buNone/>
+            </a:pPr>
+            <a:endParaRPr lang="en-US" altLang="ko-KR" dirty="0">
+              <a:solidFill>
+                <a:srgbClr val="212529"/>
+              </a:solidFill>
+              <a:latin typeface="+mn-ea"/>
+            </a:endParaRPr>
+          </a:p>
+          <a:p>
+            <a:pPr marL="457200" lvl="1" indent="0">
+              <a:buFont typeface="Arial" panose="020B0604020202020204" pitchFamily="34" charset="0"/>
+              <a:buNone/>
+            </a:pPr>
+            <a:endParaRPr lang="en-US" altLang="ko-KR" dirty="0">
+              <a:solidFill>
+                <a:srgbClr val="212529"/>
+              </a:solidFill>
+              <a:latin typeface="+mn-ea"/>
+            </a:endParaRPr>
+          </a:p>
+          <a:p>
+            <a:r>
+              <a:rPr lang="en-US" altLang="ko-KR" b="1" dirty="0">
+                <a:solidFill>
+                  <a:srgbClr val="212529"/>
+                </a:solidFill>
+                <a:latin typeface="+mn-ea"/>
+              </a:rPr>
+              <a:t>[</a:t>
+            </a:r>
+            <a:r>
+              <a:rPr lang="ko-KR" altLang="en-US" b="1" dirty="0" err="1">
+                <a:solidFill>
+                  <a:srgbClr val="212529"/>
+                </a:solidFill>
+                <a:latin typeface="+mn-ea"/>
+              </a:rPr>
+              <a:t>코딩온</a:t>
+            </a:r>
+            <a:r>
+              <a:rPr lang="en-US" altLang="ko-KR" b="1" dirty="0">
+                <a:solidFill>
+                  <a:srgbClr val="212529"/>
+                </a:solidFill>
+                <a:latin typeface="+mn-ea"/>
+              </a:rPr>
+              <a:t>] React </a:t>
+            </a:r>
+            <a:r>
+              <a:rPr lang="ko-KR" altLang="en-US" b="1" dirty="0">
+                <a:solidFill>
+                  <a:srgbClr val="212529"/>
+                </a:solidFill>
+                <a:latin typeface="+mn-ea"/>
+              </a:rPr>
+              <a:t>실습 </a:t>
+            </a:r>
             <a:r>
               <a:rPr lang="ko-KR" altLang="en-US" dirty="0">
                 <a:solidFill>
+                  <a:srgbClr val="212529"/>
+                </a:solidFill>
+                <a:latin typeface="+mn-ea"/>
+              </a:rPr>
+              <a:t>강의 클릭</a:t>
+            </a:r>
+            <a:r>
+              <a:rPr lang="en-US" altLang="ko-KR" dirty="0">
+                <a:solidFill>
+                  <a:srgbClr val="212529"/>
+                </a:solidFill>
+                <a:latin typeface="+mn-ea"/>
+              </a:rPr>
+              <a:t/>
+            </a:r>
+            <a:br>
+              <a:rPr lang="en-US" altLang="ko-KR" dirty="0">
+                <a:solidFill>
+                  <a:srgbClr val="212529"/>
+                </a:solidFill>
+                <a:latin typeface="+mn-ea"/>
+              </a:rPr>
+            </a:br>
+            <a:endParaRPr lang="en-US" altLang="ko-KR" dirty="0">
+              <a:solidFill>
+                <a:srgbClr val="212529"/>
+              </a:solidFill>
+              <a:latin typeface="+mn-ea"/>
+            </a:endParaRPr>
+          </a:p>
+          <a:p>
+            <a:pPr lvl="1"/>
+            <a:r>
+              <a:rPr lang="ko-KR" altLang="en-US" sz="2800" b="1" dirty="0">
+                <a:solidFill>
+                  <a:srgbClr val="212529"/>
+                </a:solidFill>
+                <a:latin typeface="+mn-ea"/>
+              </a:rPr>
+              <a:t>➡ </a:t>
+            </a:r>
+            <a:r>
+              <a:rPr lang="en-US" altLang="ko-KR" sz="2800" b="1" dirty="0" smtClean="0">
+                <a:solidFill>
+                  <a:srgbClr val="212529"/>
+                </a:solidFill>
+                <a:latin typeface="+mn-ea"/>
+              </a:rPr>
+              <a:t>[</a:t>
+            </a:r>
+            <a:r>
+              <a:rPr lang="en-US" altLang="ko-KR" sz="2800" b="1" dirty="0"/>
+              <a:t>Map &amp; Filter</a:t>
+            </a:r>
+            <a:r>
+              <a:rPr lang="ko-KR" altLang="en-US" sz="2800" b="1" dirty="0" smtClean="0">
+                <a:solidFill>
+                  <a:srgbClr val="212529"/>
+                </a:solidFill>
+                <a:latin typeface="+mn-ea"/>
+              </a:rPr>
+              <a:t> </a:t>
+            </a:r>
+            <a:r>
+              <a:rPr lang="ko-KR" altLang="en-US" sz="2800" b="1" dirty="0">
+                <a:solidFill>
+                  <a:srgbClr val="212529"/>
+                </a:solidFill>
+                <a:latin typeface="+mn-ea"/>
+              </a:rPr>
+              <a:t>실습</a:t>
+            </a:r>
+            <a:r>
+              <a:rPr lang="en-US" altLang="ko-KR" sz="2800" b="1" dirty="0">
+                <a:solidFill>
+                  <a:srgbClr val="212529"/>
+                </a:solidFill>
+                <a:latin typeface="+mn-ea"/>
+              </a:rPr>
+              <a:t>]</a:t>
+            </a:r>
+            <a:r>
+              <a:rPr lang="en-US" altLang="ko-KR" sz="2800" dirty="0">
+                <a:solidFill>
+                  <a:srgbClr val="212529"/>
+                </a:solidFill>
+                <a:latin typeface="+mn-ea"/>
+              </a:rPr>
+              <a:t> </a:t>
+            </a:r>
+            <a:r>
+              <a:rPr lang="ko-KR" altLang="en-US" sz="2800" dirty="0">
+                <a:solidFill>
+                  <a:srgbClr val="212529"/>
+                </a:solidFill>
+                <a:latin typeface="+mn-ea"/>
+              </a:rPr>
+              <a:t>커리큘럼 클릭</a:t>
+            </a:r>
+            <a:endParaRPr lang="en-US" altLang="ko-KR" sz="2800" dirty="0">
+              <a:solidFill>
+                <a:srgbClr val="212529"/>
+              </a:solidFill>
+              <a:latin typeface="+mn-ea"/>
+            </a:endParaRPr>
+          </a:p>
+          <a:p>
+            <a:pPr lvl="1"/>
+            <a:r>
+              <a:rPr lang="ko-KR" altLang="en-US" sz="2800" b="1" dirty="0">
+                <a:solidFill>
+                  <a:srgbClr val="212529"/>
+                </a:solidFill>
+                <a:latin typeface="+mn-ea"/>
+              </a:rPr>
+              <a:t>➡ </a:t>
+            </a:r>
+            <a:r>
+              <a:rPr lang="en-US" altLang="ko-KR" sz="2800" b="1" dirty="0">
+                <a:solidFill>
                   <a:schemeClr val="accent1"/>
                 </a:solidFill>
-              </a:rPr>
-              <a:t>실습</a:t>
-            </a:r>
-            <a:r>
-              <a:rPr lang="en-US" altLang="ko-KR" dirty="0">
+                <a:latin typeface="+mn-ea"/>
+              </a:rPr>
+              <a:t>[</a:t>
+            </a:r>
+            <a:r>
+              <a:rPr lang="en-US" altLang="ko-KR" sz="2800" b="1" dirty="0" smtClean="0">
                 <a:solidFill>
                   <a:schemeClr val="accent1"/>
                 </a:solidFill>
-              </a:rPr>
-              <a:t>.</a:t>
-            </a:r>
-            <a:r>
-              <a:rPr lang="ko-KR" altLang="en-US" dirty="0">
+                <a:latin typeface="+mn-ea"/>
+              </a:rPr>
+              <a:t>1~3</a:t>
+            </a:r>
+            <a:r>
+              <a:rPr lang="ko-KR" altLang="en-US" sz="2800" b="1" dirty="0" smtClean="0">
                 <a:solidFill>
                   <a:schemeClr val="accent1"/>
                 </a:solidFill>
+                <a:latin typeface="+mn-ea"/>
+              </a:rPr>
+              <a:t>번 문제</a:t>
+            </a:r>
+            <a:r>
+              <a:rPr lang="en-US" altLang="ko-KR" sz="2800" b="1" dirty="0" smtClean="0">
+                <a:solidFill>
+                  <a:schemeClr val="accent1"/>
+                </a:solidFill>
+                <a:latin typeface="+mn-ea"/>
+              </a:rPr>
+              <a:t>]</a:t>
+            </a:r>
+            <a:r>
+              <a:rPr lang="en-US" altLang="ko-KR" sz="2800" dirty="0" smtClean="0">
+                <a:solidFill>
+                  <a:schemeClr val="accent1"/>
+                </a:solidFill>
+                <a:latin typeface="+mn-ea"/>
               </a:rPr>
               <a:t> </a:t>
             </a:r>
             <a:r>
-              <a:rPr lang="ko-KR" altLang="en-US" dirty="0"/>
-              <a:t>컴포넌트 응용 실습</a:t>
-            </a:r>
-          </a:p>
-        </p:txBody>
-      </p:sp>
-      <p:sp>
-        <p:nvSpPr>
-          <p:cNvPr id="4" name="날짜 개체 틀 3">
-            <a:extLst>
-              <a:ext uri="{FF2B5EF4-FFF2-40B4-BE49-F238E27FC236}">
-                <a16:creationId xmlns:a16="http://schemas.microsoft.com/office/drawing/2014/main" id="{6EE9B434-8977-A422-69B8-4F63EBA503FB}"/>
-              </a:ext>
-            </a:extLst>
-          </p:cNvPr>
-          <p:cNvSpPr>
-            <a:spLocks noGrp="1"/>
-          </p:cNvSpPr>
-          <p:nvPr>
-            <p:ph type="dt" sz="half" idx="10"/>
-          </p:nvPr>
-        </p:nvSpPr>
-        <p:spPr/>
-        <p:txBody>
-          <a:bodyPr/>
-          <a:lstStyle/>
-          <a:p>
-            <a:fld id="{4CE28EF7-11FE-469C-80FD-B28204A21ED9}" type="datetime6">
-              <a:rPr lang="ko-KR" altLang="en-US" smtClean="0"/>
-              <a:t>2023년 10월</a:t>
-            </a:fld>
-            <a:endParaRPr lang="ko-KR" altLang="en-US"/>
-          </a:p>
-        </p:txBody>
-      </p:sp>
-      <p:sp>
-        <p:nvSpPr>
-          <p:cNvPr id="5" name="슬라이드 번호 개체 틀 4">
-            <a:extLst>
-              <a:ext uri="{FF2B5EF4-FFF2-40B4-BE49-F238E27FC236}">
-                <a16:creationId xmlns:a16="http://schemas.microsoft.com/office/drawing/2014/main" id="{75E3E9B0-C628-12AF-B688-62BAA3A8B414}"/>
-              </a:ext>
-            </a:extLst>
-          </p:cNvPr>
-          <p:cNvSpPr>
-            <a:spLocks noGrp="1"/>
-          </p:cNvSpPr>
-          <p:nvPr>
-            <p:ph type="sldNum" sz="quarter" idx="12"/>
-          </p:nvPr>
-        </p:nvSpPr>
-        <p:spPr/>
-        <p:txBody>
-          <a:bodyPr/>
-          <a:lstStyle/>
-          <a:p>
-            <a:fld id="{083A2CE0-18CD-4102-B738-4ACFF9E68BA4}" type="slidenum">
-              <a:rPr lang="ko-KR" altLang="en-US" smtClean="0"/>
-              <a:t>18</a:t>
-            </a:fld>
-            <a:endParaRPr lang="ko-KR" altLang="en-US"/>
-          </a:p>
-        </p:txBody>
-      </p:sp>
-      <p:sp>
-        <p:nvSpPr>
-          <p:cNvPr id="3" name="내용 개체 틀 2">
-            <a:extLst>
-              <a:ext uri="{FF2B5EF4-FFF2-40B4-BE49-F238E27FC236}">
-                <a16:creationId xmlns:a16="http://schemas.microsoft.com/office/drawing/2014/main" id="{317B1316-1F01-A547-2C0A-66500E99699F}"/>
-              </a:ext>
-            </a:extLst>
-          </p:cNvPr>
-          <p:cNvSpPr>
-            <a:spLocks noGrp="1"/>
-          </p:cNvSpPr>
-          <p:nvPr>
-            <p:ph idx="1"/>
-          </p:nvPr>
-        </p:nvSpPr>
-        <p:spPr>
-          <a:xfrm>
-            <a:off x="838200" y="1661160"/>
-            <a:ext cx="10515600" cy="4515803"/>
-          </a:xfrm>
-        </p:spPr>
-        <p:txBody>
-          <a:bodyPr/>
-          <a:lstStyle/>
-          <a:p>
-            <a:r>
-              <a:rPr lang="en-US" altLang="ko-KR" dirty="0">
-                <a:hlinkClick r:id="rId4"/>
-              </a:rPr>
-              <a:t>https://codingon.co.kr/partner/sesac_ydp_5th</a:t>
-            </a:r>
-            <a:r>
-              <a:rPr lang="en-US" altLang="ko-KR" dirty="0"/>
-              <a:t>  </a:t>
-            </a:r>
-          </a:p>
-          <a:p>
-            <a:r>
-              <a:rPr lang="ko-KR" altLang="en-US" dirty="0"/>
-              <a:t>접속 후 </a:t>
-            </a:r>
-            <a:r>
-              <a:rPr lang="en-US" altLang="ko-KR" dirty="0"/>
-              <a:t>“React &gt; </a:t>
-            </a:r>
-            <a:r>
-              <a:rPr lang="ko-KR" altLang="en-US" dirty="0"/>
-              <a:t>컴포넌트 응용</a:t>
-            </a:r>
-            <a:r>
-              <a:rPr lang="en-US" altLang="ko-KR" dirty="0"/>
+              <a:rPr lang="ko-KR" altLang="en-US" sz="2800" dirty="0" smtClean="0">
+                <a:solidFill>
+                  <a:srgbClr val="212529"/>
+                </a:solidFill>
+                <a:latin typeface="+mn-ea"/>
+              </a:rPr>
+              <a:t> 진행</a:t>
+            </a:r>
+            <a:endParaRPr lang="en-US" altLang="ko-KR" sz="2800" dirty="0" smtClean="0">
+              <a:solidFill>
+                <a:srgbClr val="212529"/>
+              </a:solidFill>
+              <a:latin typeface="+mn-ea"/>
+            </a:endParaRPr>
+          </a:p>
+          <a:p>
+            <a:pPr lvl="1"/>
+            <a:r>
+              <a:rPr lang="ko-KR" altLang="en-US" sz="2800" b="1" dirty="0">
+                <a:solidFill>
+                  <a:srgbClr val="212529"/>
+                </a:solidFill>
+                <a:latin typeface="+mn-ea"/>
+              </a:rPr>
+              <a:t>➡ </a:t>
+            </a:r>
+            <a:r>
+              <a:rPr lang="en-US" altLang="ko-KR" sz="2800" b="1" dirty="0" smtClean="0">
+                <a:solidFill>
+                  <a:schemeClr val="accent1"/>
+                </a:solidFill>
+                <a:latin typeface="+mn-ea"/>
+              </a:rPr>
+              <a:t>[4</a:t>
+            </a:r>
+            <a:r>
+              <a:rPr lang="ko-KR" altLang="en-US" sz="2800" b="1" dirty="0" smtClean="0">
+                <a:solidFill>
+                  <a:schemeClr val="accent1"/>
+                </a:solidFill>
+                <a:latin typeface="+mn-ea"/>
+              </a:rPr>
+              <a:t>번 문제 </a:t>
+            </a:r>
+            <a:r>
+              <a:rPr lang="en-US" altLang="ko-KR" sz="2800" b="1" dirty="0" smtClean="0">
+                <a:solidFill>
+                  <a:schemeClr val="accent1"/>
+                </a:solidFill>
+                <a:latin typeface="+mn-ea"/>
+              </a:rPr>
+              <a:t>(</a:t>
+            </a:r>
+            <a:r>
+              <a:rPr lang="ko-KR" altLang="en-US" sz="2800" b="1" dirty="0" smtClean="0">
+                <a:solidFill>
+                  <a:schemeClr val="accent1"/>
+                </a:solidFill>
+                <a:latin typeface="+mn-ea"/>
+              </a:rPr>
+              <a:t>선택</a:t>
+            </a:r>
+            <a:r>
+              <a:rPr lang="en-US" altLang="ko-KR" sz="2800" b="1" dirty="0" smtClean="0">
+                <a:solidFill>
+                  <a:schemeClr val="accent1"/>
+                </a:solidFill>
+                <a:latin typeface="+mn-ea"/>
+              </a:rPr>
+              <a:t>)]</a:t>
+            </a:r>
+            <a:r>
+              <a:rPr lang="en-US" altLang="ko-KR" sz="2800" dirty="0" smtClean="0">
+                <a:solidFill>
+                  <a:schemeClr val="accent1"/>
+                </a:solidFill>
+                <a:latin typeface="+mn-ea"/>
+              </a:rPr>
               <a:t> </a:t>
             </a:r>
             <a:r>
-              <a:rPr lang="ko-KR" altLang="en-US" dirty="0"/>
-              <a:t>실습 진행</a:t>
-            </a:r>
-            <a:r>
-              <a:rPr lang="en-US" altLang="ko-KR" dirty="0"/>
-              <a:t>＂</a:t>
-            </a:r>
-            <a:endParaRPr lang="ko-KR" altLang="en-US" dirty="0"/>
-          </a:p>
-        </p:txBody>
-      </p:sp>
-      <p:sp>
-        <p:nvSpPr>
-          <p:cNvPr id="8" name="직사각형 7">
-            <a:extLst>
-              <a:ext uri="{FF2B5EF4-FFF2-40B4-BE49-F238E27FC236}">
-                <a16:creationId xmlns:a16="http://schemas.microsoft.com/office/drawing/2014/main" id="{D5DF12E8-C5BE-ABAA-E147-02444AA43208}"/>
-              </a:ext>
-            </a:extLst>
-          </p:cNvPr>
-          <p:cNvSpPr/>
-          <p:nvPr/>
-        </p:nvSpPr>
-        <p:spPr>
-          <a:xfrm>
-            <a:off x="6134100" y="4142622"/>
-            <a:ext cx="5155254" cy="650110"/>
-          </a:xfrm>
-          <a:prstGeom prst="rect">
-            <a:avLst/>
-          </a:prstGeom>
-          <a:noFill/>
-          <a:ln w="57150">
-            <a:solidFill>
-              <a:srgbClr val="FF0000"/>
-            </a:solidFill>
-          </a:ln>
-        </p:spPr>
-        <p:style>
-          <a:lnRef idx="2">
-            <a:schemeClr val="accent1">
-              <a:shade val="50000"/>
-            </a:schemeClr>
-          </a:lnRef>
-          <a:fillRef idx="1">
-            <a:schemeClr val="accent1"/>
-          </a:fillRef>
-          <a:effectRef idx="0">
-            <a:schemeClr val="accent1"/>
-          </a:effectRef>
-          <a:fontRef idx="minor">
-            <a:schemeClr val="lt1"/>
-          </a:fontRef>
-        </p:style>
-        <p:txBody>
-          <a:bodyPr rtlCol="0" anchor="ctr"/>
-          <a:lstStyle/>
-          <a:p>
-            <a:pPr algn="ctr"/>
-            <a:endParaRPr lang="ko-KR" altLang="en-US"/>
+              <a:rPr lang="ko-KR" altLang="en-US" sz="2800" dirty="0" smtClean="0">
+                <a:solidFill>
+                  <a:srgbClr val="212529"/>
+                </a:solidFill>
+                <a:latin typeface="+mn-ea"/>
+              </a:rPr>
+              <a:t> </a:t>
+            </a:r>
+            <a:r>
+              <a:rPr lang="ko-KR" altLang="en-US" sz="2800" dirty="0">
+                <a:solidFill>
+                  <a:srgbClr val="212529"/>
+                </a:solidFill>
+                <a:latin typeface="+mn-ea"/>
+              </a:rPr>
+              <a:t>진행</a:t>
+            </a:r>
+          </a:p>
+          <a:p>
+            <a:pPr lvl="1"/>
+            <a:endParaRPr lang="ko-KR" altLang="en-US" sz="2800" dirty="0">
+              <a:solidFill>
+                <a:srgbClr val="212529"/>
+              </a:solidFill>
+              <a:latin typeface="+mn-ea"/>
+            </a:endParaRPr>
           </a:p>
         </p:txBody>
       </p:sp>
     </p:spTree>
     <p:extLst>
       <p:ext uri="{BB962C8B-B14F-4D97-AF65-F5344CB8AC3E}">
-        <p14:creationId xmlns:p14="http://schemas.microsoft.com/office/powerpoint/2010/main" val="3049010375"/>
-      </p:ext>
-    </p:extLst>
-  </p:cSld>
-  <p:clrMapOvr>
-    <a:masterClrMapping/>
-  </p:clrMapOvr>
-</p:sld>
-</file>
-
-<file path=ppt/slides/slide19.xml><?xml version="1.0" encoding="utf-8"?>
-<p:sld xmlns:a="http://schemas.openxmlformats.org/drawingml/2006/main" xmlns:r="http://schemas.openxmlformats.org/officeDocument/2006/relationships" xmlns:p="http://schemas.openxmlformats.org/presentationml/2006/main">
-  <p:cSld>
-    <p:spTree>
-      <p:nvGrpSpPr>
-        <p:cNvPr id="1" name=""/>
-        <p:cNvGrpSpPr/>
-        <p:nvPr/>
-      </p:nvGrpSpPr>
-      <p:grpSpPr>
-        <a:xfrm>
-          <a:off x="0" y="0"/>
-          <a:ext cx="0" cy="0"/>
-          <a:chOff x="0" y="0"/>
-          <a:chExt cx="0" cy="0"/>
-        </a:xfrm>
-      </p:grpSpPr>
-      <p:sp>
-        <p:nvSpPr>
-          <p:cNvPr id="2" name="제목 1">
-            <a:extLst>
-              <a:ext uri="{FF2B5EF4-FFF2-40B4-BE49-F238E27FC236}">
-                <a16:creationId xmlns:a16="http://schemas.microsoft.com/office/drawing/2014/main" id="{57880986-6552-641B-A348-25A9A8B152EE}"/>
-              </a:ext>
-            </a:extLst>
-          </p:cNvPr>
-          <p:cNvSpPr>
-            <a:spLocks noGrp="1"/>
-          </p:cNvSpPr>
-          <p:nvPr>
-            <p:ph type="title"/>
-          </p:nvPr>
-        </p:nvSpPr>
-        <p:spPr/>
-        <p:txBody>
-          <a:bodyPr/>
-          <a:lstStyle/>
-          <a:p>
-            <a:r>
-              <a:rPr lang="ko-KR" altLang="en-US" dirty="0">
-                <a:solidFill>
-                  <a:schemeClr val="accent1"/>
-                </a:solidFill>
-              </a:rPr>
-              <a:t>실습</a:t>
-            </a:r>
-            <a:r>
-              <a:rPr lang="en-US" altLang="ko-KR" dirty="0">
-                <a:solidFill>
-                  <a:schemeClr val="accent1"/>
-                </a:solidFill>
-              </a:rPr>
-              <a:t>.</a:t>
-            </a:r>
-            <a:r>
-              <a:rPr lang="ko-KR" altLang="en-US" dirty="0">
-                <a:solidFill>
-                  <a:schemeClr val="accent1"/>
-                </a:solidFill>
-              </a:rPr>
-              <a:t> </a:t>
-            </a:r>
-            <a:r>
-              <a:rPr lang="en-US" altLang="ko-KR" dirty="0"/>
-              <a:t>React </a:t>
-            </a:r>
-            <a:r>
-              <a:rPr lang="ko-KR" altLang="en-US" dirty="0"/>
-              <a:t>실습</a:t>
-            </a:r>
-          </a:p>
-        </p:txBody>
-      </p:sp>
-      <p:sp>
-        <p:nvSpPr>
-          <p:cNvPr id="4" name="날짜 개체 틀 3">
-            <a:extLst>
-              <a:ext uri="{FF2B5EF4-FFF2-40B4-BE49-F238E27FC236}">
-                <a16:creationId xmlns:a16="http://schemas.microsoft.com/office/drawing/2014/main" id="{0C8ED35F-A2FD-32CC-89B5-D86E467265C7}"/>
-              </a:ext>
-            </a:extLst>
-          </p:cNvPr>
-          <p:cNvSpPr>
-            <a:spLocks noGrp="1"/>
-          </p:cNvSpPr>
-          <p:nvPr>
-            <p:ph type="dt" sz="half" idx="10"/>
-          </p:nvPr>
-        </p:nvSpPr>
-        <p:spPr/>
-        <p:txBody>
-          <a:bodyPr/>
-          <a:lstStyle/>
-          <a:p>
-            <a:fld id="{DA646E86-D891-418E-AA4A-1B62CB6BC0FA}" type="datetime6">
-              <a:rPr lang="ko-KR" altLang="en-US" smtClean="0"/>
-              <a:t>2023년 10월</a:t>
-            </a:fld>
-            <a:endParaRPr lang="ko-KR" altLang="en-US"/>
-          </a:p>
-        </p:txBody>
-      </p:sp>
-      <p:sp>
-        <p:nvSpPr>
-          <p:cNvPr id="5" name="슬라이드 번호 개체 틀 4">
-            <a:extLst>
-              <a:ext uri="{FF2B5EF4-FFF2-40B4-BE49-F238E27FC236}">
-                <a16:creationId xmlns:a16="http://schemas.microsoft.com/office/drawing/2014/main" id="{D99FC5B5-877A-9C49-545A-E14820A6DF55}"/>
-              </a:ext>
-            </a:extLst>
-          </p:cNvPr>
-          <p:cNvSpPr>
-            <a:spLocks noGrp="1"/>
-          </p:cNvSpPr>
-          <p:nvPr>
-            <p:ph type="sldNum" sz="quarter" idx="12"/>
-          </p:nvPr>
-        </p:nvSpPr>
-        <p:spPr/>
-        <p:txBody>
-          <a:bodyPr/>
-          <a:lstStyle/>
-          <a:p>
-            <a:fld id="{083A2CE0-18CD-4102-B738-4ACFF9E68BA4}" type="slidenum">
-              <a:rPr lang="ko-KR" altLang="en-US" smtClean="0"/>
-              <a:t>19</a:t>
-            </a:fld>
-            <a:endParaRPr lang="ko-KR" altLang="en-US"/>
-          </a:p>
-        </p:txBody>
-      </p:sp>
-      <p:sp>
-        <p:nvSpPr>
-          <p:cNvPr id="3" name="내용 개체 틀 2">
-            <a:extLst>
-              <a:ext uri="{FF2B5EF4-FFF2-40B4-BE49-F238E27FC236}">
-                <a16:creationId xmlns:a16="http://schemas.microsoft.com/office/drawing/2014/main" id="{6BB45408-8D12-9C89-4EBE-B7C17E5E40EE}"/>
-              </a:ext>
-            </a:extLst>
-          </p:cNvPr>
-          <p:cNvSpPr>
-            <a:spLocks noGrp="1"/>
-          </p:cNvSpPr>
-          <p:nvPr>
-            <p:ph idx="1"/>
-          </p:nvPr>
-        </p:nvSpPr>
-        <p:spPr>
-          <a:xfrm>
-            <a:off x="533401" y="1565213"/>
-            <a:ext cx="10515600" cy="4111688"/>
-          </a:xfrm>
-        </p:spPr>
-        <p:txBody>
-          <a:bodyPr/>
-          <a:lstStyle/>
-          <a:p>
-            <a:r>
-              <a:rPr lang="en-US" altLang="ko-KR" dirty="0"/>
-              <a:t>1) </a:t>
-            </a:r>
-            <a:r>
-              <a:rPr lang="ko-KR" altLang="en-US" dirty="0"/>
-              <a:t>함수형 컴포넌트 이용하기</a:t>
-            </a:r>
-            <a:endParaRPr lang="en-US" altLang="ko-KR" dirty="0"/>
-          </a:p>
-          <a:p>
-            <a:r>
-              <a:rPr lang="en-US" altLang="ko-KR" dirty="0"/>
-              <a:t>2) </a:t>
-            </a:r>
-            <a:r>
-              <a:rPr lang="en-US" altLang="ko-KR" dirty="0" err="1"/>
-              <a:t>useState</a:t>
-            </a:r>
-            <a:r>
-              <a:rPr lang="en-US" altLang="ko-KR" dirty="0"/>
-              <a:t> </a:t>
-            </a:r>
-            <a:r>
-              <a:rPr lang="ko-KR" altLang="en-US" dirty="0"/>
-              <a:t>이용하기</a:t>
-            </a:r>
-            <a:endParaRPr lang="en-US" altLang="ko-KR" dirty="0"/>
-          </a:p>
-          <a:p>
-            <a:r>
-              <a:rPr lang="en-US" altLang="ko-KR" dirty="0"/>
-              <a:t>3) map() </a:t>
-            </a:r>
-            <a:r>
-              <a:rPr lang="ko-KR" altLang="en-US" dirty="0"/>
-              <a:t>이용하기</a:t>
-            </a:r>
-          </a:p>
-        </p:txBody>
-      </p:sp>
-      <p:pic>
-        <p:nvPicPr>
-          <p:cNvPr id="10" name="그림 9">
-            <a:extLst>
-              <a:ext uri="{FF2B5EF4-FFF2-40B4-BE49-F238E27FC236}">
-                <a16:creationId xmlns:a16="http://schemas.microsoft.com/office/drawing/2014/main" id="{35509A92-8143-5819-A04C-B5F6399C3760}"/>
-              </a:ext>
-            </a:extLst>
-          </p:cNvPr>
-          <p:cNvPicPr>
-            <a:picLocks noChangeAspect="1"/>
-          </p:cNvPicPr>
-          <p:nvPr/>
-        </p:nvPicPr>
-        <p:blipFill>
-          <a:blip r:embed="rId3">
-            <a:extLst>
-              <a:ext uri="{28A0092B-C50C-407E-A947-70E740481C1C}">
-                <a14:useLocalDpi xmlns:a14="http://schemas.microsoft.com/office/drawing/2010/main" val="0"/>
-              </a:ext>
-            </a:extLst>
-          </a:blip>
-          <a:stretch>
-            <a:fillRect/>
-          </a:stretch>
-        </p:blipFill>
-        <p:spPr>
-          <a:xfrm>
-            <a:off x="5509588" y="2200655"/>
-            <a:ext cx="5715000" cy="3419475"/>
-          </a:xfrm>
-          <a:prstGeom prst="rect">
-            <a:avLst/>
-          </a:prstGeom>
-        </p:spPr>
-      </p:pic>
-    </p:spTree>
-    <p:extLst>
-      <p:ext uri="{BB962C8B-B14F-4D97-AF65-F5344CB8AC3E}">
-        <p14:creationId xmlns:p14="http://schemas.microsoft.com/office/powerpoint/2010/main" val="1249769138"/>
+        <p14:creationId xmlns:p14="http://schemas.microsoft.com/office/powerpoint/2010/main" val="848865641"/>
       </p:ext>
     </p:extLst>
   </p:cSld>
@@ -8197,7 +7971,7 @@
           <a:p>
             <a:fld id="{0E19CB95-6D28-40F1-9DA3-1BAC5D4B5B4F}" type="datetime6">
               <a:rPr lang="ko-KR" altLang="en-US" smtClean="0"/>
-              <a:t>2023년 10월</a:t>
+              <a:t>2024년 8월</a:t>
             </a:fld>
             <a:endParaRPr lang="ko-KR" altLang="en-US"/>
           </a:p>
@@ -8256,298 +8030,6 @@
     <p:extLst>
       <p:ext uri="{BB962C8B-B14F-4D97-AF65-F5344CB8AC3E}">
         <p14:creationId xmlns:p14="http://schemas.microsoft.com/office/powerpoint/2010/main" val="3576966361"/>
-      </p:ext>
-    </p:extLst>
-  </p:cSld>
-  <p:clrMapOvr>
-    <a:masterClrMapping/>
-  </p:clrMapOvr>
-</p:sld>
-</file>
-
-<file path=ppt/slides/slide20.xml><?xml version="1.0" encoding="utf-8"?>
-<p:sld xmlns:a="http://schemas.openxmlformats.org/drawingml/2006/main" xmlns:r="http://schemas.openxmlformats.org/officeDocument/2006/relationships" xmlns:p="http://schemas.openxmlformats.org/presentationml/2006/main">
-  <p:cSld>
-    <p:spTree>
-      <p:nvGrpSpPr>
-        <p:cNvPr id="1" name=""/>
-        <p:cNvGrpSpPr/>
-        <p:nvPr/>
-      </p:nvGrpSpPr>
-      <p:grpSpPr>
-        <a:xfrm>
-          <a:off x="0" y="0"/>
-          <a:ext cx="0" cy="0"/>
-          <a:chOff x="0" y="0"/>
-          <a:chExt cx="0" cy="0"/>
-        </a:xfrm>
-      </p:grpSpPr>
-      <p:sp>
-        <p:nvSpPr>
-          <p:cNvPr id="2" name="제목 1">
-            <a:extLst>
-              <a:ext uri="{FF2B5EF4-FFF2-40B4-BE49-F238E27FC236}">
-                <a16:creationId xmlns:a16="http://schemas.microsoft.com/office/drawing/2014/main" id="{6034BD03-0071-664F-8802-C057F62F9C15}"/>
-              </a:ext>
-            </a:extLst>
-          </p:cNvPr>
-          <p:cNvSpPr>
-            <a:spLocks noGrp="1"/>
-          </p:cNvSpPr>
-          <p:nvPr>
-            <p:ph type="title"/>
-          </p:nvPr>
-        </p:nvSpPr>
-        <p:spPr/>
-        <p:txBody>
-          <a:bodyPr/>
-          <a:lstStyle/>
-          <a:p>
-            <a:r>
-              <a:rPr lang="en-US" altLang="ko-KR" dirty="0">
-                <a:solidFill>
-                  <a:schemeClr val="accent1"/>
-                </a:solidFill>
-              </a:rPr>
-              <a:t>(</a:t>
-            </a:r>
-            <a:r>
-              <a:rPr lang="ko-KR" altLang="en-US" dirty="0">
-                <a:solidFill>
-                  <a:schemeClr val="accent1"/>
-                </a:solidFill>
-              </a:rPr>
-              <a:t>선택</a:t>
-            </a:r>
-            <a:r>
-              <a:rPr lang="en-US" altLang="ko-KR" dirty="0">
-                <a:solidFill>
-                  <a:schemeClr val="accent1"/>
-                </a:solidFill>
-              </a:rPr>
-              <a:t>) </a:t>
-            </a:r>
-            <a:r>
-              <a:rPr lang="ko-KR" altLang="en-US" dirty="0">
-                <a:solidFill>
-                  <a:schemeClr val="accent1"/>
-                </a:solidFill>
-              </a:rPr>
-              <a:t>실습</a:t>
-            </a:r>
-            <a:r>
-              <a:rPr lang="en-US" altLang="ko-KR" dirty="0">
-                <a:solidFill>
-                  <a:schemeClr val="accent1"/>
-                </a:solidFill>
-              </a:rPr>
-              <a:t>.</a:t>
-            </a:r>
-            <a:r>
-              <a:rPr lang="ko-KR" altLang="en-US" dirty="0">
-                <a:solidFill>
-                  <a:schemeClr val="accent1"/>
-                </a:solidFill>
-              </a:rPr>
-              <a:t> </a:t>
-            </a:r>
-            <a:r>
-              <a:rPr lang="en-US" altLang="ko-KR" dirty="0"/>
-              <a:t>React </a:t>
-            </a:r>
-            <a:r>
-              <a:rPr lang="ko-KR" altLang="en-US" dirty="0"/>
-              <a:t>실습</a:t>
-            </a:r>
-          </a:p>
-        </p:txBody>
-      </p:sp>
-      <p:sp>
-        <p:nvSpPr>
-          <p:cNvPr id="4" name="날짜 개체 틀 3">
-            <a:extLst>
-              <a:ext uri="{FF2B5EF4-FFF2-40B4-BE49-F238E27FC236}">
-                <a16:creationId xmlns:a16="http://schemas.microsoft.com/office/drawing/2014/main" id="{C2D8DA84-5954-E86F-D71D-796FD4CF1493}"/>
-              </a:ext>
-            </a:extLst>
-          </p:cNvPr>
-          <p:cNvSpPr>
-            <a:spLocks noGrp="1"/>
-          </p:cNvSpPr>
-          <p:nvPr>
-            <p:ph type="dt" sz="half" idx="10"/>
-          </p:nvPr>
-        </p:nvSpPr>
-        <p:spPr/>
-        <p:txBody>
-          <a:bodyPr/>
-          <a:lstStyle/>
-          <a:p>
-            <a:fld id="{D595D0F2-A8EF-4980-A350-BB14CAF3E230}" type="datetime6">
-              <a:rPr lang="ko-KR" altLang="en-US" smtClean="0"/>
-              <a:t>2023년 10월</a:t>
-            </a:fld>
-            <a:endParaRPr lang="ko-KR" altLang="en-US"/>
-          </a:p>
-        </p:txBody>
-      </p:sp>
-      <p:sp>
-        <p:nvSpPr>
-          <p:cNvPr id="5" name="슬라이드 번호 개체 틀 4">
-            <a:extLst>
-              <a:ext uri="{FF2B5EF4-FFF2-40B4-BE49-F238E27FC236}">
-                <a16:creationId xmlns:a16="http://schemas.microsoft.com/office/drawing/2014/main" id="{391900A9-DEE1-08C0-470D-3D5B35E52584}"/>
-              </a:ext>
-            </a:extLst>
-          </p:cNvPr>
-          <p:cNvSpPr>
-            <a:spLocks noGrp="1"/>
-          </p:cNvSpPr>
-          <p:nvPr>
-            <p:ph type="sldNum" sz="quarter" idx="12"/>
-          </p:nvPr>
-        </p:nvSpPr>
-        <p:spPr/>
-        <p:txBody>
-          <a:bodyPr/>
-          <a:lstStyle/>
-          <a:p>
-            <a:fld id="{083A2CE0-18CD-4102-B738-4ACFF9E68BA4}" type="slidenum">
-              <a:rPr lang="ko-KR" altLang="en-US" smtClean="0"/>
-              <a:t>20</a:t>
-            </a:fld>
-            <a:endParaRPr lang="ko-KR" altLang="en-US"/>
-          </a:p>
-        </p:txBody>
-      </p:sp>
-      <p:sp>
-        <p:nvSpPr>
-          <p:cNvPr id="3" name="내용 개체 틀 2">
-            <a:extLst>
-              <a:ext uri="{FF2B5EF4-FFF2-40B4-BE49-F238E27FC236}">
-                <a16:creationId xmlns:a16="http://schemas.microsoft.com/office/drawing/2014/main" id="{64E8E160-CF7B-E2E1-FBCA-FCC3A268E31F}"/>
-              </a:ext>
-            </a:extLst>
-          </p:cNvPr>
-          <p:cNvSpPr>
-            <a:spLocks noGrp="1"/>
-          </p:cNvSpPr>
-          <p:nvPr>
-            <p:ph idx="1"/>
-          </p:nvPr>
-        </p:nvSpPr>
-        <p:spPr/>
-        <p:txBody>
-          <a:bodyPr/>
-          <a:lstStyle/>
-          <a:p>
-            <a:r>
-              <a:rPr lang="ko-KR" altLang="en-US" dirty="0"/>
-              <a:t>직전 실습에 이어서 </a:t>
-            </a:r>
-            <a:r>
-              <a:rPr lang="en-US" altLang="ko-KR" dirty="0"/>
-              <a:t>“</a:t>
-            </a:r>
-            <a:r>
-              <a:rPr lang="ko-KR" altLang="en-US" dirty="0"/>
-              <a:t>검색</a:t>
-            </a:r>
-            <a:r>
-              <a:rPr lang="en-US" altLang="ko-KR" dirty="0"/>
-              <a:t>” </a:t>
-            </a:r>
-            <a:r>
-              <a:rPr lang="ko-KR" altLang="en-US" dirty="0"/>
-              <a:t>기능 추가</a:t>
-            </a:r>
-            <a:endParaRPr lang="en-US" altLang="ko-KR" dirty="0"/>
-          </a:p>
-          <a:p>
-            <a:pPr lvl="1"/>
-            <a:r>
-              <a:rPr lang="ko-KR" altLang="en-US" dirty="0"/>
-              <a:t>힌트</a:t>
-            </a:r>
-            <a:r>
-              <a:rPr lang="en-US" altLang="ko-KR" dirty="0"/>
-              <a:t>1. filter() </a:t>
-            </a:r>
-            <a:r>
-              <a:rPr lang="ko-KR" altLang="en-US" dirty="0"/>
-              <a:t>메서드 사용</a:t>
-            </a:r>
-            <a:endParaRPr lang="en-US" altLang="ko-KR" dirty="0"/>
-          </a:p>
-          <a:p>
-            <a:pPr lvl="1"/>
-            <a:r>
-              <a:rPr lang="ko-KR" altLang="en-US" dirty="0"/>
-              <a:t>힌트</a:t>
-            </a:r>
-            <a:r>
-              <a:rPr lang="en-US" altLang="ko-KR" dirty="0"/>
-              <a:t>2. select </a:t>
-            </a:r>
-            <a:r>
-              <a:rPr lang="ko-KR" altLang="en-US" dirty="0"/>
-              <a:t>태그 </a:t>
-            </a:r>
-            <a:r>
-              <a:rPr lang="en-US" altLang="ko-KR" dirty="0" err="1"/>
-              <a:t>onChange</a:t>
-            </a:r>
-            <a:r>
-              <a:rPr lang="en-US" altLang="ko-KR" dirty="0"/>
-              <a:t> </a:t>
-            </a:r>
-            <a:r>
-              <a:rPr lang="ko-KR" altLang="en-US" dirty="0"/>
-              <a:t>이벤트</a:t>
-            </a:r>
-          </a:p>
-        </p:txBody>
-      </p:sp>
-      <p:pic>
-        <p:nvPicPr>
-          <p:cNvPr id="9" name="그림 8">
-            <a:extLst>
-              <a:ext uri="{FF2B5EF4-FFF2-40B4-BE49-F238E27FC236}">
-                <a16:creationId xmlns:a16="http://schemas.microsoft.com/office/drawing/2014/main" id="{55A6473E-0669-06F4-292D-F9ABB806B854}"/>
-              </a:ext>
-            </a:extLst>
-          </p:cNvPr>
-          <p:cNvPicPr>
-            <a:picLocks noChangeAspect="1"/>
-          </p:cNvPicPr>
-          <p:nvPr/>
-        </p:nvPicPr>
-        <p:blipFill>
-          <a:blip r:embed="rId3">
-            <a:extLst>
-              <a:ext uri="{28A0092B-C50C-407E-A947-70E740481C1C}">
-                <a14:useLocalDpi xmlns:a14="http://schemas.microsoft.com/office/drawing/2010/main" val="0"/>
-              </a:ext>
-            </a:extLst>
-          </a:blip>
-          <a:stretch>
-            <a:fillRect/>
-          </a:stretch>
-        </p:blipFill>
-        <p:spPr>
-          <a:xfrm>
-            <a:off x="7245916" y="1760507"/>
-            <a:ext cx="4227899" cy="4481573"/>
-          </a:xfrm>
-          <a:prstGeom prst="rect">
-            <a:avLst/>
-          </a:prstGeom>
-        </p:spPr>
-      </p:pic>
-    </p:spTree>
-    <p:extLst>
-      <p:ext uri="{BB962C8B-B14F-4D97-AF65-F5344CB8AC3E}">
-        <p14:creationId xmlns:p14="http://schemas.microsoft.com/office/powerpoint/2010/main" val="537114157"/>
       </p:ext>
     </p:extLst>
   </p:cSld>
@@ -8576,96 +8058,6 @@
       </p:grpSpPr>
       <p:sp>
         <p:nvSpPr>
-          <p:cNvPr id="2" name="제목 1">
-            <a:extLst>
-              <a:ext uri="{FF2B5EF4-FFF2-40B4-BE49-F238E27FC236}">
-                <a16:creationId xmlns:a16="http://schemas.microsoft.com/office/drawing/2014/main" id="{45FB17D5-C686-6D90-A10C-DFBDB6D2FE1F}"/>
-              </a:ext>
-            </a:extLst>
-          </p:cNvPr>
-          <p:cNvSpPr>
-            <a:spLocks noGrp="1"/>
-          </p:cNvSpPr>
-          <p:nvPr>
-            <p:ph type="title"/>
-          </p:nvPr>
-        </p:nvSpPr>
-        <p:spPr/>
-        <p:txBody>
-          <a:bodyPr/>
-          <a:lstStyle/>
-          <a:p>
-            <a:r>
-              <a:rPr lang="en-US" altLang="ko-KR" dirty="0"/>
-              <a:t>map()</a:t>
-            </a:r>
-            <a:r>
-              <a:rPr lang="ko-KR" altLang="en-US" dirty="0"/>
-              <a:t> 함수 문법</a:t>
-            </a:r>
-          </a:p>
-        </p:txBody>
-      </p:sp>
-      <p:sp>
-        <p:nvSpPr>
-          <p:cNvPr id="4" name="날짜 개체 틀 3">
-            <a:extLst>
-              <a:ext uri="{FF2B5EF4-FFF2-40B4-BE49-F238E27FC236}">
-                <a16:creationId xmlns:a16="http://schemas.microsoft.com/office/drawing/2014/main" id="{AD912659-0178-7724-84E7-F9804EEB516A}"/>
-              </a:ext>
-            </a:extLst>
-          </p:cNvPr>
-          <p:cNvSpPr>
-            <a:spLocks noGrp="1"/>
-          </p:cNvSpPr>
-          <p:nvPr>
-            <p:ph type="dt" sz="half" idx="10"/>
-          </p:nvPr>
-        </p:nvSpPr>
-        <p:spPr/>
-        <p:txBody>
-          <a:bodyPr/>
-          <a:lstStyle/>
-          <a:p>
-            <a:fld id="{ECE2EEAA-2D64-41F3-9CC6-1D2C9158BEA1}" type="datetime6">
-              <a:rPr lang="ko-KR" altLang="en-US" smtClean="0"/>
-              <a:t>2023년 10월</a:t>
-            </a:fld>
-            <a:endParaRPr lang="ko-KR" altLang="en-US" dirty="0"/>
-          </a:p>
-        </p:txBody>
-      </p:sp>
-      <p:sp>
-        <p:nvSpPr>
-          <p:cNvPr id="5" name="슬라이드 번호 개체 틀 4">
-            <a:extLst>
-              <a:ext uri="{FF2B5EF4-FFF2-40B4-BE49-F238E27FC236}">
-                <a16:creationId xmlns:a16="http://schemas.microsoft.com/office/drawing/2014/main" id="{E038AD2A-D098-5002-7259-7C0CF8DAB853}"/>
-              </a:ext>
-            </a:extLst>
-          </p:cNvPr>
-          <p:cNvSpPr>
-            <a:spLocks noGrp="1"/>
-          </p:cNvSpPr>
-          <p:nvPr>
-            <p:ph type="sldNum" sz="quarter" idx="12"/>
-          </p:nvPr>
-        </p:nvSpPr>
-        <p:spPr/>
-        <p:txBody>
-          <a:bodyPr/>
-          <a:lstStyle/>
-          <a:p>
-            <a:fld id="{083A2CE0-18CD-4102-B738-4ACFF9E68BA4}" type="slidenum">
-              <a:rPr lang="ko-KR" altLang="en-US" smtClean="0"/>
-              <a:t>3</a:t>
-            </a:fld>
-            <a:endParaRPr lang="ko-KR" altLang="en-US" dirty="0"/>
-          </a:p>
-        </p:txBody>
-      </p:sp>
-      <p:sp>
-        <p:nvSpPr>
           <p:cNvPr id="3" name="내용 개체 틀 2">
             <a:extLst>
               <a:ext uri="{FF2B5EF4-FFF2-40B4-BE49-F238E27FC236}">
@@ -8763,6 +8155,96 @@
           </a:p>
         </p:txBody>
       </p:sp>
+      <p:sp>
+        <p:nvSpPr>
+          <p:cNvPr id="4" name="날짜 개체 틀 3">
+            <a:extLst>
+              <a:ext uri="{FF2B5EF4-FFF2-40B4-BE49-F238E27FC236}">
+                <a16:creationId xmlns:a16="http://schemas.microsoft.com/office/drawing/2014/main" id="{AD912659-0178-7724-84E7-F9804EEB516A}"/>
+              </a:ext>
+            </a:extLst>
+          </p:cNvPr>
+          <p:cNvSpPr>
+            <a:spLocks noGrp="1"/>
+          </p:cNvSpPr>
+          <p:nvPr>
+            <p:ph type="dt" sz="half" idx="10"/>
+          </p:nvPr>
+        </p:nvSpPr>
+        <p:spPr/>
+        <p:txBody>
+          <a:bodyPr/>
+          <a:lstStyle/>
+          <a:p>
+            <a:fld id="{ECE2EEAA-2D64-41F3-9CC6-1D2C9158BEA1}" type="datetime6">
+              <a:rPr lang="ko-KR" altLang="en-US" smtClean="0"/>
+              <a:t>2024년 8월</a:t>
+            </a:fld>
+            <a:endParaRPr lang="ko-KR" altLang="en-US" dirty="0"/>
+          </a:p>
+        </p:txBody>
+      </p:sp>
+      <p:sp>
+        <p:nvSpPr>
+          <p:cNvPr id="5" name="슬라이드 번호 개체 틀 4">
+            <a:extLst>
+              <a:ext uri="{FF2B5EF4-FFF2-40B4-BE49-F238E27FC236}">
+                <a16:creationId xmlns:a16="http://schemas.microsoft.com/office/drawing/2014/main" id="{E038AD2A-D098-5002-7259-7C0CF8DAB853}"/>
+              </a:ext>
+            </a:extLst>
+          </p:cNvPr>
+          <p:cNvSpPr>
+            <a:spLocks noGrp="1"/>
+          </p:cNvSpPr>
+          <p:nvPr>
+            <p:ph type="sldNum" sz="quarter" idx="12"/>
+          </p:nvPr>
+        </p:nvSpPr>
+        <p:spPr/>
+        <p:txBody>
+          <a:bodyPr/>
+          <a:lstStyle/>
+          <a:p>
+            <a:fld id="{083A2CE0-18CD-4102-B738-4ACFF9E68BA4}" type="slidenum">
+              <a:rPr lang="ko-KR" altLang="en-US" smtClean="0"/>
+              <a:t>3</a:t>
+            </a:fld>
+            <a:endParaRPr lang="ko-KR" altLang="en-US" dirty="0"/>
+          </a:p>
+        </p:txBody>
+      </p:sp>
+      <p:sp>
+        <p:nvSpPr>
+          <p:cNvPr id="2" name="제목 1">
+            <a:extLst>
+              <a:ext uri="{FF2B5EF4-FFF2-40B4-BE49-F238E27FC236}">
+                <a16:creationId xmlns:a16="http://schemas.microsoft.com/office/drawing/2014/main" id="{45FB17D5-C686-6D90-A10C-DFBDB6D2FE1F}"/>
+              </a:ext>
+            </a:extLst>
+          </p:cNvPr>
+          <p:cNvSpPr>
+            <a:spLocks noGrp="1"/>
+          </p:cNvSpPr>
+          <p:nvPr>
+            <p:ph type="title"/>
+          </p:nvPr>
+        </p:nvSpPr>
+        <p:spPr/>
+        <p:txBody>
+          <a:bodyPr/>
+          <a:lstStyle/>
+          <a:p>
+            <a:r>
+              <a:rPr lang="en-US" altLang="ko-KR" dirty="0"/>
+              <a:t>map()</a:t>
+            </a:r>
+            <a:r>
+              <a:rPr lang="ko-KR" altLang="en-US" dirty="0"/>
+              <a:t> 함수 문법</a:t>
+            </a:r>
+          </a:p>
+        </p:txBody>
+      </p:sp>
       <p:pic>
         <p:nvPicPr>
           <p:cNvPr id="9" name="그림 8">
@@ -8778,7 +8260,7 @@
           <p:nvPr/>
         </p:nvPicPr>
         <p:blipFill>
-          <a:blip r:embed="rId2"/>
+          <a:blip r:embed="rId3"/>
           <a:stretch>
             <a:fillRect/>
           </a:stretch>
@@ -8825,6 +8307,150 @@
       </p:grpSpPr>
       <p:sp>
         <p:nvSpPr>
+          <p:cNvPr id="3" name="내용 개체 틀 2"/>
+          <p:cNvSpPr>
+            <a:spLocks noGrp="1"/>
+          </p:cNvSpPr>
+          <p:nvPr>
+            <p:ph idx="1"/>
+          </p:nvPr>
+        </p:nvSpPr>
+        <p:spPr/>
+        <p:txBody>
+          <a:bodyPr>
+            <a:normAutofit lnSpcReduction="10000"/>
+          </a:bodyPr>
+          <a:lstStyle/>
+          <a:p>
+            <a:r>
+              <a:rPr lang="ko-KR" altLang="en-US" dirty="0"/>
+              <a:t>배열 데이터를 좀 더 효율적으로 그리기 위해서 </a:t>
+            </a:r>
+            <a:r>
+              <a:rPr lang="en-US" altLang="ko-KR" dirty="0"/>
+              <a:t>map </a:t>
+            </a:r>
+            <a:r>
+              <a:rPr lang="ko-KR" altLang="en-US" dirty="0"/>
+              <a:t>사용</a:t>
+            </a:r>
+            <a:r>
+              <a:rPr lang="en-US" altLang="ko-KR" dirty="0"/>
+              <a:t>!</a:t>
+            </a:r>
+          </a:p>
+          <a:p>
+            <a:endParaRPr lang="en-US" altLang="ko-KR" dirty="0"/>
+          </a:p>
+          <a:p>
+            <a:endParaRPr lang="en-US" altLang="ko-KR" dirty="0"/>
+          </a:p>
+          <a:p>
+            <a:endParaRPr lang="en-US" altLang="ko-KR" dirty="0"/>
+          </a:p>
+          <a:p>
+            <a:r>
+              <a:rPr lang="en-US" altLang="ko-KR" dirty="0"/>
+              <a:t>key</a:t>
+            </a:r>
+          </a:p>
+          <a:p>
+            <a:pPr lvl="1"/>
+            <a:r>
+              <a:rPr lang="ko-KR" altLang="en-US" dirty="0"/>
+              <a:t>기존 요소와 업데이트 요소를 비교하는데 사용되는 속성</a:t>
+            </a:r>
+            <a:r>
+              <a:rPr lang="en-US" altLang="ko-KR" dirty="0"/>
+              <a:t>, </a:t>
+            </a:r>
+          </a:p>
+          <a:p>
+            <a:pPr lvl="1"/>
+            <a:r>
+              <a:rPr lang="ko-KR" altLang="en-US" dirty="0" err="1"/>
+              <a:t>다른요소와</a:t>
+            </a:r>
+            <a:r>
+              <a:rPr lang="ko-KR" altLang="en-US" dirty="0"/>
+              <a:t> 겹치지 않는 </a:t>
+            </a:r>
+            <a:r>
+              <a:rPr lang="ko-KR" altLang="en-US" dirty="0">
+                <a:solidFill>
+                  <a:schemeClr val="accent1"/>
+                </a:solidFill>
+              </a:rPr>
+              <a:t>고유한 값</a:t>
+            </a:r>
+            <a:r>
+              <a:rPr lang="ko-KR" altLang="en-US" dirty="0"/>
+              <a:t>이어야 합니다</a:t>
+            </a:r>
+            <a:r>
+              <a:rPr lang="en-US" altLang="ko-KR" dirty="0"/>
+              <a:t>.</a:t>
+            </a:r>
+          </a:p>
+          <a:p>
+            <a:pPr lvl="1"/>
+            <a:r>
+              <a:rPr lang="en-US" altLang="ko-KR" dirty="0"/>
+              <a:t>key</a:t>
+            </a:r>
+            <a:r>
+              <a:rPr lang="ko-KR" altLang="en-US" dirty="0"/>
+              <a:t>는 고유한 값을 가져야 하기 때문에 배열의 요소 중 고유한 값</a:t>
+            </a:r>
+            <a:r>
+              <a:rPr lang="en-US" altLang="ko-KR" dirty="0"/>
+              <a:t>(id </a:t>
+            </a:r>
+            <a:r>
+              <a:rPr lang="ko-KR" altLang="en-US" dirty="0"/>
+              <a:t>등</a:t>
+            </a:r>
+            <a:r>
+              <a:rPr lang="en-US" altLang="ko-KR" dirty="0"/>
+              <a:t>)</a:t>
+            </a:r>
+            <a:r>
+              <a:rPr lang="ko-KR" altLang="en-US" dirty="0"/>
+              <a:t>이 존재하지 않는다면 </a:t>
+            </a:r>
+            <a:r>
+              <a:rPr lang="en-US" altLang="ko-KR" dirty="0"/>
+              <a:t>index</a:t>
+            </a:r>
+            <a:r>
+              <a:rPr lang="ko-KR" altLang="en-US" dirty="0"/>
+              <a:t>로 사용해도 됩니다</a:t>
+            </a:r>
+            <a:r>
+              <a:rPr lang="en-US" altLang="ko-KR" dirty="0"/>
+              <a:t>! (</a:t>
+            </a:r>
+            <a:r>
+              <a:rPr lang="ko-KR" altLang="en-US" dirty="0"/>
+              <a:t>단</a:t>
+            </a:r>
+            <a:r>
+              <a:rPr lang="en-US" altLang="ko-KR" dirty="0"/>
+              <a:t>, index </a:t>
+            </a:r>
+            <a:r>
+              <a:rPr lang="ko-KR" altLang="en-US" dirty="0"/>
+              <a:t>를 사용하는 것은 최후의 수단</a:t>
+            </a:r>
+            <a:r>
+              <a:rPr lang="en-US" altLang="ko-KR" dirty="0"/>
+              <a:t>!)</a:t>
+            </a:r>
+          </a:p>
+        </p:txBody>
+      </p:sp>
+      <p:sp>
+        <p:nvSpPr>
           <p:cNvPr id="2" name="제목 1"/>
           <p:cNvSpPr>
             <a:spLocks noGrp="1"/>
@@ -8849,150 +8475,6 @@
             <a:r>
               <a:rPr lang="ko-KR" altLang="en-US" dirty="0"/>
               <a:t>과 함께 사용</a:t>
-            </a:r>
-          </a:p>
-        </p:txBody>
-      </p:sp>
-      <p:sp>
-        <p:nvSpPr>
-          <p:cNvPr id="3" name="내용 개체 틀 2"/>
-          <p:cNvSpPr>
-            <a:spLocks noGrp="1"/>
-          </p:cNvSpPr>
-          <p:nvPr>
-            <p:ph idx="1"/>
-          </p:nvPr>
-        </p:nvSpPr>
-        <p:spPr/>
-        <p:txBody>
-          <a:bodyPr>
-            <a:normAutofit/>
-          </a:bodyPr>
-          <a:lstStyle/>
-          <a:p>
-            <a:r>
-              <a:rPr lang="ko-KR" altLang="en-US" dirty="0"/>
-              <a:t>배열 데이터를 좀 더 효율적으로 그리기 위해서 </a:t>
-            </a:r>
-            <a:r>
-              <a:rPr lang="en-US" altLang="ko-KR" dirty="0"/>
-              <a:t>map </a:t>
-            </a:r>
-            <a:r>
-              <a:rPr lang="ko-KR" altLang="en-US" dirty="0"/>
-              <a:t>사용</a:t>
-            </a:r>
-            <a:r>
-              <a:rPr lang="en-US" altLang="ko-KR" dirty="0"/>
-              <a:t>!</a:t>
-            </a:r>
-          </a:p>
-          <a:p>
-            <a:endParaRPr lang="en-US" altLang="ko-KR" dirty="0"/>
-          </a:p>
-          <a:p>
-            <a:endParaRPr lang="en-US" altLang="ko-KR" dirty="0"/>
-          </a:p>
-          <a:p>
-            <a:endParaRPr lang="en-US" altLang="ko-KR" dirty="0"/>
-          </a:p>
-          <a:p>
-            <a:r>
-              <a:rPr lang="en-US" altLang="ko-KR" dirty="0"/>
-              <a:t>key</a:t>
-            </a:r>
-          </a:p>
-          <a:p>
-            <a:pPr lvl="1"/>
-            <a:r>
-              <a:rPr lang="ko-KR" altLang="en-US" dirty="0"/>
-              <a:t>기존 요소와 업데이트 요소를 비교하는데 사용되는 속성</a:t>
-            </a:r>
-            <a:r>
-              <a:rPr lang="en-US" altLang="ko-KR" dirty="0"/>
-              <a:t>, </a:t>
-            </a:r>
-          </a:p>
-          <a:p>
-            <a:pPr lvl="1"/>
-            <a:r>
-              <a:rPr lang="ko-KR" altLang="en-US" dirty="0" err="1"/>
-              <a:t>다른요소와</a:t>
-            </a:r>
-            <a:r>
-              <a:rPr lang="ko-KR" altLang="en-US" dirty="0"/>
-              <a:t> 겹치지 않는 </a:t>
-            </a:r>
-            <a:r>
-              <a:rPr lang="ko-KR" altLang="en-US" dirty="0">
-                <a:solidFill>
-                  <a:schemeClr val="accent1"/>
-                </a:solidFill>
-              </a:rPr>
-              <a:t>고유한 값</a:t>
-            </a:r>
-            <a:r>
-              <a:rPr lang="ko-KR" altLang="en-US" dirty="0"/>
-              <a:t>이어야 합니다</a:t>
-            </a:r>
-            <a:r>
-              <a:rPr lang="en-US" altLang="ko-KR" dirty="0"/>
-              <a:t>.</a:t>
-            </a:r>
-          </a:p>
-          <a:p>
-            <a:pPr lvl="1"/>
-            <a:r>
-              <a:rPr lang="en-US" altLang="ko-KR" dirty="0"/>
-              <a:t>key</a:t>
-            </a:r>
-            <a:r>
-              <a:rPr lang="ko-KR" altLang="en-US" dirty="0"/>
-              <a:t>는 고유한 값을 가져야 하기 때문에 배열의 요소 중 고유한 값</a:t>
-            </a:r>
-            <a:r>
-              <a:rPr lang="en-US" altLang="ko-KR" dirty="0"/>
-              <a:t>(id </a:t>
-            </a:r>
-            <a:r>
-              <a:rPr lang="ko-KR" altLang="en-US" dirty="0"/>
-              <a:t>등</a:t>
-            </a:r>
-            <a:r>
-              <a:rPr lang="en-US" altLang="ko-KR" dirty="0"/>
-              <a:t>)</a:t>
-            </a:r>
-            <a:r>
-              <a:rPr lang="ko-KR" altLang="en-US" dirty="0"/>
-              <a:t>이 존재하지 않는다면 </a:t>
-            </a:r>
-            <a:r>
-              <a:rPr lang="en-US" altLang="ko-KR" dirty="0"/>
-              <a:t>index</a:t>
-            </a:r>
-            <a:r>
-              <a:rPr lang="ko-KR" altLang="en-US" dirty="0"/>
-              <a:t>로 사용해도 됩니다</a:t>
-            </a:r>
-            <a:r>
-              <a:rPr lang="en-US" altLang="ko-KR" dirty="0"/>
-              <a:t>! (</a:t>
-            </a:r>
-            <a:r>
-              <a:rPr lang="ko-KR" altLang="en-US" dirty="0"/>
-              <a:t>단</a:t>
-            </a:r>
-            <a:r>
-              <a:rPr lang="en-US" altLang="ko-KR" dirty="0"/>
-              <a:t>, index </a:t>
-            </a:r>
-            <a:r>
-              <a:rPr lang="ko-KR" altLang="en-US" dirty="0"/>
-              <a:t>를 사용하는 것은 최후의 수단</a:t>
-            </a:r>
-            <a:r>
-              <a:rPr lang="en-US" altLang="ko-KR" dirty="0"/>
-              <a:t>!)</a:t>
             </a:r>
           </a:p>
         </p:txBody>
@@ -9340,6 +8822,49 @@
       </p:grpSpPr>
       <p:sp>
         <p:nvSpPr>
+          <p:cNvPr id="3" name="내용 개체 틀 2"/>
+          <p:cNvSpPr>
+            <a:spLocks noGrp="1"/>
+          </p:cNvSpPr>
+          <p:nvPr>
+            <p:ph idx="1"/>
+          </p:nvPr>
+        </p:nvSpPr>
+        <p:spPr/>
+        <p:txBody>
+          <a:bodyPr/>
+          <a:lstStyle/>
+          <a:p>
+            <a:r>
+              <a:rPr lang="en-US" altLang="ko-KR" dirty="0"/>
+              <a:t>div </a:t>
+            </a:r>
+            <a:r>
+              <a:rPr lang="ko-KR" altLang="en-US" dirty="0"/>
+              <a:t>같은 태그가 아닌 만들어준 </a:t>
+            </a:r>
+            <a:r>
+              <a:rPr lang="ko-KR" altLang="en-US" dirty="0">
+                <a:solidFill>
+                  <a:schemeClr val="accent1"/>
+                </a:solidFill>
+              </a:rPr>
+              <a:t>컴포넌트</a:t>
+            </a:r>
+            <a:r>
+              <a:rPr lang="ko-KR" altLang="en-US" dirty="0"/>
+              <a:t>와 함께 사용할 수도 있겠죠</a:t>
+            </a:r>
+            <a:r>
+              <a:rPr lang="en-US" altLang="ko-KR" dirty="0"/>
+              <a:t>!</a:t>
+            </a:r>
+            <a:endParaRPr lang="ko-KR" altLang="en-US" dirty="0"/>
+          </a:p>
+        </p:txBody>
+      </p:sp>
+      <p:sp>
+        <p:nvSpPr>
           <p:cNvPr id="2" name="제목 1"/>
           <p:cNvSpPr>
             <a:spLocks noGrp="1"/>
@@ -9365,49 +8890,6 @@
               <a:rPr lang="ko-KR" altLang="en-US" dirty="0"/>
               <a:t>과 함께 사용</a:t>
             </a:r>
-          </a:p>
-        </p:txBody>
-      </p:sp>
-      <p:sp>
-        <p:nvSpPr>
-          <p:cNvPr id="3" name="내용 개체 틀 2"/>
-          <p:cNvSpPr>
-            <a:spLocks noGrp="1"/>
-          </p:cNvSpPr>
-          <p:nvPr>
-            <p:ph idx="1"/>
-          </p:nvPr>
-        </p:nvSpPr>
-        <p:spPr/>
-        <p:txBody>
-          <a:bodyPr/>
-          <a:lstStyle/>
-          <a:p>
-            <a:r>
-              <a:rPr lang="en-US" altLang="ko-KR" dirty="0"/>
-              <a:t>div </a:t>
-            </a:r>
-            <a:r>
-              <a:rPr lang="ko-KR" altLang="en-US" dirty="0"/>
-              <a:t>같은 태그가 아닌 만들어준 </a:t>
-            </a:r>
-            <a:r>
-              <a:rPr lang="ko-KR" altLang="en-US" dirty="0">
-                <a:solidFill>
-                  <a:schemeClr val="accent1"/>
-                </a:solidFill>
-              </a:rPr>
-              <a:t>컴포넌트</a:t>
-            </a:r>
-            <a:r>
-              <a:rPr lang="ko-KR" altLang="en-US" dirty="0"/>
-              <a:t>와 함께 사용할 수도 있겠죠</a:t>
-            </a:r>
-            <a:r>
-              <a:rPr lang="en-US" altLang="ko-KR" dirty="0"/>
-              <a:t>!</a:t>
-            </a:r>
-            <a:endParaRPr lang="ko-KR" altLang="en-US" dirty="0"/>
           </a:p>
         </p:txBody>
       </p:sp>
@@ -10024,46 +9506,6 @@
       </p:grpSpPr>
       <p:sp>
         <p:nvSpPr>
-          <p:cNvPr id="2" name="제목 1">
-            <a:extLst>
-              <a:ext uri="{FF2B5EF4-FFF2-40B4-BE49-F238E27FC236}">
-                <a16:creationId xmlns:a16="http://schemas.microsoft.com/office/drawing/2014/main" id="{4DDB0C6E-D947-B48D-9981-6D400FEE7507}"/>
-              </a:ext>
-            </a:extLst>
-          </p:cNvPr>
-          <p:cNvSpPr>
-            <a:spLocks noGrp="1"/>
-          </p:cNvSpPr>
-          <p:nvPr>
-            <p:ph type="title"/>
-          </p:nvPr>
-        </p:nvSpPr>
-        <p:spPr/>
-        <p:txBody>
-          <a:bodyPr/>
-          <a:lstStyle/>
-          <a:p>
-            <a:r>
-              <a:rPr lang="en-US" altLang="ko-KR" dirty="0"/>
-              <a:t>Component</a:t>
-            </a:r>
-            <a:r>
-              <a:rPr lang="ko-KR" altLang="en-US" dirty="0"/>
-              <a:t>에 </a:t>
-            </a:r>
-            <a:r>
-              <a:rPr lang="en-US" altLang="ko-KR" dirty="0"/>
-              <a:t>map() </a:t>
-            </a:r>
-            <a:r>
-              <a:rPr lang="ko-KR" altLang="en-US" dirty="0"/>
-              <a:t>적용</a:t>
-            </a:r>
-          </a:p>
-        </p:txBody>
-      </p:sp>
-      <p:sp>
-        <p:nvSpPr>
           <p:cNvPr id="4" name="날짜 개체 틀 3">
             <a:extLst>
               <a:ext uri="{FF2B5EF4-FFF2-40B4-BE49-F238E27FC236}">
@@ -10085,7 +9527,7 @@
           <a:p>
             <a:fld id="{BD660D5C-6858-45BD-B9C9-03C5FB5E96FA}" type="datetime6">
               <a:rPr lang="ko-KR" altLang="en-US" smtClean="0"/>
-              <a:t>2023년 10월</a:t>
+              <a:t>2024년 8월</a:t>
             </a:fld>
             <a:endParaRPr lang="ko-KR" altLang="en-US"/>
           </a:p>
@@ -10117,6 +9559,46 @@
               <a:t>6</a:t>
             </a:fld>
             <a:endParaRPr lang="ko-KR" altLang="en-US"/>
+          </a:p>
+        </p:txBody>
+      </p:sp>
+      <p:sp>
+        <p:nvSpPr>
+          <p:cNvPr id="2" name="제목 1">
+            <a:extLst>
+              <a:ext uri="{FF2B5EF4-FFF2-40B4-BE49-F238E27FC236}">
+                <a16:creationId xmlns:a16="http://schemas.microsoft.com/office/drawing/2014/main" id="{4DDB0C6E-D947-B48D-9981-6D400FEE7507}"/>
+              </a:ext>
+            </a:extLst>
+          </p:cNvPr>
+          <p:cNvSpPr>
+            <a:spLocks noGrp="1"/>
+          </p:cNvSpPr>
+          <p:nvPr>
+            <p:ph type="title"/>
+          </p:nvPr>
+        </p:nvSpPr>
+        <p:spPr/>
+        <p:txBody>
+          <a:bodyPr/>
+          <a:lstStyle/>
+          <a:p>
+            <a:r>
+              <a:rPr lang="en-US" altLang="ko-KR" dirty="0"/>
+              <a:t>Component</a:t>
+            </a:r>
+            <a:r>
+              <a:rPr lang="ko-KR" altLang="en-US" dirty="0"/>
+              <a:t>에 </a:t>
+            </a:r>
+            <a:r>
+              <a:rPr lang="en-US" altLang="ko-KR" dirty="0"/>
+              <a:t>map() </a:t>
+            </a:r>
+            <a:r>
+              <a:rPr lang="ko-KR" altLang="en-US" dirty="0"/>
+              <a:t>적용</a:t>
+            </a:r>
           </a:p>
         </p:txBody>
       </p:sp>
@@ -10242,104 +9724,6 @@
       </p:grpSpPr>
       <p:sp>
         <p:nvSpPr>
-          <p:cNvPr id="2" name="제목 1">
-            <a:extLst>
-              <a:ext uri="{FF2B5EF4-FFF2-40B4-BE49-F238E27FC236}">
-                <a16:creationId xmlns:a16="http://schemas.microsoft.com/office/drawing/2014/main" id="{E95DC7FC-429E-6D32-128B-12D33F6D3738}"/>
-              </a:ext>
-            </a:extLst>
-          </p:cNvPr>
-          <p:cNvSpPr>
-            <a:spLocks noGrp="1"/>
-          </p:cNvSpPr>
-          <p:nvPr>
-            <p:ph type="title"/>
-          </p:nvPr>
-        </p:nvSpPr>
-        <p:spPr/>
-        <p:txBody>
-          <a:bodyPr/>
-          <a:lstStyle/>
-          <a:p>
-            <a:r>
-              <a:rPr lang="en-US" altLang="ko-KR" dirty="0"/>
-              <a:t>Component</a:t>
-            </a:r>
-            <a:r>
-              <a:rPr lang="ko-KR" altLang="en-US" dirty="0"/>
-              <a:t>에 </a:t>
-            </a:r>
-            <a:r>
-              <a:rPr lang="en-US" altLang="ko-KR" dirty="0"/>
-              <a:t>map() </a:t>
-            </a:r>
-            <a:r>
-              <a:rPr lang="ko-KR" altLang="en-US" dirty="0"/>
-              <a:t>적용</a:t>
-            </a:r>
-          </a:p>
-        </p:txBody>
-      </p:sp>
-      <p:sp>
-        <p:nvSpPr>
-          <p:cNvPr id="4" name="날짜 개체 틀 3">
-            <a:extLst>
-              <a:ext uri="{FF2B5EF4-FFF2-40B4-BE49-F238E27FC236}">
-                <a16:creationId xmlns:a16="http://schemas.microsoft.com/office/drawing/2014/main" id="{0C35DE98-1FC6-0BE5-FB5C-16A91CE48184}"/>
-              </a:ext>
-            </a:extLst>
-          </p:cNvPr>
-          <p:cNvSpPr>
-            <a:spLocks noGrp="1"/>
-          </p:cNvSpPr>
-          <p:nvPr>
-            <p:ph type="dt" sz="half" idx="10"/>
-          </p:nvPr>
-        </p:nvSpPr>
-        <p:spPr/>
-        <p:txBody>
-          <a:bodyPr/>
-          <a:lstStyle/>
-          <a:p>
-            <a:fld id="{1140E07E-9745-4A1E-87D3-F87BED6F3F73}" type="datetime6">
-              <a:rPr lang="ko-KR" altLang="en-US" smtClean="0"/>
-              <a:t>2023년 10월</a:t>
-            </a:fld>
-            <a:endParaRPr lang="ko-KR" altLang="en-US"/>
-          </a:p>
-        </p:txBody>
-      </p:sp>
-      <p:sp>
-        <p:nvSpPr>
-          <p:cNvPr id="5" name="슬라이드 번호 개체 틀 4">
-            <a:extLst>
-              <a:ext uri="{FF2B5EF4-FFF2-40B4-BE49-F238E27FC236}">
-                <a16:creationId xmlns:a16="http://schemas.microsoft.com/office/drawing/2014/main" id="{363854FD-40E1-1051-5F2A-D5BEBB161EDC}"/>
-              </a:ext>
-            </a:extLst>
-          </p:cNvPr>
-          <p:cNvSpPr>
-            <a:spLocks noGrp="1"/>
-          </p:cNvSpPr>
-          <p:nvPr>
-            <p:ph type="sldNum" sz="quarter" idx="12"/>
-          </p:nvPr>
-        </p:nvSpPr>
-        <p:spPr/>
-        <p:txBody>
-          <a:bodyPr/>
-          <a:lstStyle/>
-          <a:p>
-            <a:fld id="{083A2CE0-18CD-4102-B738-4ACFF9E68BA4}" type="slidenum">
-              <a:rPr lang="ko-KR" altLang="en-US" smtClean="0"/>
-              <a:t>7</a:t>
-            </a:fld>
-            <a:endParaRPr lang="ko-KR" altLang="en-US"/>
-          </a:p>
-        </p:txBody>
-      </p:sp>
-      <p:sp>
-        <p:nvSpPr>
           <p:cNvPr id="3" name="내용 개체 틀 2">
             <a:extLst>
               <a:ext uri="{FF2B5EF4-FFF2-40B4-BE49-F238E27FC236}">
@@ -10403,6 +9787,104 @@
             <a:r>
               <a:rPr lang="ko-KR" altLang="en-US" sz="2400" dirty="0"/>
               <a:t>를 사용</a:t>
+            </a:r>
+          </a:p>
+        </p:txBody>
+      </p:sp>
+      <p:sp>
+        <p:nvSpPr>
+          <p:cNvPr id="4" name="날짜 개체 틀 3">
+            <a:extLst>
+              <a:ext uri="{FF2B5EF4-FFF2-40B4-BE49-F238E27FC236}">
+                <a16:creationId xmlns:a16="http://schemas.microsoft.com/office/drawing/2014/main" id="{0C35DE98-1FC6-0BE5-FB5C-16A91CE48184}"/>
+              </a:ext>
+            </a:extLst>
+          </p:cNvPr>
+          <p:cNvSpPr>
+            <a:spLocks noGrp="1"/>
+          </p:cNvSpPr>
+          <p:nvPr>
+            <p:ph type="dt" sz="half" idx="10"/>
+          </p:nvPr>
+        </p:nvSpPr>
+        <p:spPr/>
+        <p:txBody>
+          <a:bodyPr/>
+          <a:lstStyle/>
+          <a:p>
+            <a:fld id="{1140E07E-9745-4A1E-87D3-F87BED6F3F73}" type="datetime6">
+              <a:rPr lang="ko-KR" altLang="en-US" smtClean="0"/>
+              <a:t>2024년 8월</a:t>
+            </a:fld>
+            <a:endParaRPr lang="ko-KR" altLang="en-US"/>
+          </a:p>
+        </p:txBody>
+      </p:sp>
+      <p:sp>
+        <p:nvSpPr>
+          <p:cNvPr id="5" name="슬라이드 번호 개체 틀 4">
+            <a:extLst>
+              <a:ext uri="{FF2B5EF4-FFF2-40B4-BE49-F238E27FC236}">
+                <a16:creationId xmlns:a16="http://schemas.microsoft.com/office/drawing/2014/main" id="{363854FD-40E1-1051-5F2A-D5BEBB161EDC}"/>
+              </a:ext>
+            </a:extLst>
+          </p:cNvPr>
+          <p:cNvSpPr>
+            <a:spLocks noGrp="1"/>
+          </p:cNvSpPr>
+          <p:nvPr>
+            <p:ph type="sldNum" sz="quarter" idx="12"/>
+          </p:nvPr>
+        </p:nvSpPr>
+        <p:spPr/>
+        <p:txBody>
+          <a:bodyPr/>
+          <a:lstStyle/>
+          <a:p>
+            <a:fld id="{083A2CE0-18CD-4102-B738-4ACFF9E68BA4}" type="slidenum">
+              <a:rPr lang="ko-KR" altLang="en-US" smtClean="0"/>
+              <a:t>7</a:t>
+            </a:fld>
+            <a:endParaRPr lang="ko-KR" altLang="en-US"/>
+          </a:p>
+        </p:txBody>
+      </p:sp>
+      <p:sp>
+        <p:nvSpPr>
+          <p:cNvPr id="2" name="제목 1">
+            <a:extLst>
+              <a:ext uri="{FF2B5EF4-FFF2-40B4-BE49-F238E27FC236}">
+                <a16:creationId xmlns:a16="http://schemas.microsoft.com/office/drawing/2014/main" id="{E95DC7FC-429E-6D32-128B-12D33F6D3738}"/>
+              </a:ext>
+            </a:extLst>
+          </p:cNvPr>
+          <p:cNvSpPr>
+            <a:spLocks noGrp="1"/>
+          </p:cNvSpPr>
+          <p:nvPr>
+            <p:ph type="title"/>
+          </p:nvPr>
+        </p:nvSpPr>
+        <p:spPr/>
+        <p:txBody>
+          <a:bodyPr/>
+          <a:lstStyle/>
+          <a:p>
+            <a:r>
+              <a:rPr lang="en-US" altLang="ko-KR" dirty="0"/>
+              <a:t>Component</a:t>
+            </a:r>
+            <a:r>
+              <a:rPr lang="ko-KR" altLang="en-US" dirty="0"/>
+              <a:t>에 </a:t>
+            </a:r>
+            <a:r>
+              <a:rPr lang="en-US" altLang="ko-KR" dirty="0"/>
+              <a:t>map() </a:t>
+            </a:r>
+            <a:r>
+              <a:rPr lang="ko-KR" altLang="en-US" dirty="0"/>
+              <a:t>적용</a:t>
             </a:r>
           </a:p>
         </p:txBody>
@@ -10468,104 +9950,6 @@
       </p:grpSpPr>
       <p:sp>
         <p:nvSpPr>
-          <p:cNvPr id="2" name="제목 1">
-            <a:extLst>
-              <a:ext uri="{FF2B5EF4-FFF2-40B4-BE49-F238E27FC236}">
-                <a16:creationId xmlns:a16="http://schemas.microsoft.com/office/drawing/2014/main" id="{DEEAE432-154C-1C3F-A5EC-16DFF73F5EC7}"/>
-              </a:ext>
-            </a:extLst>
-          </p:cNvPr>
-          <p:cNvSpPr>
-            <a:spLocks noGrp="1"/>
-          </p:cNvSpPr>
-          <p:nvPr>
-            <p:ph type="title"/>
-          </p:nvPr>
-        </p:nvSpPr>
-        <p:spPr/>
-        <p:txBody>
-          <a:bodyPr/>
-          <a:lstStyle/>
-          <a:p>
-            <a:r>
-              <a:rPr lang="en-US" altLang="ko-KR" dirty="0"/>
-              <a:t>Component</a:t>
-            </a:r>
-            <a:r>
-              <a:rPr lang="ko-KR" altLang="en-US" dirty="0"/>
-              <a:t>에 </a:t>
-            </a:r>
-            <a:r>
-              <a:rPr lang="en-US" altLang="ko-KR" dirty="0"/>
-              <a:t>map() </a:t>
-            </a:r>
-            <a:r>
-              <a:rPr lang="ko-KR" altLang="en-US" dirty="0"/>
-              <a:t>적용</a:t>
-            </a:r>
-          </a:p>
-        </p:txBody>
-      </p:sp>
-      <p:sp>
-        <p:nvSpPr>
-          <p:cNvPr id="4" name="날짜 개체 틀 3">
-            <a:extLst>
-              <a:ext uri="{FF2B5EF4-FFF2-40B4-BE49-F238E27FC236}">
-                <a16:creationId xmlns:a16="http://schemas.microsoft.com/office/drawing/2014/main" id="{8F058E69-2519-5C7B-E619-FCE4F8E785F7}"/>
-              </a:ext>
-            </a:extLst>
-          </p:cNvPr>
-          <p:cNvSpPr>
-            <a:spLocks noGrp="1"/>
-          </p:cNvSpPr>
-          <p:nvPr>
-            <p:ph type="dt" sz="half" idx="10"/>
-          </p:nvPr>
-        </p:nvSpPr>
-        <p:spPr/>
-        <p:txBody>
-          <a:bodyPr/>
-          <a:lstStyle/>
-          <a:p>
-            <a:fld id="{499F60AA-9663-4C10-96A7-DFE487A1DFF7}" type="datetime6">
-              <a:rPr lang="ko-KR" altLang="en-US" smtClean="0"/>
-              <a:t>2023년 10월</a:t>
-            </a:fld>
-            <a:endParaRPr lang="ko-KR" altLang="en-US"/>
-          </a:p>
-        </p:txBody>
-      </p:sp>
-      <p:sp>
-        <p:nvSpPr>
-          <p:cNvPr id="5" name="슬라이드 번호 개체 틀 4">
-            <a:extLst>
-              <a:ext uri="{FF2B5EF4-FFF2-40B4-BE49-F238E27FC236}">
-                <a16:creationId xmlns:a16="http://schemas.microsoft.com/office/drawing/2014/main" id="{4A2D925E-B075-9DDE-125B-43171B9E6A97}"/>
-              </a:ext>
-            </a:extLst>
-          </p:cNvPr>
-          <p:cNvSpPr>
-            <a:spLocks noGrp="1"/>
-          </p:cNvSpPr>
-          <p:nvPr>
-            <p:ph type="sldNum" sz="quarter" idx="12"/>
-          </p:nvPr>
-        </p:nvSpPr>
-        <p:spPr/>
-        <p:txBody>
-          <a:bodyPr/>
-          <a:lstStyle/>
-          <a:p>
-            <a:fld id="{083A2CE0-18CD-4102-B738-4ACFF9E68BA4}" type="slidenum">
-              <a:rPr lang="ko-KR" altLang="en-US" smtClean="0"/>
-              <a:t>8</a:t>
-            </a:fld>
-            <a:endParaRPr lang="ko-KR" altLang="en-US"/>
-          </a:p>
-        </p:txBody>
-      </p:sp>
-      <p:sp>
-        <p:nvSpPr>
           <p:cNvPr id="3" name="내용 개체 틀 2">
             <a:extLst>
               <a:ext uri="{FF2B5EF4-FFF2-40B4-BE49-F238E27FC236}">
@@ -10660,6 +10044,104 @@
             <a:r>
               <a:rPr lang="ko-KR" altLang="en-US" dirty="0"/>
               <a:t>로 테스트</a:t>
+            </a:r>
+          </a:p>
+        </p:txBody>
+      </p:sp>
+      <p:sp>
+        <p:nvSpPr>
+          <p:cNvPr id="4" name="날짜 개체 틀 3">
+            <a:extLst>
+              <a:ext uri="{FF2B5EF4-FFF2-40B4-BE49-F238E27FC236}">
+                <a16:creationId xmlns:a16="http://schemas.microsoft.com/office/drawing/2014/main" id="{8F058E69-2519-5C7B-E619-FCE4F8E785F7}"/>
+              </a:ext>
+            </a:extLst>
+          </p:cNvPr>
+          <p:cNvSpPr>
+            <a:spLocks noGrp="1"/>
+          </p:cNvSpPr>
+          <p:nvPr>
+            <p:ph type="dt" sz="half" idx="10"/>
+          </p:nvPr>
+        </p:nvSpPr>
+        <p:spPr/>
+        <p:txBody>
+          <a:bodyPr/>
+          <a:lstStyle/>
+          <a:p>
+            <a:fld id="{499F60AA-9663-4C10-96A7-DFE487A1DFF7}" type="datetime6">
+              <a:rPr lang="ko-KR" altLang="en-US" smtClean="0"/>
+              <a:t>2024년 8월</a:t>
+            </a:fld>
+            <a:endParaRPr lang="ko-KR" altLang="en-US"/>
+          </a:p>
+        </p:txBody>
+      </p:sp>
+      <p:sp>
+        <p:nvSpPr>
+          <p:cNvPr id="5" name="슬라이드 번호 개체 틀 4">
+            <a:extLst>
+              <a:ext uri="{FF2B5EF4-FFF2-40B4-BE49-F238E27FC236}">
+                <a16:creationId xmlns:a16="http://schemas.microsoft.com/office/drawing/2014/main" id="{4A2D925E-B075-9DDE-125B-43171B9E6A97}"/>
+              </a:ext>
+            </a:extLst>
+          </p:cNvPr>
+          <p:cNvSpPr>
+            <a:spLocks noGrp="1"/>
+          </p:cNvSpPr>
+          <p:nvPr>
+            <p:ph type="sldNum" sz="quarter" idx="12"/>
+          </p:nvPr>
+        </p:nvSpPr>
+        <p:spPr/>
+        <p:txBody>
+          <a:bodyPr/>
+          <a:lstStyle/>
+          <a:p>
+            <a:fld id="{083A2CE0-18CD-4102-B738-4ACFF9E68BA4}" type="slidenum">
+              <a:rPr lang="ko-KR" altLang="en-US" smtClean="0"/>
+              <a:t>8</a:t>
+            </a:fld>
+            <a:endParaRPr lang="ko-KR" altLang="en-US"/>
+          </a:p>
+        </p:txBody>
+      </p:sp>
+      <p:sp>
+        <p:nvSpPr>
+          <p:cNvPr id="2" name="제목 1">
+            <a:extLst>
+              <a:ext uri="{FF2B5EF4-FFF2-40B4-BE49-F238E27FC236}">
+                <a16:creationId xmlns:a16="http://schemas.microsoft.com/office/drawing/2014/main" id="{DEEAE432-154C-1C3F-A5EC-16DFF73F5EC7}"/>
+              </a:ext>
+            </a:extLst>
+          </p:cNvPr>
+          <p:cNvSpPr>
+            <a:spLocks noGrp="1"/>
+          </p:cNvSpPr>
+          <p:nvPr>
+            <p:ph type="title"/>
+          </p:nvPr>
+        </p:nvSpPr>
+        <p:spPr/>
+        <p:txBody>
+          <a:bodyPr/>
+          <a:lstStyle/>
+          <a:p>
+            <a:r>
+              <a:rPr lang="en-US" altLang="ko-KR" dirty="0"/>
+              <a:t>Component</a:t>
+            </a:r>
+            <a:r>
+              <a:rPr lang="ko-KR" altLang="en-US" dirty="0"/>
+              <a:t>에 </a:t>
+            </a:r>
+            <a:r>
+              <a:rPr lang="en-US" altLang="ko-KR" dirty="0"/>
+              <a:t>map() </a:t>
+            </a:r>
+            <a:r>
+              <a:rPr lang="ko-KR" altLang="en-US" dirty="0"/>
+              <a:t>적용</a:t>
             </a:r>
           </a:p>
         </p:txBody>
@@ -10726,104 +10208,6 @@
       </p:grpSpPr>
       <p:sp>
         <p:nvSpPr>
-          <p:cNvPr id="2" name="제목 1">
-            <a:extLst>
-              <a:ext uri="{FF2B5EF4-FFF2-40B4-BE49-F238E27FC236}">
-                <a16:creationId xmlns:a16="http://schemas.microsoft.com/office/drawing/2014/main" id="{DEEAE432-154C-1C3F-A5EC-16DFF73F5EC7}"/>
-              </a:ext>
-            </a:extLst>
-          </p:cNvPr>
-          <p:cNvSpPr>
-            <a:spLocks noGrp="1"/>
-          </p:cNvSpPr>
-          <p:nvPr>
-            <p:ph type="title"/>
-          </p:nvPr>
-        </p:nvSpPr>
-        <p:spPr/>
-        <p:txBody>
-          <a:bodyPr/>
-          <a:lstStyle/>
-          <a:p>
-            <a:r>
-              <a:rPr lang="en-US" altLang="ko-KR" dirty="0"/>
-              <a:t>Component</a:t>
-            </a:r>
-            <a:r>
-              <a:rPr lang="ko-KR" altLang="en-US" dirty="0"/>
-              <a:t>에 </a:t>
-            </a:r>
-            <a:r>
-              <a:rPr lang="en-US" altLang="ko-KR" dirty="0"/>
-              <a:t>map() </a:t>
-            </a:r>
-            <a:r>
-              <a:rPr lang="ko-KR" altLang="en-US" dirty="0"/>
-              <a:t>적용</a:t>
-            </a:r>
-          </a:p>
-        </p:txBody>
-      </p:sp>
-      <p:sp>
-        <p:nvSpPr>
-          <p:cNvPr id="4" name="날짜 개체 틀 3">
-            <a:extLst>
-              <a:ext uri="{FF2B5EF4-FFF2-40B4-BE49-F238E27FC236}">
-                <a16:creationId xmlns:a16="http://schemas.microsoft.com/office/drawing/2014/main" id="{8F058E69-2519-5C7B-E619-FCE4F8E785F7}"/>
-              </a:ext>
-            </a:extLst>
-          </p:cNvPr>
-          <p:cNvSpPr>
-            <a:spLocks noGrp="1"/>
-          </p:cNvSpPr>
-          <p:nvPr>
-            <p:ph type="dt" sz="half" idx="10"/>
-          </p:nvPr>
-        </p:nvSpPr>
-        <p:spPr/>
-        <p:txBody>
-          <a:bodyPr/>
-          <a:lstStyle/>
-          <a:p>
-            <a:fld id="{499F60AA-9663-4C10-96A7-DFE487A1DFF7}" type="datetime6">
-              <a:rPr lang="ko-KR" altLang="en-US" smtClean="0"/>
-              <a:t>2023년 10월</a:t>
-            </a:fld>
-            <a:endParaRPr lang="ko-KR" altLang="en-US"/>
-          </a:p>
-        </p:txBody>
-      </p:sp>
-      <p:sp>
-        <p:nvSpPr>
-          <p:cNvPr id="5" name="슬라이드 번호 개체 틀 4">
-            <a:extLst>
-              <a:ext uri="{FF2B5EF4-FFF2-40B4-BE49-F238E27FC236}">
-                <a16:creationId xmlns:a16="http://schemas.microsoft.com/office/drawing/2014/main" id="{4A2D925E-B075-9DDE-125B-43171B9E6A97}"/>
-              </a:ext>
-            </a:extLst>
-          </p:cNvPr>
-          <p:cNvSpPr>
-            <a:spLocks noGrp="1"/>
-          </p:cNvSpPr>
-          <p:nvPr>
-            <p:ph type="sldNum" sz="quarter" idx="12"/>
-          </p:nvPr>
-        </p:nvSpPr>
-        <p:spPr/>
-        <p:txBody>
-          <a:bodyPr/>
-          <a:lstStyle/>
-          <a:p>
-            <a:fld id="{083A2CE0-18CD-4102-B738-4ACFF9E68BA4}" type="slidenum">
-              <a:rPr lang="ko-KR" altLang="en-US" smtClean="0"/>
-              <a:t>9</a:t>
-            </a:fld>
-            <a:endParaRPr lang="ko-KR" altLang="en-US"/>
-          </a:p>
-        </p:txBody>
-      </p:sp>
-      <p:sp>
-        <p:nvSpPr>
           <p:cNvPr id="3" name="내용 개체 틀 2">
             <a:extLst>
               <a:ext uri="{FF2B5EF4-FFF2-40B4-BE49-F238E27FC236}">
@@ -10873,6 +10257,104 @@
               <a:t>!</a:t>
             </a:r>
             <a:endParaRPr lang="ko-KR" altLang="en-US" dirty="0"/>
+          </a:p>
+        </p:txBody>
+      </p:sp>
+      <p:sp>
+        <p:nvSpPr>
+          <p:cNvPr id="4" name="날짜 개체 틀 3">
+            <a:extLst>
+              <a:ext uri="{FF2B5EF4-FFF2-40B4-BE49-F238E27FC236}">
+                <a16:creationId xmlns:a16="http://schemas.microsoft.com/office/drawing/2014/main" id="{8F058E69-2519-5C7B-E619-FCE4F8E785F7}"/>
+              </a:ext>
+            </a:extLst>
+          </p:cNvPr>
+          <p:cNvSpPr>
+            <a:spLocks noGrp="1"/>
+          </p:cNvSpPr>
+          <p:nvPr>
+            <p:ph type="dt" sz="half" idx="10"/>
+          </p:nvPr>
+        </p:nvSpPr>
+        <p:spPr/>
+        <p:txBody>
+          <a:bodyPr/>
+          <a:lstStyle/>
+          <a:p>
+            <a:fld id="{499F60AA-9663-4C10-96A7-DFE487A1DFF7}" type="datetime6">
+              <a:rPr lang="ko-KR" altLang="en-US" smtClean="0"/>
+              <a:t>2024년 8월</a:t>
+            </a:fld>
+            <a:endParaRPr lang="ko-KR" altLang="en-US"/>
+          </a:p>
+        </p:txBody>
+      </p:sp>
+      <p:sp>
+        <p:nvSpPr>
+          <p:cNvPr id="5" name="슬라이드 번호 개체 틀 4">
+            <a:extLst>
+              <a:ext uri="{FF2B5EF4-FFF2-40B4-BE49-F238E27FC236}">
+                <a16:creationId xmlns:a16="http://schemas.microsoft.com/office/drawing/2014/main" id="{4A2D925E-B075-9DDE-125B-43171B9E6A97}"/>
+              </a:ext>
+            </a:extLst>
+          </p:cNvPr>
+          <p:cNvSpPr>
+            <a:spLocks noGrp="1"/>
+          </p:cNvSpPr>
+          <p:nvPr>
+            <p:ph type="sldNum" sz="quarter" idx="12"/>
+          </p:nvPr>
+        </p:nvSpPr>
+        <p:spPr/>
+        <p:txBody>
+          <a:bodyPr/>
+          <a:lstStyle/>
+          <a:p>
+            <a:fld id="{083A2CE0-18CD-4102-B738-4ACFF9E68BA4}" type="slidenum">
+              <a:rPr lang="ko-KR" altLang="en-US" smtClean="0"/>
+              <a:t>9</a:t>
+            </a:fld>
+            <a:endParaRPr lang="ko-KR" altLang="en-US"/>
+          </a:p>
+        </p:txBody>
+      </p:sp>
+      <p:sp>
+        <p:nvSpPr>
+          <p:cNvPr id="2" name="제목 1">
+            <a:extLst>
+              <a:ext uri="{FF2B5EF4-FFF2-40B4-BE49-F238E27FC236}">
+                <a16:creationId xmlns:a16="http://schemas.microsoft.com/office/drawing/2014/main" id="{DEEAE432-154C-1C3F-A5EC-16DFF73F5EC7}"/>
+              </a:ext>
+            </a:extLst>
+          </p:cNvPr>
+          <p:cNvSpPr>
+            <a:spLocks noGrp="1"/>
+          </p:cNvSpPr>
+          <p:nvPr>
+            <p:ph type="title"/>
+          </p:nvPr>
+        </p:nvSpPr>
+        <p:spPr/>
+        <p:txBody>
+          <a:bodyPr/>
+          <a:lstStyle/>
+          <a:p>
+            <a:r>
+              <a:rPr lang="en-US" altLang="ko-KR" dirty="0"/>
+              <a:t>Component</a:t>
+            </a:r>
+            <a:r>
+              <a:rPr lang="ko-KR" altLang="en-US" dirty="0"/>
+              <a:t>에 </a:t>
+            </a:r>
+            <a:r>
+              <a:rPr lang="en-US" altLang="ko-KR" dirty="0"/>
+              <a:t>map() </a:t>
+            </a:r>
+            <a:r>
+              <a:rPr lang="ko-KR" altLang="en-US" dirty="0"/>
+              <a:t>적용</a:t>
+            </a:r>
           </a:p>
         </p:txBody>
       </p:sp>
@@ -10920,7 +10402,7 @@
 </file>
 
 <file path=ppt/theme/theme1.xml><?xml version="1.0" encoding="utf-8"?>
-<a:theme xmlns:a="http://schemas.openxmlformats.org/drawingml/2006/main" name="1_Office 테마">
+<a:theme xmlns:a="http://schemas.openxmlformats.org/drawingml/2006/main" name="3_Office 테마">
   <a:themeElements>
     <a:clrScheme name="코딩온_새싹">
       <a:dk1>
@@ -10960,15 +10442,15 @@
         <a:srgbClr val="954F72"/>
       </a:folHlink>
     </a:clrScheme>
-    <a:fontScheme name="코딩온">
+    <a:fontScheme name="Pretendard GOV">
       <a:majorFont>
-        <a:latin typeface="메이플스토리"/>
-        <a:ea typeface="메이플스토리"/>
+        <a:latin typeface="Pretendard GOV"/>
+        <a:ea typeface="Pretendard GOV"/>
         <a:cs typeface=""/>
       </a:majorFont>
       <a:minorFont>
-        <a:latin typeface="메이플스토리"/>
-        <a:ea typeface="메이플스토리"/>
+        <a:latin typeface="Pretendard GOV"/>
+        <a:ea typeface="Pretendard GOV"/>
         <a:cs typeface=""/>
       </a:minorFont>
     </a:fontScheme>

--- a/material/[SeSAC_YDP_6] 26_React_map_filter.pptx
+++ b/material/[SeSAC_YDP_6] 26_React_map_filter.pptx
@@ -633,7 +633,7 @@
           <a:p>
             <a:fld id="{C09E5BFC-1559-42F1-8940-AB342D56BF02}" type="slidenum">
               <a:rPr lang="ko-KR" altLang="en-US" smtClean="0"/>
-              <a:t>16</a:t>
+              <a:t>11</a:t>
             </a:fld>
             <a:endParaRPr lang="ko-KR" altLang="en-US"/>
           </a:p>
@@ -642,7 +642,7 @@
     </p:spTree>
     <p:extLst>
       <p:ext uri="{BB962C8B-B14F-4D97-AF65-F5344CB8AC3E}">
-        <p14:creationId xmlns:p14="http://schemas.microsoft.com/office/powerpoint/2010/main" val="2752525777"/>
+        <p14:creationId xmlns:p14="http://schemas.microsoft.com/office/powerpoint/2010/main" val="4174695049"/>
       </p:ext>
     </p:extLst>
   </p:cSld>
@@ -696,6 +696,90 @@
           <a:bodyPr/>
           <a:lstStyle/>
           <a:p>
+            <a:endParaRPr lang="ko-KR" altLang="en-US" dirty="0"/>
+          </a:p>
+        </p:txBody>
+      </p:sp>
+      <p:sp>
+        <p:nvSpPr>
+          <p:cNvPr id="4" name="슬라이드 번호 개체 틀 3"/>
+          <p:cNvSpPr>
+            <a:spLocks noGrp="1"/>
+          </p:cNvSpPr>
+          <p:nvPr>
+            <p:ph type="sldNum" sz="quarter" idx="5"/>
+          </p:nvPr>
+        </p:nvSpPr>
+        <p:spPr/>
+        <p:txBody>
+          <a:bodyPr/>
+          <a:lstStyle/>
+          <a:p>
+            <a:fld id="{C09E5BFC-1559-42F1-8940-AB342D56BF02}" type="slidenum">
+              <a:rPr lang="ko-KR" altLang="en-US" smtClean="0"/>
+              <a:t>16</a:t>
+            </a:fld>
+            <a:endParaRPr lang="ko-KR" altLang="en-US"/>
+          </a:p>
+        </p:txBody>
+      </p:sp>
+    </p:spTree>
+    <p:extLst>
+      <p:ext uri="{BB962C8B-B14F-4D97-AF65-F5344CB8AC3E}">
+        <p14:creationId xmlns:p14="http://schemas.microsoft.com/office/powerpoint/2010/main" val="2752525777"/>
+      </p:ext>
+    </p:extLst>
+  </p:cSld>
+  <p:clrMapOvr>
+    <a:masterClrMapping/>
+  </p:clrMapOvr>
+</p:notes>
+</file>
+
+<file path=ppt/notesSlides/notesSlide12.xml><?xml version="1.0" encoding="utf-8"?>
+<p:notes xmlns:a="http://schemas.openxmlformats.org/drawingml/2006/main" xmlns:r="http://schemas.openxmlformats.org/officeDocument/2006/relationships" xmlns:p="http://schemas.openxmlformats.org/presentationml/2006/main">
+  <p:cSld>
+    <p:spTree>
+      <p:nvGrpSpPr>
+        <p:cNvPr id="1" name=""/>
+        <p:cNvGrpSpPr/>
+        <p:nvPr/>
+      </p:nvGrpSpPr>
+      <p:grpSpPr>
+        <a:xfrm>
+          <a:off x="0" y="0"/>
+          <a:ext cx="0" cy="0"/>
+          <a:chOff x="0" y="0"/>
+          <a:chExt cx="0" cy="0"/>
+        </a:xfrm>
+      </p:grpSpPr>
+      <p:sp>
+        <p:nvSpPr>
+          <p:cNvPr id="2" name="슬라이드 이미지 개체 틀 1"/>
+          <p:cNvSpPr>
+            <a:spLocks noGrp="1" noRot="1" noChangeAspect="1"/>
+          </p:cNvSpPr>
+          <p:nvPr>
+            <p:ph type="sldImg"/>
+          </p:nvPr>
+        </p:nvSpPr>
+        <p:spPr/>
+      </p:sp>
+      <p:sp>
+        <p:nvSpPr>
+          <p:cNvPr id="3" name="슬라이드 노트 개체 틀 2"/>
+          <p:cNvSpPr>
+            <a:spLocks noGrp="1"/>
+          </p:cNvSpPr>
+          <p:nvPr>
+            <p:ph type="body" idx="1"/>
+          </p:nvPr>
+        </p:nvSpPr>
+        <p:spPr/>
+        <p:txBody>
+          <a:bodyPr/>
+          <a:lstStyle/>
+          <a:p>
             <a:r>
               <a:rPr lang="en-US" altLang="ko-KR" dirty="0"/>
               <a:t>Reduce</a:t>
@@ -752,7 +836,7 @@
 </p:notes>
 </file>
 
-<file path=ppt/notesSlides/notesSlide12.xml><?xml version="1.0" encoding="utf-8"?>
+<file path=ppt/notesSlides/notesSlide13.xml><?xml version="1.0" encoding="utf-8"?>
 <p:notes xmlns:a="http://schemas.openxmlformats.org/drawingml/2006/main" xmlns:r="http://schemas.openxmlformats.org/officeDocument/2006/relationships" xmlns:p="http://schemas.openxmlformats.org/presentationml/2006/main">
   <p:cSld>
     <p:spTree>
@@ -880,6 +964,152 @@
           <a:bodyPr/>
           <a:lstStyle/>
           <a:p>
+            <a:r>
+              <a:rPr lang="en-US" altLang="ko-KR" dirty="0"/>
+              <a:t>React</a:t>
+            </a:r>
+            <a:r>
+              <a:rPr lang="ko-KR" altLang="en-US" dirty="0"/>
+              <a:t>에서 </a:t>
+            </a:r>
+            <a:r>
+              <a:rPr lang="en-US" altLang="ko-KR" dirty="0"/>
+              <a:t>‘map()’</a:t>
+            </a:r>
+            <a:r>
+              <a:rPr lang="ko-KR" altLang="en-US" dirty="0"/>
+              <a:t> 함수는 배열을 순회하며 각 요소에 대해 변환 작업을 수행할 때 사용</a:t>
+            </a:r>
+            <a:r>
+              <a:rPr lang="en-US" altLang="ko-KR" dirty="0"/>
+              <a:t>.</a:t>
+            </a:r>
+          </a:p>
+          <a:p>
+            <a:r>
+              <a:rPr lang="en-US" altLang="ko-KR" dirty="0"/>
+              <a:t>Map() </a:t>
+            </a:r>
+            <a:r>
+              <a:rPr lang="ko-KR" altLang="en-US" dirty="0"/>
+              <a:t>함수는 원본 배열을 변경하지 않고</a:t>
+            </a:r>
+            <a:r>
+              <a:rPr lang="en-US" altLang="ko-KR" dirty="0"/>
+              <a:t>, </a:t>
+            </a:r>
+            <a:r>
+              <a:rPr lang="ko-KR" altLang="en-US" dirty="0"/>
+              <a:t>변환된 새로운 배열을 반환함</a:t>
+            </a:r>
+            <a:r>
+              <a:rPr lang="en-US" altLang="ko-KR" dirty="0"/>
+              <a:t>.</a:t>
+            </a:r>
+          </a:p>
+          <a:p>
+            <a:r>
+              <a:rPr lang="en-US" altLang="ko-KR" dirty="0">
+                <a:sym typeface="Wingdings" panose="05000000000000000000" pitchFamily="2" charset="2"/>
+              </a:rPr>
+              <a:t> React</a:t>
+            </a:r>
+            <a:r>
+              <a:rPr lang="ko-KR" altLang="en-US" dirty="0">
+                <a:sym typeface="Wingdings" panose="05000000000000000000" pitchFamily="2" charset="2"/>
+              </a:rPr>
+              <a:t>에서는 상태</a:t>
+            </a:r>
+            <a:r>
+              <a:rPr lang="en-US" altLang="ko-KR" dirty="0">
+                <a:sym typeface="Wingdings" panose="05000000000000000000" pitchFamily="2" charset="2"/>
+              </a:rPr>
+              <a:t>(state)</a:t>
+            </a:r>
+            <a:r>
+              <a:rPr lang="ko-KR" altLang="en-US" dirty="0">
+                <a:sym typeface="Wingdings" panose="05000000000000000000" pitchFamily="2" charset="2"/>
+              </a:rPr>
+              <a:t>의 불변성을 유지하는 것이 중요함</a:t>
+            </a:r>
+            <a:r>
+              <a:rPr lang="en-US" altLang="ko-KR" dirty="0">
+                <a:sym typeface="Wingdings" panose="05000000000000000000" pitchFamily="2" charset="2"/>
+              </a:rPr>
+              <a:t>.</a:t>
+            </a:r>
+            <a:endParaRPr lang="en-US" altLang="ko-KR" dirty="0"/>
+          </a:p>
+          <a:p>
+            <a:endParaRPr lang="en-US" altLang="ko-KR" dirty="0"/>
+          </a:p>
+          <a:p>
+            <a:r>
+              <a:rPr lang="en-US" altLang="ko-KR" dirty="0"/>
+              <a:t>- </a:t>
+            </a:r>
+            <a:r>
+              <a:rPr lang="en-US" altLang="ko-KR" dirty="0" err="1"/>
+              <a:t>CurrentValue</a:t>
+            </a:r>
+            <a:r>
+              <a:rPr lang="en-US" altLang="ko-KR" dirty="0"/>
+              <a:t> = </a:t>
+            </a:r>
+            <a:r>
+              <a:rPr lang="ko-KR" altLang="en-US" dirty="0"/>
+              <a:t>배열의 현재 요소</a:t>
+            </a:r>
+            <a:endParaRPr lang="en-US" altLang="ko-KR" dirty="0"/>
+          </a:p>
+          <a:p>
+            <a:r>
+              <a:rPr lang="en-US" altLang="ko-KR" dirty="0"/>
+              <a:t>- Index = </a:t>
+            </a:r>
+            <a:r>
+              <a:rPr lang="ko-KR" altLang="en-US" dirty="0"/>
+              <a:t>현재 요소의 인덱스 </a:t>
+            </a:r>
+            <a:r>
+              <a:rPr lang="en-US" altLang="ko-KR" dirty="0"/>
+              <a:t>(</a:t>
+            </a:r>
+            <a:r>
+              <a:rPr lang="ko-KR" altLang="en-US" dirty="0"/>
+              <a:t>선택</a:t>
+            </a:r>
+            <a:r>
+              <a:rPr lang="en-US" altLang="ko-KR" dirty="0"/>
+              <a:t>)</a:t>
+            </a:r>
+          </a:p>
+          <a:p>
+            <a:r>
+              <a:rPr lang="en-US" altLang="ko-KR" dirty="0"/>
+              <a:t>- Array = ‘map()’ </a:t>
+            </a:r>
+            <a:r>
+              <a:rPr lang="ko-KR" altLang="en-US" dirty="0"/>
+              <a:t>을 호출한 원본 배열을 참조 </a:t>
+            </a:r>
+            <a:r>
+              <a:rPr lang="en-US" altLang="ko-KR" dirty="0"/>
+              <a:t>(</a:t>
+            </a:r>
+            <a:r>
+              <a:rPr lang="ko-KR" altLang="en-US" dirty="0"/>
+              <a:t>선택</a:t>
+            </a:r>
+            <a:r>
+              <a:rPr lang="en-US" altLang="ko-KR" dirty="0"/>
+              <a:t>)</a:t>
+            </a:r>
+          </a:p>
+          <a:p>
+            <a:endParaRPr lang="en-US" altLang="ko-KR" dirty="0"/>
+          </a:p>
+          <a:p>
             <a:endParaRPr lang="ko-KR" altLang="en-US" dirty="0"/>
           </a:p>
         </p:txBody>
@@ -1251,7 +1481,22 @@
           <a:bodyPr/>
           <a:lstStyle/>
           <a:p>
-            <a:endParaRPr lang="ko-KR" altLang="en-US" dirty="0"/>
+            <a:r>
+              <a:rPr lang="en-US" altLang="ko-KR" dirty="0"/>
+              <a:t>1</a:t>
+            </a:r>
+            <a:r>
+              <a:rPr lang="ko-KR" altLang="en-US" dirty="0"/>
+              <a:t>줄 코드일땐 </a:t>
+            </a:r>
+            <a:r>
+              <a:rPr lang="en-US" altLang="ko-KR" dirty="0"/>
+              <a:t>return </a:t>
+            </a:r>
+            <a:r>
+              <a:rPr lang="ko-KR" altLang="en-US" dirty="0"/>
+              <a:t>생략 가능</a:t>
+            </a:r>
           </a:p>
         </p:txBody>
       </p:sp>
@@ -1262,7 +1507,7 @@
             <a:spLocks noGrp="1"/>
           </p:cNvSpPr>
           <p:nvPr>
-            <p:ph type="sldNum" sz="quarter" idx="10"/>
+            <p:ph type="sldNum" sz="quarter" idx="5"/>
           </p:nvPr>
         </p:nvSpPr>
         <p:spPr/>
@@ -1272,7 +1517,7 @@
           <a:p>
             <a:fld id="{C09E5BFC-1559-42F1-8940-AB342D56BF02}" type="slidenum">
               <a:rPr lang="ko-KR" altLang="en-US" smtClean="0"/>
-              <a:t>7</a:t>
+              <a:t>6</a:t>
             </a:fld>
             <a:endParaRPr lang="ko-KR" altLang="en-US"/>
           </a:p>
@@ -1281,7 +1526,7 @@
     </p:spTree>
     <p:extLst>
       <p:ext uri="{BB962C8B-B14F-4D97-AF65-F5344CB8AC3E}">
-        <p14:creationId xmlns:p14="http://schemas.microsoft.com/office/powerpoint/2010/main" val="1956268237"/>
+        <p14:creationId xmlns:p14="http://schemas.microsoft.com/office/powerpoint/2010/main" val="921064267"/>
       </p:ext>
     </p:extLst>
   </p:cSld>
@@ -1335,6 +1580,42 @@
           <a:bodyPr/>
           <a:lstStyle/>
           <a:p>
+            <a:r>
+              <a:rPr lang="ko-KR" altLang="en-US" dirty="0"/>
+              <a:t>반복문으로 </a:t>
+            </a:r>
+            <a:r>
+              <a:rPr lang="en-US" altLang="ko-KR" dirty="0"/>
+              <a:t>html</a:t>
+            </a:r>
+            <a:r>
+              <a:rPr lang="ko-KR" altLang="en-US" dirty="0"/>
+              <a:t>을 생성하면 </a:t>
+            </a:r>
+            <a:r>
+              <a:rPr lang="en-US" altLang="ko-KR" dirty="0"/>
+              <a:t>key={html</a:t>
+            </a:r>
+            <a:r>
+              <a:rPr lang="ko-KR" altLang="en-US" dirty="0"/>
+              <a:t>마다 다른 숫자</a:t>
+            </a:r>
+            <a:r>
+              <a:rPr lang="en-US" altLang="ko-KR" dirty="0"/>
+              <a:t>}</a:t>
+            </a:r>
+            <a:r>
+              <a:rPr lang="ko-KR" altLang="en-US" dirty="0"/>
+              <a:t>를 </a:t>
+            </a:r>
+            <a:r>
+              <a:rPr lang="ko-KR" altLang="en-US" dirty="0" err="1"/>
+              <a:t>만들어줘야함</a:t>
+            </a:r>
+            <a:r>
+              <a:rPr lang="en-US" altLang="ko-KR" dirty="0"/>
+              <a:t>.</a:t>
+            </a:r>
             <a:endParaRPr lang="ko-KR" altLang="en-US" dirty="0"/>
           </a:p>
         </p:txBody>
@@ -1346,7 +1627,7 @@
             <a:spLocks noGrp="1"/>
           </p:cNvSpPr>
           <p:nvPr>
-            <p:ph type="sldNum" sz="quarter" idx="5"/>
+            <p:ph type="sldNum" sz="quarter" idx="10"/>
           </p:nvPr>
         </p:nvSpPr>
         <p:spPr/>
@@ -1356,7 +1637,7 @@
           <a:p>
             <a:fld id="{C09E5BFC-1559-42F1-8940-AB342D56BF02}" type="slidenum">
               <a:rPr lang="ko-KR" altLang="en-US" smtClean="0"/>
-              <a:t>8</a:t>
+              <a:t>7</a:t>
             </a:fld>
             <a:endParaRPr lang="ko-KR" altLang="en-US"/>
           </a:p>
@@ -1365,7 +1646,7 @@
     </p:spTree>
     <p:extLst>
       <p:ext uri="{BB962C8B-B14F-4D97-AF65-F5344CB8AC3E}">
-        <p14:creationId xmlns:p14="http://schemas.microsoft.com/office/powerpoint/2010/main" val="2258629992"/>
+        <p14:creationId xmlns:p14="http://schemas.microsoft.com/office/powerpoint/2010/main" val="1956268237"/>
       </p:ext>
     </p:extLst>
   </p:cSld>
@@ -1419,6 +1700,121 @@
           <a:bodyPr/>
           <a:lstStyle/>
           <a:p>
+            <a:pPr marL="171450" indent="-171450">
+              <a:buFont typeface="Arial" panose="020B0604020202020204" pitchFamily="34" charset="0"/>
+              <a:buChar char="•"/>
+            </a:pPr>
+            <a:r>
+              <a:rPr lang="ko-KR" altLang="en-US" dirty="0"/>
+              <a:t>리스트</a:t>
+            </a:r>
+            <a:r>
+              <a:rPr lang="en-US" altLang="ko-KR" dirty="0"/>
+              <a:t> </a:t>
+            </a:r>
+            <a:r>
+              <a:rPr lang="ko-KR" altLang="en-US" dirty="0"/>
+              <a:t>재정렬 시 문제</a:t>
+            </a:r>
+            <a:br>
+              <a:rPr lang="en-US" altLang="ko-KR" dirty="0"/>
+            </a:br>
+            <a:r>
+              <a:rPr lang="ko-KR" altLang="en-US" dirty="0"/>
+              <a:t>배열의 항목이 재정렬되거나 삽입</a:t>
+            </a:r>
+            <a:r>
+              <a:rPr lang="en-US" altLang="ko-KR" dirty="0"/>
+              <a:t>, </a:t>
+            </a:r>
+            <a:r>
+              <a:rPr lang="ko-KR" altLang="en-US" dirty="0"/>
+              <a:t>삭제될 때</a:t>
+            </a:r>
+            <a:r>
+              <a:rPr lang="en-US" altLang="ko-KR" dirty="0"/>
+              <a:t>, </a:t>
+            </a:r>
+            <a:r>
+              <a:rPr lang="ko-KR" altLang="en-US" dirty="0"/>
+              <a:t>인덱스가 변동하기 때문에 </a:t>
+            </a:r>
+            <a:r>
+              <a:rPr lang="en-US" altLang="ko-KR" dirty="0"/>
+              <a:t>React</a:t>
+            </a:r>
+            <a:r>
+              <a:rPr lang="ko-KR" altLang="en-US" dirty="0"/>
+              <a:t>가 리스트 항목의 상태를 정확히 추적하기 어려울 수 있습니다</a:t>
+            </a:r>
+            <a:r>
+              <a:rPr lang="en-US" altLang="ko-KR" dirty="0"/>
+              <a:t>. </a:t>
+            </a:r>
+            <a:br>
+              <a:rPr lang="en-US" altLang="ko-KR" dirty="0"/>
+            </a:br>
+            <a:r>
+              <a:rPr lang="ko-KR" altLang="en-US" dirty="0"/>
+              <a:t>이로 인해 성능 저하와 렌더링 버그가 발생할 수 있습니다</a:t>
+            </a:r>
+            <a:r>
+              <a:rPr lang="en-US" altLang="ko-KR" dirty="0"/>
+              <a:t>.</a:t>
+            </a:r>
+          </a:p>
+          <a:p>
+            <a:pPr marL="171450" indent="-171450">
+              <a:buFont typeface="Arial" panose="020B0604020202020204" pitchFamily="34" charset="0"/>
+              <a:buChar char="•"/>
+            </a:pPr>
+            <a:endParaRPr lang="en-US" altLang="ko-KR" dirty="0"/>
+          </a:p>
+          <a:p>
+            <a:pPr marL="171450" indent="-171450">
+              <a:buFont typeface="Arial" panose="020B0604020202020204" pitchFamily="34" charset="0"/>
+              <a:buChar char="•"/>
+            </a:pPr>
+            <a:r>
+              <a:rPr lang="ko-KR" altLang="en-US" dirty="0" err="1"/>
+              <a:t>예를들어</a:t>
+            </a:r>
+            <a:r>
+              <a:rPr lang="en-US" altLang="ko-KR" dirty="0"/>
+              <a:t>, DB</a:t>
+            </a:r>
+            <a:r>
+              <a:rPr lang="ko-KR" altLang="en-US" dirty="0"/>
+              <a:t>에서 가져온 고유한 </a:t>
+            </a:r>
+            <a:r>
+              <a:rPr lang="en-US" altLang="ko-KR" dirty="0"/>
+              <a:t>ID </a:t>
+            </a:r>
+            <a:r>
+              <a:rPr lang="ko-KR" altLang="en-US" dirty="0"/>
+              <a:t>값 같은</a:t>
+            </a:r>
+            <a:r>
+              <a:rPr lang="en-US" altLang="ko-KR" dirty="0"/>
+              <a:t>..</a:t>
+            </a:r>
+            <a:r>
+              <a:rPr lang="ko-KR" altLang="en-US" dirty="0"/>
+              <a:t> </a:t>
+            </a:r>
+            <a:r>
+              <a:rPr lang="en-US" altLang="ko-KR" dirty="0"/>
+              <a:t>(</a:t>
+            </a:r>
+            <a:r>
+              <a:rPr lang="ko-KR" altLang="en-US" dirty="0"/>
+              <a:t>가장 좋은 접근 방식</a:t>
+            </a:r>
+            <a:r>
+              <a:rPr lang="en-US" altLang="ko-KR" dirty="0"/>
+              <a:t>)</a:t>
+            </a:r>
             <a:endParaRPr lang="ko-KR" altLang="en-US" dirty="0"/>
           </a:p>
         </p:txBody>
@@ -1440,7 +1836,7 @@
           <a:p>
             <a:fld id="{C09E5BFC-1559-42F1-8940-AB342D56BF02}" type="slidenum">
               <a:rPr lang="ko-KR" altLang="en-US" smtClean="0"/>
-              <a:t>9</a:t>
+              <a:t>8</a:t>
             </a:fld>
             <a:endParaRPr lang="ko-KR" altLang="en-US"/>
           </a:p>
@@ -1449,7 +1845,7 @@
     </p:spTree>
     <p:extLst>
       <p:ext uri="{BB962C8B-B14F-4D97-AF65-F5344CB8AC3E}">
-        <p14:creationId xmlns:p14="http://schemas.microsoft.com/office/powerpoint/2010/main" val="4172252523"/>
+        <p14:creationId xmlns:p14="http://schemas.microsoft.com/office/powerpoint/2010/main" val="2258629992"/>
       </p:ext>
     </p:extLst>
   </p:cSld>
@@ -1524,7 +1920,7 @@
           <a:p>
             <a:fld id="{C09E5BFC-1559-42F1-8940-AB342D56BF02}" type="slidenum">
               <a:rPr lang="ko-KR" altLang="en-US" smtClean="0"/>
-              <a:t>10</a:t>
+              <a:t>9</a:t>
             </a:fld>
             <a:endParaRPr lang="ko-KR" altLang="en-US"/>
           </a:p>
@@ -1533,7 +1929,7 @@
     </p:spTree>
     <p:extLst>
       <p:ext uri="{BB962C8B-B14F-4D97-AF65-F5344CB8AC3E}">
-        <p14:creationId xmlns:p14="http://schemas.microsoft.com/office/powerpoint/2010/main" val="2309192278"/>
+        <p14:creationId xmlns:p14="http://schemas.microsoft.com/office/powerpoint/2010/main" val="4172252523"/>
       </p:ext>
     </p:extLst>
   </p:cSld>
@@ -1608,7 +2004,7 @@
           <a:p>
             <a:fld id="{C09E5BFC-1559-42F1-8940-AB342D56BF02}" type="slidenum">
               <a:rPr lang="ko-KR" altLang="en-US" smtClean="0"/>
-              <a:t>11</a:t>
+              <a:t>10</a:t>
             </a:fld>
             <a:endParaRPr lang="ko-KR" altLang="en-US"/>
           </a:p>
@@ -1617,7 +2013,7 @@
     </p:spTree>
     <p:extLst>
       <p:ext uri="{BB962C8B-B14F-4D97-AF65-F5344CB8AC3E}">
-        <p14:creationId xmlns:p14="http://schemas.microsoft.com/office/powerpoint/2010/main" val="4174695049"/>
+        <p14:creationId xmlns:p14="http://schemas.microsoft.com/office/powerpoint/2010/main" val="2309192278"/>
       </p:ext>
     </p:extLst>
   </p:cSld>
@@ -6065,8 +6461,8 @@
         </p:nvSpPr>
         <p:spPr>
           <a:xfrm>
-            <a:off x="838200" y="1535438"/>
-            <a:ext cx="10777396" cy="4553128"/>
+            <a:off x="571500" y="1488141"/>
+            <a:ext cx="11049000" cy="4553128"/>
           </a:xfrm>
         </p:spPr>
         <p:txBody>
@@ -6491,31 +6887,6 @@
           <a:chExt cx="0" cy="0"/>
         </a:xfrm>
       </p:grpSpPr>
-      <p:sp>
-        <p:nvSpPr>
-          <p:cNvPr id="3" name="내용 개체 틀 2">
-            <a:extLst>
-              <a:ext uri="{FF2B5EF4-FFF2-40B4-BE49-F238E27FC236}">
-                <a16:creationId xmlns:a16="http://schemas.microsoft.com/office/drawing/2014/main" id="{848B3227-CF71-B240-EE62-0C1CBB1DFA72}"/>
-              </a:ext>
-            </a:extLst>
-          </p:cNvPr>
-          <p:cNvSpPr>
-            <a:spLocks noGrp="1"/>
-          </p:cNvSpPr>
-          <p:nvPr>
-            <p:ph idx="1"/>
-          </p:nvPr>
-        </p:nvSpPr>
-        <p:spPr/>
-        <p:txBody>
-          <a:bodyPr/>
-          <a:lstStyle/>
-          <a:p>
-            <a:endParaRPr lang="ko-KR" altLang="en-US"/>
-          </a:p>
-        </p:txBody>
-      </p:sp>
       <p:sp>
         <p:nvSpPr>
           <p:cNvPr id="4" name="날짜 개체 틀 3">
@@ -7383,11 +7754,7 @@
             </a:r>
             <a:r>
               <a:rPr lang="en-US" altLang="ko-KR" dirty="0"/>
-              <a:t> </a:t>
-            </a:r>
-            <a:r>
-              <a:rPr lang="en-US" altLang="ko-KR" dirty="0" smtClean="0"/>
-              <a:t>Map &amp; Filter </a:t>
+              <a:t> Map &amp; Filter </a:t>
             </a:r>
             <a:r>
               <a:rPr lang="ko-KR" altLang="en-US" dirty="0"/>
@@ -7657,15 +8024,6 @@
               </a:rPr>
               <a:t>강의 클릭</a:t>
             </a:r>
-            <a:r>
-              <a:rPr lang="en-US" altLang="ko-KR" dirty="0">
-                <a:solidFill>
-                  <a:srgbClr val="212529"/>
-                </a:solidFill>
-                <a:latin typeface="+mn-ea"/>
-              </a:rPr>
-              <a:t/>
-            </a:r>
             <a:br>
               <a:rPr lang="en-US" altLang="ko-KR" dirty="0">
                 <a:solidFill>
@@ -7693,7 +8051,7 @@
               <a:t>➡ </a:t>
             </a:r>
             <a:r>
-              <a:rPr lang="en-US" altLang="ko-KR" sz="2800" b="1" dirty="0" smtClean="0">
+              <a:rPr lang="en-US" altLang="ko-KR" sz="2800" b="1" dirty="0">
                 <a:solidFill>
                   <a:srgbClr val="212529"/>
                 </a:solidFill>
@@ -7706,22 +8064,13 @@
               <a:t>Map &amp; Filter</a:t>
             </a:r>
             <a:r>
-              <a:rPr lang="ko-KR" altLang="en-US" sz="2800" b="1" dirty="0" smtClean="0">
+              <a:rPr lang="ko-KR" altLang="en-US" sz="2800" b="1" dirty="0">
                 <a:solidFill>
                   <a:srgbClr val="212529"/>
                 </a:solidFill>
                 <a:latin typeface="+mn-ea"/>
               </a:rPr>
-              <a:t> </a:t>
-            </a:r>
-            <a:r>
-              <a:rPr lang="ko-KR" altLang="en-US" sz="2800" b="1" dirty="0">
-                <a:solidFill>
-                  <a:srgbClr val="212529"/>
-                </a:solidFill>
-                <a:latin typeface="+mn-ea"/>
-              </a:rPr>
-              <a:t>실습</a:t>
+              <a:t> 실습</a:t>
             </a:r>
             <a:r>
               <a:rPr lang="en-US" altLang="ko-KR" sz="2800" b="1" dirty="0">
@@ -7775,54 +8124,45 @@
                 </a:solidFill>
                 <a:latin typeface="+mn-ea"/>
               </a:rPr>
-              <a:t>[</a:t>
-            </a:r>
-            <a:r>
-              <a:rPr lang="en-US" altLang="ko-KR" sz="2800" b="1" dirty="0" smtClean="0">
+              <a:t>[1~3</a:t>
+            </a:r>
+            <a:r>
+              <a:rPr lang="ko-KR" altLang="en-US" sz="2800" b="1" dirty="0">
                 <a:solidFill>
                   <a:schemeClr val="accent1"/>
                 </a:solidFill>
                 <a:latin typeface="+mn-ea"/>
               </a:rPr>
-              <a:t>1~3</a:t>
-            </a:r>
-            <a:r>
-              <a:rPr lang="ko-KR" altLang="en-US" sz="2800" b="1" dirty="0" smtClean="0">
+              <a:t>번 문제</a:t>
+            </a:r>
+            <a:r>
+              <a:rPr lang="en-US" altLang="ko-KR" sz="2800" b="1" dirty="0">
                 <a:solidFill>
                   <a:schemeClr val="accent1"/>
                 </a:solidFill>
                 <a:latin typeface="+mn-ea"/>
               </a:rPr>
-              <a:t>번 문제</a:t>
-            </a:r>
-            <a:r>
-              <a:rPr lang="en-US" altLang="ko-KR" sz="2800" b="1" dirty="0" smtClean="0">
+              <a:t>]</a:t>
+            </a:r>
+            <a:r>
+              <a:rPr lang="en-US" altLang="ko-KR" sz="2800" dirty="0">
                 <a:solidFill>
                   <a:schemeClr val="accent1"/>
                 </a:solidFill>
                 <a:latin typeface="+mn-ea"/>
               </a:rPr>
-              <a:t>]</a:t>
-            </a:r>
-            <a:r>
-              <a:rPr lang="en-US" altLang="ko-KR" sz="2800" dirty="0" smtClean="0">
-                <a:solidFill>
-                  <a:schemeClr val="accent1"/>
+              <a:t> </a:t>
+            </a:r>
+            <a:r>
+              <a:rPr lang="ko-KR" altLang="en-US" sz="2800" dirty="0">
+                <a:solidFill>
+                  <a:srgbClr val="212529"/>
                 </a:solidFill>
                 <a:latin typeface="+mn-ea"/>
               </a:rPr>
-              <a:t> </a:t>
-            </a:r>
-            <a:r>
-              <a:rPr lang="ko-KR" altLang="en-US" sz="2800" dirty="0" smtClean="0">
-                <a:solidFill>
-                  <a:srgbClr val="212529"/>
-                </a:solidFill>
-                <a:latin typeface="+mn-ea"/>
-              </a:rPr>
               <a:t> 진행</a:t>
             </a:r>
-            <a:endParaRPr lang="en-US" altLang="ko-KR" sz="2800" dirty="0" smtClean="0">
+            <a:endParaRPr lang="en-US" altLang="ko-KR" sz="2800" dirty="0">
               <a:solidFill>
                 <a:srgbClr val="212529"/>
               </a:solidFill>
@@ -7841,76 +8181,85 @@
               <a:t>➡ </a:t>
             </a:r>
             <a:r>
-              <a:rPr lang="en-US" altLang="ko-KR" sz="2800" b="1" dirty="0" smtClean="0">
+              <a:rPr lang="en-US" altLang="ko-KR" sz="2800" b="1" dirty="0">
                 <a:solidFill>
                   <a:schemeClr val="accent1"/>
                 </a:solidFill>
                 <a:latin typeface="+mn-ea"/>
               </a:rPr>
-              <a:t>[4</a:t>
-            </a:r>
-            <a:r>
-              <a:rPr lang="ko-KR" altLang="en-US" sz="2800" b="1" dirty="0" smtClean="0">
+              <a:t>[(</a:t>
+            </a:r>
+            <a:r>
+              <a:rPr lang="ko-KR" altLang="en-US" sz="2800" b="1" dirty="0">
                 <a:solidFill>
                   <a:schemeClr val="accent1"/>
                 </a:solidFill>
                 <a:latin typeface="+mn-ea"/>
               </a:rPr>
-              <a:t>번 문제 </a:t>
-            </a:r>
-            <a:r>
-              <a:rPr lang="en-US" altLang="ko-KR" sz="2800" b="1" dirty="0" smtClean="0">
+              <a:t>심화</a:t>
+            </a:r>
+            <a:r>
+              <a:rPr lang="en-US" altLang="ko-KR" sz="2800" b="1" dirty="0">
                 <a:solidFill>
                   <a:schemeClr val="accent1"/>
                 </a:solidFill>
                 <a:latin typeface="+mn-ea"/>
               </a:rPr>
-              <a:t>(</a:t>
-            </a:r>
-            <a:r>
-              <a:rPr lang="ko-KR" altLang="en-US" sz="2800" b="1" dirty="0" smtClean="0">
+              <a:t>)</a:t>
+            </a:r>
+            <a:r>
+              <a:rPr lang="ko-KR" altLang="en-US" sz="2800" b="1" dirty="0">
                 <a:solidFill>
                   <a:schemeClr val="accent1"/>
                 </a:solidFill>
                 <a:latin typeface="+mn-ea"/>
               </a:rPr>
-              <a:t>선택</a:t>
-            </a:r>
-            <a:r>
-              <a:rPr lang="en-US" altLang="ko-KR" sz="2800" b="1" dirty="0" smtClean="0">
+              <a:t> </a:t>
+            </a:r>
+            <a:r>
+              <a:rPr lang="en-US" altLang="ko-KR" sz="2800" b="1" dirty="0">
                 <a:solidFill>
                   <a:schemeClr val="accent1"/>
                 </a:solidFill>
                 <a:latin typeface="+mn-ea"/>
               </a:rPr>
-              <a:t>)]</a:t>
-            </a:r>
-            <a:r>
-              <a:rPr lang="en-US" altLang="ko-KR" sz="2800" dirty="0" smtClean="0">
+              <a:t>4</a:t>
+            </a:r>
+            <a:r>
+              <a:rPr lang="ko-KR" altLang="en-US" sz="2800" b="1" dirty="0">
                 <a:solidFill>
                   <a:schemeClr val="accent1"/>
                 </a:solidFill>
                 <a:latin typeface="+mn-ea"/>
               </a:rPr>
+              <a:t>번 문제</a:t>
+            </a:r>
+            <a:r>
+              <a:rPr lang="en-US" altLang="ko-KR" sz="2800" b="1" dirty="0">
+                <a:solidFill>
+                  <a:schemeClr val="accent1"/>
+                </a:solidFill>
+                <a:latin typeface="+mn-ea"/>
+              </a:rPr>
+              <a:t>]</a:t>
+            </a:r>
+            <a:r>
+              <a:rPr lang="en-US" altLang="ko-KR" sz="2800" dirty="0">
+                <a:solidFill>
+                  <a:schemeClr val="accent1"/>
+                </a:solidFill>
+                <a:latin typeface="+mn-ea"/>
+              </a:rPr>
               <a:t> </a:t>
             </a:r>
             <a:r>
-              <a:rPr lang="ko-KR" altLang="en-US" sz="2800" dirty="0" smtClean="0">
+              <a:rPr lang="ko-KR" altLang="en-US" sz="2800" dirty="0">
                 <a:solidFill>
                   <a:srgbClr val="212529"/>
                 </a:solidFill>
                 <a:latin typeface="+mn-ea"/>
               </a:rPr>
-              <a:t> </a:t>
-            </a:r>
-            <a:r>
-              <a:rPr lang="ko-KR" altLang="en-US" sz="2800" dirty="0">
-                <a:solidFill>
-                  <a:srgbClr val="212529"/>
-                </a:solidFill>
-                <a:latin typeface="+mn-ea"/>
-              </a:rPr>
-              <a:t>진행</a:t>
+              <a:t> 진행</a:t>
             </a:r>
           </a:p>
           <a:p>
@@ -8487,7 +8836,7 @@
         </p:nvSpPr>
         <p:spPr>
           <a:xfrm>
-            <a:off x="1100665" y="2544002"/>
+            <a:off x="1163727" y="2323284"/>
             <a:ext cx="8365067" cy="1200329"/>
           </a:xfrm>
           <a:prstGeom prst="rect">
@@ -9617,7 +9966,7 @@
           <p:nvPr/>
         </p:nvPicPr>
         <p:blipFill>
-          <a:blip r:embed="rId2"/>
+          <a:blip r:embed="rId3"/>
           <a:stretch>
             <a:fillRect/>
           </a:stretch>
@@ -9647,7 +9996,7 @@
           <p:nvPr/>
         </p:nvPicPr>
         <p:blipFill>
-          <a:blip r:embed="rId3"/>
+          <a:blip r:embed="rId4"/>
           <a:stretch>
             <a:fillRect/>
           </a:stretch>
@@ -9677,7 +10026,7 @@
           <p:nvPr/>
         </p:nvPicPr>
         <p:blipFill>
-          <a:blip r:embed="rId4"/>
+          <a:blip r:embed="rId5"/>
           <a:stretch>
             <a:fillRect/>
           </a:stretch>

--- a/material/[SeSAC_YDP_6] 26_React_map_filter.pptx
+++ b/material/[SeSAC_YDP_6] 26_React_map_filter.pptx
@@ -5,7 +5,7 @@
     <p:sldMasterId id="2147483686" r:id="rId1"/>
   </p:sldMasterIdLst>
   <p:notesMasterIdLst>
-    <p:notesMasterId r:id="rId20"/>
+    <p:notesMasterId r:id="rId18"/>
   </p:notesMasterIdLst>
   <p:sldIdLst>
     <p:sldId id="256" r:id="rId2"/>
@@ -18,14 +18,12 @@
     <p:sldId id="277" r:id="rId9"/>
     <p:sldId id="278" r:id="rId10"/>
     <p:sldId id="279" r:id="rId11"/>
-    <p:sldId id="280" r:id="rId12"/>
-    <p:sldId id="290" r:id="rId13"/>
-    <p:sldId id="282" r:id="rId14"/>
-    <p:sldId id="283" r:id="rId15"/>
-    <p:sldId id="284" r:id="rId16"/>
-    <p:sldId id="285" r:id="rId17"/>
-    <p:sldId id="286" r:id="rId18"/>
-    <p:sldId id="293" r:id="rId19"/>
+    <p:sldId id="290" r:id="rId12"/>
+    <p:sldId id="282" r:id="rId13"/>
+    <p:sldId id="283" r:id="rId14"/>
+    <p:sldId id="284" r:id="rId15"/>
+    <p:sldId id="285" r:id="rId16"/>
+    <p:sldId id="293" r:id="rId17"/>
   </p:sldIdLst>
   <p:sldSz cx="12192000" cy="6858000"/>
   <p:notesSz cx="6858000" cy="9144000"/>
@@ -217,7 +215,7 @@
           <a:p>
             <a:fld id="{2EF3F159-7250-4DD4-91C2-13B35D56E1AF}" type="datetimeFigureOut">
               <a:rPr lang="ko-KR" altLang="en-US" smtClean="0"/>
-              <a:t>2024-08-05</a:t>
+              <a:t>2024-08-06</a:t>
             </a:fld>
             <a:endParaRPr lang="ko-KR" altLang="en-US"/>
           </a:p>
@@ -612,6 +610,10 @@
           <a:bodyPr/>
           <a:lstStyle/>
           <a:p>
+            <a:r>
+              <a:rPr lang="en-US" altLang="ko-KR" dirty="0"/>
+              <a:t> </a:t>
+            </a:r>
             <a:endParaRPr lang="ko-KR" altLang="en-US" dirty="0"/>
           </a:p>
         </p:txBody>
@@ -642,7 +644,7 @@
     </p:spTree>
     <p:extLst>
       <p:ext uri="{BB962C8B-B14F-4D97-AF65-F5344CB8AC3E}">
-        <p14:creationId xmlns:p14="http://schemas.microsoft.com/office/powerpoint/2010/main" val="4174695049"/>
+        <p14:creationId xmlns:p14="http://schemas.microsoft.com/office/powerpoint/2010/main" val="1328778394"/>
       </p:ext>
     </p:extLst>
   </p:cSld>
@@ -696,6 +698,23 @@
           <a:bodyPr/>
           <a:lstStyle/>
           <a:p>
+            <a:r>
+              <a:rPr lang="ko-KR" altLang="en-US" dirty="0"/>
+              <a:t>배열의　각　요소를　주어진　조건에　따라　평가한　후，　그　조건을　만족하는　요소만을　새로운　배열로　반환함．</a:t>
+            </a:r>
+            <a:endParaRPr lang="en-US" altLang="ko-KR" dirty="0"/>
+          </a:p>
+          <a:p>
+            <a:r>
+              <a:rPr lang="ko-KR" altLang="en-US" dirty="0"/>
+              <a:t>이　또한　역시，　원본　배열을　변경하지　않음．</a:t>
+            </a:r>
+            <a:endParaRPr lang="en-US" altLang="ko-KR" dirty="0"/>
+          </a:p>
+          <a:p>
+            <a:endParaRPr lang="en-US" altLang="ko-KR" dirty="0"/>
+          </a:p>
+          <a:p>
             <a:endParaRPr lang="ko-KR" altLang="en-US" dirty="0"/>
           </a:p>
         </p:txBody>
@@ -717,7 +736,7 @@
           <a:p>
             <a:fld id="{C09E5BFC-1559-42F1-8940-AB342D56BF02}" type="slidenum">
               <a:rPr lang="ko-KR" altLang="en-US" smtClean="0"/>
-              <a:t>16</a:t>
+              <a:t>12</a:t>
             </a:fld>
             <a:endParaRPr lang="ko-KR" altLang="en-US"/>
           </a:p>
@@ -726,7 +745,7 @@
     </p:spTree>
     <p:extLst>
       <p:ext uri="{BB962C8B-B14F-4D97-AF65-F5344CB8AC3E}">
-        <p14:creationId xmlns:p14="http://schemas.microsoft.com/office/powerpoint/2010/main" val="2752525777"/>
+        <p14:creationId xmlns:p14="http://schemas.microsoft.com/office/powerpoint/2010/main" val="2243902190"/>
       </p:ext>
     </p:extLst>
   </p:cSld>
@@ -780,22 +799,6 @@
           <a:bodyPr/>
           <a:lstStyle/>
           <a:p>
-            <a:r>
-              <a:rPr lang="en-US" altLang="ko-KR" dirty="0"/>
-              <a:t>Reduce</a:t>
-            </a:r>
-            <a:r>
-              <a:rPr lang="en-US" altLang="ko-KR" baseline="0" dirty="0"/>
-              <a:t> </a:t>
-            </a:r>
-            <a:r>
-              <a:rPr lang="ko-KR" altLang="en-US" baseline="0" dirty="0"/>
-              <a:t>함수 설명도 추가 가능하다면</a:t>
-            </a:r>
-            <a:r>
-              <a:rPr lang="en-US" altLang="ko-KR" baseline="0"/>
-              <a:t>! </a:t>
-            </a:r>
             <a:endParaRPr lang="ko-KR" altLang="en-US" dirty="0"/>
           </a:p>
         </p:txBody>
@@ -817,7 +820,7 @@
           <a:p>
             <a:fld id="{C09E5BFC-1559-42F1-8940-AB342D56BF02}" type="slidenum">
               <a:rPr lang="ko-KR" altLang="en-US" smtClean="0"/>
-              <a:t>17</a:t>
+              <a:t>15</a:t>
             </a:fld>
             <a:endParaRPr lang="ko-KR" altLang="en-US"/>
           </a:p>
@@ -826,7 +829,7 @@
     </p:spTree>
     <p:extLst>
       <p:ext uri="{BB962C8B-B14F-4D97-AF65-F5344CB8AC3E}">
-        <p14:creationId xmlns:p14="http://schemas.microsoft.com/office/powerpoint/2010/main" val="2839057405"/>
+        <p14:creationId xmlns:p14="http://schemas.microsoft.com/office/powerpoint/2010/main" val="2752525777"/>
       </p:ext>
     </p:extLst>
   </p:cSld>
@@ -901,7 +904,7 @@
           <a:p>
             <a:fld id="{C09E5BFC-1559-42F1-8940-AB342D56BF02}" type="slidenum">
               <a:rPr lang="ko-KR" altLang="en-US" smtClean="0"/>
-              <a:t>18</a:t>
+              <a:t>16</a:t>
             </a:fld>
             <a:endParaRPr lang="ko-KR" altLang="en-US"/>
           </a:p>
@@ -6143,50 +6146,7 @@
       </p:grpSpPr>
       <p:sp>
         <p:nvSpPr>
-          <p:cNvPr id="3" name="내용 개체 틀 2">
-            <a:extLst>
-              <a:ext uri="{FF2B5EF4-FFF2-40B4-BE49-F238E27FC236}">
-                <a16:creationId xmlns:a16="http://schemas.microsoft.com/office/drawing/2014/main" id="{43B6E6F2-4A1F-0E69-67A4-8E7EA1060480}"/>
-              </a:ext>
-            </a:extLst>
-          </p:cNvPr>
-          <p:cNvSpPr>
-            <a:spLocks noGrp="1"/>
-          </p:cNvSpPr>
-          <p:nvPr>
-            <p:ph idx="1"/>
-          </p:nvPr>
-        </p:nvSpPr>
-        <p:spPr>
-          <a:xfrm>
-            <a:off x="838200" y="1215483"/>
-            <a:ext cx="10515600" cy="4461417"/>
-          </a:xfrm>
-        </p:spPr>
-        <p:txBody>
-          <a:bodyPr/>
-          <a:lstStyle/>
-          <a:p>
-            <a:r>
-              <a:rPr lang="en-US" altLang="ko-KR" dirty="0"/>
-              <a:t>input</a:t>
-            </a:r>
-            <a:r>
-              <a:rPr lang="ko-KR" altLang="en-US" dirty="0"/>
-              <a:t>으로 새로운 알파벳 추가해보기</a:t>
-            </a:r>
-          </a:p>
-        </p:txBody>
-      </p:sp>
-      <p:sp>
-        <p:nvSpPr>
-          <p:cNvPr id="4" name="날짜 개체 틀 3">
-            <a:extLst>
-              <a:ext uri="{FF2B5EF4-FFF2-40B4-BE49-F238E27FC236}">
-                <a16:creationId xmlns:a16="http://schemas.microsoft.com/office/drawing/2014/main" id="{8F058E69-2519-5C7B-E619-FCE4F8E785F7}"/>
-              </a:ext>
-            </a:extLst>
-          </p:cNvPr>
+          <p:cNvPr id="2" name="날짜 개체 틀 1"/>
           <p:cNvSpPr>
             <a:spLocks noGrp="1"/>
           </p:cNvSpPr>
@@ -6199,7 +6159,7 @@
           <a:bodyPr/>
           <a:lstStyle/>
           <a:p>
-            <a:fld id="{499F60AA-9663-4C10-96A7-DFE487A1DFF7}" type="datetime6">
+            <a:fld id="{0E19CB95-6D28-40F1-9DA3-1BAC5D4B5B4F}" type="datetime6">
               <a:rPr lang="ko-KR" altLang="en-US" smtClean="0"/>
               <a:t>2024년 8월</a:t>
             </a:fld>
@@ -6209,13 +6169,7 @@
       </p:sp>
       <p:sp>
         <p:nvSpPr>
-          <p:cNvPr id="5" name="슬라이드 번호 개체 틀 4">
-            <a:extLst>
-              <a:ext uri="{FF2B5EF4-FFF2-40B4-BE49-F238E27FC236}">
-                <a16:creationId xmlns:a16="http://schemas.microsoft.com/office/drawing/2014/main" id="{4A2D925E-B075-9DDE-125B-43171B9E6A97}"/>
-              </a:ext>
-            </a:extLst>
-          </p:cNvPr>
+          <p:cNvPr id="3" name="슬라이드 번호 개체 틀 2"/>
           <p:cNvSpPr>
             <a:spLocks noGrp="1"/>
           </p:cNvSpPr>
@@ -6238,13 +6192,7 @@
       </p:sp>
       <p:sp>
         <p:nvSpPr>
-          <p:cNvPr id="2" name="제목 1">
-            <a:extLst>
-              <a:ext uri="{FF2B5EF4-FFF2-40B4-BE49-F238E27FC236}">
-                <a16:creationId xmlns:a16="http://schemas.microsoft.com/office/drawing/2014/main" id="{DEEAE432-154C-1C3F-A5EC-16DFF73F5EC7}"/>
-              </a:ext>
-            </a:extLst>
-          </p:cNvPr>
+          <p:cNvPr id="4" name="제목 3"/>
           <p:cNvSpPr>
             <a:spLocks noGrp="1"/>
           </p:cNvSpPr>
@@ -6258,58 +6206,25 @@
           <a:lstStyle/>
           <a:p>
             <a:r>
-              <a:rPr lang="en-US" altLang="ko-KR" dirty="0"/>
-              <a:t>Component</a:t>
-            </a:r>
-            <a:r>
-              <a:rPr lang="ko-KR" altLang="en-US" dirty="0"/>
-              <a:t>에 </a:t>
-            </a:r>
-            <a:r>
-              <a:rPr lang="en-US" altLang="ko-KR" dirty="0"/>
-              <a:t>map() </a:t>
-            </a:r>
-            <a:r>
-              <a:rPr lang="ko-KR" altLang="en-US" dirty="0"/>
-              <a:t>적용</a:t>
-            </a:r>
-          </a:p>
-        </p:txBody>
-      </p:sp>
-      <p:pic>
-        <p:nvPicPr>
-          <p:cNvPr id="10" name="그림 9">
-            <a:extLst>
-              <a:ext uri="{FF2B5EF4-FFF2-40B4-BE49-F238E27FC236}">
-                <a16:creationId xmlns:a16="http://schemas.microsoft.com/office/drawing/2014/main" id="{36B95769-FA4E-C4E3-980B-0857B1994508}"/>
-              </a:ext>
-            </a:extLst>
-          </p:cNvPr>
-          <p:cNvPicPr>
-            <a:picLocks noChangeAspect="1"/>
-          </p:cNvPicPr>
-          <p:nvPr/>
-        </p:nvPicPr>
-        <p:blipFill>
-          <a:blip r:embed="rId3"/>
-          <a:stretch>
-            <a:fillRect/>
-          </a:stretch>
-        </p:blipFill>
-        <p:spPr>
-          <a:xfrm>
-            <a:off x="1119592" y="1897380"/>
-            <a:ext cx="9085897" cy="4366523"/>
-          </a:xfrm>
-          <a:prstGeom prst="rect">
-            <a:avLst/>
-          </a:prstGeom>
-        </p:spPr>
-      </p:pic>
+              <a:rPr lang="en-US" altLang="ko-KR" sz="7200" dirty="0"/>
+              <a:t>filter()</a:t>
+            </a:r>
+            <a:r>
+              <a:rPr lang="ko-KR" altLang="en-US" sz="7200" dirty="0"/>
+              <a:t>를 이용한 </a:t>
+            </a:r>
+            <a:r>
+              <a:rPr lang="ko-KR" altLang="en-US" sz="7200" dirty="0" err="1"/>
+              <a:t>필터링</a:t>
+            </a:r>
+            <a:endParaRPr lang="ko-KR" altLang="en-US" sz="7200" dirty="0"/>
+          </a:p>
+        </p:txBody>
+      </p:sp>
     </p:spTree>
     <p:extLst>
       <p:ext uri="{BB962C8B-B14F-4D97-AF65-F5344CB8AC3E}">
-        <p14:creationId xmlns:p14="http://schemas.microsoft.com/office/powerpoint/2010/main" val="2025476529"/>
+        <p14:creationId xmlns:p14="http://schemas.microsoft.com/office/powerpoint/2010/main" val="960713128"/>
       </p:ext>
     </p:extLst>
   </p:cSld>
@@ -6338,7 +6253,127 @@
       </p:grpSpPr>
       <p:sp>
         <p:nvSpPr>
-          <p:cNvPr id="2" name="날짜 개체 틀 1"/>
+          <p:cNvPr id="3" name="내용 개체 틀 2">
+            <a:extLst>
+              <a:ext uri="{FF2B5EF4-FFF2-40B4-BE49-F238E27FC236}">
+                <a16:creationId xmlns:a16="http://schemas.microsoft.com/office/drawing/2014/main" id="{FFB0A8FF-58B4-AADA-C277-115F024B2E5A}"/>
+              </a:ext>
+            </a:extLst>
+          </p:cNvPr>
+          <p:cNvSpPr>
+            <a:spLocks noGrp="1"/>
+          </p:cNvSpPr>
+          <p:nvPr>
+            <p:ph idx="1"/>
+          </p:nvPr>
+        </p:nvSpPr>
+        <p:spPr>
+          <a:xfrm>
+            <a:off x="571500" y="1488141"/>
+            <a:ext cx="11049000" cy="4553128"/>
+          </a:xfrm>
+        </p:spPr>
+        <p:txBody>
+          <a:bodyPr/>
+          <a:lstStyle/>
+          <a:p>
+            <a:r>
+              <a:rPr lang="en-US" altLang="ko-KR" dirty="0"/>
+              <a:t>filter()</a:t>
+            </a:r>
+            <a:r>
+              <a:rPr lang="ko-KR" altLang="en-US" dirty="0"/>
+              <a:t>의 인자로 넘겨지는 </a:t>
+            </a:r>
+            <a:r>
+              <a:rPr lang="en-US" altLang="ko-KR" dirty="0"/>
+              <a:t>callback </a:t>
+            </a:r>
+            <a:r>
+              <a:rPr lang="ko-KR" altLang="en-US" dirty="0"/>
+              <a:t>함수의 </a:t>
+            </a:r>
+            <a:r>
+              <a:rPr lang="ko-KR" altLang="en-US" dirty="0">
+                <a:solidFill>
+                  <a:schemeClr val="accent1"/>
+                </a:solidFill>
+              </a:rPr>
+              <a:t>테스트</a:t>
+            </a:r>
+            <a:r>
+              <a:rPr lang="en-US" altLang="ko-KR" dirty="0">
+                <a:solidFill>
+                  <a:schemeClr val="accent1"/>
+                </a:solidFill>
+              </a:rPr>
+              <a:t>(</a:t>
+            </a:r>
+            <a:r>
+              <a:rPr lang="ko-KR" altLang="en-US" dirty="0">
+                <a:solidFill>
+                  <a:schemeClr val="accent1"/>
+                </a:solidFill>
+              </a:rPr>
+              <a:t>조건</a:t>
+            </a:r>
+            <a:r>
+              <a:rPr lang="en-US" altLang="ko-KR" dirty="0">
+                <a:solidFill>
+                  <a:schemeClr val="accent1"/>
+                </a:solidFill>
+              </a:rPr>
+              <a:t>)</a:t>
+            </a:r>
+            <a:r>
+              <a:rPr lang="ko-KR" altLang="en-US" dirty="0">
+                <a:solidFill>
+                  <a:schemeClr val="accent1"/>
+                </a:solidFill>
+              </a:rPr>
+              <a:t>를 통과하는 요소</a:t>
+            </a:r>
+            <a:r>
+              <a:rPr lang="ko-KR" altLang="en-US" dirty="0"/>
+              <a:t>를 모아 새로운 배열을 생성</a:t>
+            </a:r>
+            <a:r>
+              <a:rPr lang="en-US" altLang="ko-KR" dirty="0"/>
+              <a:t>. </a:t>
+            </a:r>
+          </a:p>
+          <a:p>
+            <a:r>
+              <a:rPr lang="en-US" altLang="ko-KR" dirty="0"/>
+              <a:t>filter() </a:t>
+            </a:r>
+            <a:r>
+              <a:rPr lang="ko-KR" altLang="en-US" dirty="0"/>
+              <a:t>함수를 사용하여 배열에서 원하는 값을 삭제하는 코드 구현 가능</a:t>
+            </a:r>
+            <a:r>
+              <a:rPr lang="en-US" altLang="ko-KR" dirty="0"/>
+              <a:t>.</a:t>
+            </a:r>
+            <a:endParaRPr lang="en-US" altLang="ko-KR" sz="4000" dirty="0"/>
+          </a:p>
+          <a:p>
+            <a:pPr marL="0" indent="0">
+              <a:buNone/>
+            </a:pPr>
+            <a:endParaRPr lang="en-US" altLang="ko-KR" sz="4000" dirty="0"/>
+          </a:p>
+        </p:txBody>
+      </p:sp>
+      <p:sp>
+        <p:nvSpPr>
+          <p:cNvPr id="4" name="날짜 개체 틀 3">
+            <a:extLst>
+              <a:ext uri="{FF2B5EF4-FFF2-40B4-BE49-F238E27FC236}">
+                <a16:creationId xmlns:a16="http://schemas.microsoft.com/office/drawing/2014/main" id="{AD912659-0178-7724-84E7-F9804EEB516A}"/>
+              </a:ext>
+            </a:extLst>
+          </p:cNvPr>
           <p:cNvSpPr>
             <a:spLocks noGrp="1"/>
           </p:cNvSpPr>
@@ -6351,17 +6386,23 @@
           <a:bodyPr/>
           <a:lstStyle/>
           <a:p>
-            <a:fld id="{0E19CB95-6D28-40F1-9DA3-1BAC5D4B5B4F}" type="datetime6">
+            <a:fld id="{ECE2EEAA-2D64-41F3-9CC6-1D2C9158BEA1}" type="datetime6">
               <a:rPr lang="ko-KR" altLang="en-US" smtClean="0"/>
               <a:t>2024년 8월</a:t>
             </a:fld>
-            <a:endParaRPr lang="ko-KR" altLang="en-US"/>
-          </a:p>
-        </p:txBody>
-      </p:sp>
-      <p:sp>
-        <p:nvSpPr>
-          <p:cNvPr id="3" name="슬라이드 번호 개체 틀 2"/>
+            <a:endParaRPr lang="ko-KR" altLang="en-US" dirty="0"/>
+          </a:p>
+        </p:txBody>
+      </p:sp>
+      <p:sp>
+        <p:nvSpPr>
+          <p:cNvPr id="5" name="슬라이드 번호 개체 틀 4">
+            <a:extLst>
+              <a:ext uri="{FF2B5EF4-FFF2-40B4-BE49-F238E27FC236}">
+                <a16:creationId xmlns:a16="http://schemas.microsoft.com/office/drawing/2014/main" id="{E038AD2A-D098-5002-7259-7C0CF8DAB853}"/>
+              </a:ext>
+            </a:extLst>
+          </p:cNvPr>
           <p:cNvSpPr>
             <a:spLocks noGrp="1"/>
           </p:cNvSpPr>
@@ -6378,13 +6419,19 @@
               <a:rPr lang="ko-KR" altLang="en-US" smtClean="0"/>
               <a:t>12</a:t>
             </a:fld>
-            <a:endParaRPr lang="ko-KR" altLang="en-US"/>
-          </a:p>
-        </p:txBody>
-      </p:sp>
-      <p:sp>
-        <p:nvSpPr>
-          <p:cNvPr id="4" name="제목 3"/>
+            <a:endParaRPr lang="ko-KR" altLang="en-US" dirty="0"/>
+          </a:p>
+        </p:txBody>
+      </p:sp>
+      <p:sp>
+        <p:nvSpPr>
+          <p:cNvPr id="2" name="제목 1">
+            <a:extLst>
+              <a:ext uri="{FF2B5EF4-FFF2-40B4-BE49-F238E27FC236}">
+                <a16:creationId xmlns:a16="http://schemas.microsoft.com/office/drawing/2014/main" id="{45FB17D5-C686-6D90-A10C-DFBDB6D2FE1F}"/>
+              </a:ext>
+            </a:extLst>
+          </p:cNvPr>
           <p:cNvSpPr>
             <a:spLocks noGrp="1"/>
           </p:cNvSpPr>
@@ -6398,25 +6445,20 @@
           <a:lstStyle/>
           <a:p>
             <a:r>
-              <a:rPr lang="en-US" altLang="ko-KR" sz="7200" dirty="0"/>
+              <a:rPr lang="en-US" altLang="ko-KR" dirty="0"/>
               <a:t>filter()</a:t>
             </a:r>
             <a:r>
-              <a:rPr lang="ko-KR" altLang="en-US" sz="7200" dirty="0"/>
-              <a:t>를 이용한 </a:t>
-            </a:r>
-            <a:r>
-              <a:rPr lang="ko-KR" altLang="en-US" sz="7200" dirty="0" err="1"/>
-              <a:t>필터링</a:t>
-            </a:r>
-            <a:endParaRPr lang="ko-KR" altLang="en-US" sz="7200" dirty="0"/>
+              <a:rPr lang="ko-KR" altLang="en-US" dirty="0"/>
+              <a:t> 함수</a:t>
+            </a:r>
           </a:p>
         </p:txBody>
       </p:sp>
     </p:spTree>
     <p:extLst>
       <p:ext uri="{BB962C8B-B14F-4D97-AF65-F5344CB8AC3E}">
-        <p14:creationId xmlns:p14="http://schemas.microsoft.com/office/powerpoint/2010/main" val="960713128"/>
+        <p14:creationId xmlns:p14="http://schemas.microsoft.com/office/powerpoint/2010/main" val="1354429162"/>
       </p:ext>
     </p:extLst>
   </p:cSld>
@@ -6445,240 +6487,6 @@
       </p:grpSpPr>
       <p:sp>
         <p:nvSpPr>
-          <p:cNvPr id="3" name="내용 개체 틀 2">
-            <a:extLst>
-              <a:ext uri="{FF2B5EF4-FFF2-40B4-BE49-F238E27FC236}">
-                <a16:creationId xmlns:a16="http://schemas.microsoft.com/office/drawing/2014/main" id="{FFB0A8FF-58B4-AADA-C277-115F024B2E5A}"/>
-              </a:ext>
-            </a:extLst>
-          </p:cNvPr>
-          <p:cNvSpPr>
-            <a:spLocks noGrp="1"/>
-          </p:cNvSpPr>
-          <p:nvPr>
-            <p:ph idx="1"/>
-          </p:nvPr>
-        </p:nvSpPr>
-        <p:spPr>
-          <a:xfrm>
-            <a:off x="571500" y="1488141"/>
-            <a:ext cx="11049000" cy="4553128"/>
-          </a:xfrm>
-        </p:spPr>
-        <p:txBody>
-          <a:bodyPr/>
-          <a:lstStyle/>
-          <a:p>
-            <a:r>
-              <a:rPr lang="en-US" altLang="ko-KR" dirty="0"/>
-              <a:t>filter()</a:t>
-            </a:r>
-            <a:r>
-              <a:rPr lang="ko-KR" altLang="en-US" dirty="0"/>
-              <a:t>의 인자로 넘겨지는 </a:t>
-            </a:r>
-            <a:r>
-              <a:rPr lang="en-US" altLang="ko-KR" dirty="0"/>
-              <a:t>callback </a:t>
-            </a:r>
-            <a:r>
-              <a:rPr lang="ko-KR" altLang="en-US" dirty="0"/>
-              <a:t>함수의 </a:t>
-            </a:r>
-            <a:r>
-              <a:rPr lang="ko-KR" altLang="en-US" dirty="0">
-                <a:solidFill>
-                  <a:schemeClr val="accent1"/>
-                </a:solidFill>
-              </a:rPr>
-              <a:t>테스트</a:t>
-            </a:r>
-            <a:r>
-              <a:rPr lang="en-US" altLang="ko-KR" dirty="0">
-                <a:solidFill>
-                  <a:schemeClr val="accent1"/>
-                </a:solidFill>
-              </a:rPr>
-              <a:t>(</a:t>
-            </a:r>
-            <a:r>
-              <a:rPr lang="ko-KR" altLang="en-US" dirty="0">
-                <a:solidFill>
-                  <a:schemeClr val="accent1"/>
-                </a:solidFill>
-              </a:rPr>
-              <a:t>조건</a:t>
-            </a:r>
-            <a:r>
-              <a:rPr lang="en-US" altLang="ko-KR" dirty="0">
-                <a:solidFill>
-                  <a:schemeClr val="accent1"/>
-                </a:solidFill>
-              </a:rPr>
-              <a:t>)</a:t>
-            </a:r>
-            <a:r>
-              <a:rPr lang="ko-KR" altLang="en-US" dirty="0">
-                <a:solidFill>
-                  <a:schemeClr val="accent1"/>
-                </a:solidFill>
-              </a:rPr>
-              <a:t>를 통과하는 요소</a:t>
-            </a:r>
-            <a:r>
-              <a:rPr lang="ko-KR" altLang="en-US" dirty="0"/>
-              <a:t>를 모아 새로운 배열을 생성</a:t>
-            </a:r>
-            <a:r>
-              <a:rPr lang="en-US" altLang="ko-KR" dirty="0"/>
-              <a:t>. </a:t>
-            </a:r>
-          </a:p>
-          <a:p>
-            <a:r>
-              <a:rPr lang="en-US" altLang="ko-KR" dirty="0"/>
-              <a:t>filter() </a:t>
-            </a:r>
-            <a:r>
-              <a:rPr lang="ko-KR" altLang="en-US" dirty="0"/>
-              <a:t>함수를 사용하여 배열에서 원하는 값을 삭제하는 코드 구현 가능</a:t>
-            </a:r>
-            <a:r>
-              <a:rPr lang="en-US" altLang="ko-KR" dirty="0"/>
-              <a:t>.</a:t>
-            </a:r>
-            <a:endParaRPr lang="en-US" altLang="ko-KR" sz="4000" dirty="0"/>
-          </a:p>
-          <a:p>
-            <a:pPr marL="0" indent="0">
-              <a:buNone/>
-            </a:pPr>
-            <a:endParaRPr lang="en-US" altLang="ko-KR" sz="4000" dirty="0"/>
-          </a:p>
-        </p:txBody>
-      </p:sp>
-      <p:sp>
-        <p:nvSpPr>
-          <p:cNvPr id="4" name="날짜 개체 틀 3">
-            <a:extLst>
-              <a:ext uri="{FF2B5EF4-FFF2-40B4-BE49-F238E27FC236}">
-                <a16:creationId xmlns:a16="http://schemas.microsoft.com/office/drawing/2014/main" id="{AD912659-0178-7724-84E7-F9804EEB516A}"/>
-              </a:ext>
-            </a:extLst>
-          </p:cNvPr>
-          <p:cNvSpPr>
-            <a:spLocks noGrp="1"/>
-          </p:cNvSpPr>
-          <p:nvPr>
-            <p:ph type="dt" sz="half" idx="10"/>
-          </p:nvPr>
-        </p:nvSpPr>
-        <p:spPr/>
-        <p:txBody>
-          <a:bodyPr/>
-          <a:lstStyle/>
-          <a:p>
-            <a:fld id="{ECE2EEAA-2D64-41F3-9CC6-1D2C9158BEA1}" type="datetime6">
-              <a:rPr lang="ko-KR" altLang="en-US" smtClean="0"/>
-              <a:t>2024년 8월</a:t>
-            </a:fld>
-            <a:endParaRPr lang="ko-KR" altLang="en-US" dirty="0"/>
-          </a:p>
-        </p:txBody>
-      </p:sp>
-      <p:sp>
-        <p:nvSpPr>
-          <p:cNvPr id="5" name="슬라이드 번호 개체 틀 4">
-            <a:extLst>
-              <a:ext uri="{FF2B5EF4-FFF2-40B4-BE49-F238E27FC236}">
-                <a16:creationId xmlns:a16="http://schemas.microsoft.com/office/drawing/2014/main" id="{E038AD2A-D098-5002-7259-7C0CF8DAB853}"/>
-              </a:ext>
-            </a:extLst>
-          </p:cNvPr>
-          <p:cNvSpPr>
-            <a:spLocks noGrp="1"/>
-          </p:cNvSpPr>
-          <p:nvPr>
-            <p:ph type="sldNum" sz="quarter" idx="12"/>
-          </p:nvPr>
-        </p:nvSpPr>
-        <p:spPr/>
-        <p:txBody>
-          <a:bodyPr/>
-          <a:lstStyle/>
-          <a:p>
-            <a:fld id="{083A2CE0-18CD-4102-B738-4ACFF9E68BA4}" type="slidenum">
-              <a:rPr lang="ko-KR" altLang="en-US" smtClean="0"/>
-              <a:t>13</a:t>
-            </a:fld>
-            <a:endParaRPr lang="ko-KR" altLang="en-US" dirty="0"/>
-          </a:p>
-        </p:txBody>
-      </p:sp>
-      <p:sp>
-        <p:nvSpPr>
-          <p:cNvPr id="2" name="제목 1">
-            <a:extLst>
-              <a:ext uri="{FF2B5EF4-FFF2-40B4-BE49-F238E27FC236}">
-                <a16:creationId xmlns:a16="http://schemas.microsoft.com/office/drawing/2014/main" id="{45FB17D5-C686-6D90-A10C-DFBDB6D2FE1F}"/>
-              </a:ext>
-            </a:extLst>
-          </p:cNvPr>
-          <p:cNvSpPr>
-            <a:spLocks noGrp="1"/>
-          </p:cNvSpPr>
-          <p:nvPr>
-            <p:ph type="title"/>
-          </p:nvPr>
-        </p:nvSpPr>
-        <p:spPr/>
-        <p:txBody>
-          <a:bodyPr/>
-          <a:lstStyle/>
-          <a:p>
-            <a:r>
-              <a:rPr lang="en-US" altLang="ko-KR" dirty="0"/>
-              <a:t>filter()</a:t>
-            </a:r>
-            <a:r>
-              <a:rPr lang="ko-KR" altLang="en-US" dirty="0"/>
-              <a:t> 함수</a:t>
-            </a:r>
-          </a:p>
-        </p:txBody>
-      </p:sp>
-    </p:spTree>
-    <p:extLst>
-      <p:ext uri="{BB962C8B-B14F-4D97-AF65-F5344CB8AC3E}">
-        <p14:creationId xmlns:p14="http://schemas.microsoft.com/office/powerpoint/2010/main" val="1354429162"/>
-      </p:ext>
-    </p:extLst>
-  </p:cSld>
-  <p:clrMapOvr>
-    <a:masterClrMapping/>
-  </p:clrMapOvr>
-</p:sld>
-</file>
-
-<file path=ppt/slides/slide14.xml><?xml version="1.0" encoding="utf-8"?>
-<p:sld xmlns:a="http://schemas.openxmlformats.org/drawingml/2006/main" xmlns:r="http://schemas.openxmlformats.org/officeDocument/2006/relationships" xmlns:p="http://schemas.openxmlformats.org/presentationml/2006/main">
-  <p:cSld>
-    <p:spTree>
-      <p:nvGrpSpPr>
-        <p:cNvPr id="1" name=""/>
-        <p:cNvGrpSpPr/>
-        <p:nvPr/>
-      </p:nvGrpSpPr>
-      <p:grpSpPr>
-        <a:xfrm>
-          <a:off x="0" y="0"/>
-          <a:ext cx="0" cy="0"/>
-          <a:chOff x="0" y="0"/>
-          <a:chExt cx="0" cy="0"/>
-        </a:xfrm>
-      </p:grpSpPr>
-      <p:sp>
-        <p:nvSpPr>
           <p:cNvPr id="4" name="날짜 개체 틀 3">
             <a:extLst>
               <a:ext uri="{FF2B5EF4-FFF2-40B4-BE49-F238E27FC236}">
@@ -6729,7 +6537,7 @@
           <a:p>
             <a:fld id="{083A2CE0-18CD-4102-B738-4ACFF9E68BA4}" type="slidenum">
               <a:rPr lang="ko-KR" altLang="en-US" smtClean="0"/>
-              <a:t>14</a:t>
+              <a:t>13</a:t>
             </a:fld>
             <a:endParaRPr lang="ko-KR" altLang="en-US"/>
           </a:p>
@@ -6870,7 +6678,7 @@
 </p:sld>
 </file>
 
-<file path=ppt/slides/slide15.xml><?xml version="1.0" encoding="utf-8"?>
+<file path=ppt/slides/slide14.xml><?xml version="1.0" encoding="utf-8"?>
 <p:sld xmlns:a="http://schemas.openxmlformats.org/drawingml/2006/main" xmlns:r="http://schemas.openxmlformats.org/officeDocument/2006/relationships" xmlns:p="http://schemas.openxmlformats.org/presentationml/2006/main">
   <p:cSld>
     <p:spTree>
@@ -6939,7 +6747,7 @@
           <a:p>
             <a:fld id="{083A2CE0-18CD-4102-B738-4ACFF9E68BA4}" type="slidenum">
               <a:rPr lang="ko-KR" altLang="en-US" smtClean="0"/>
-              <a:t>15</a:t>
+              <a:t>14</a:t>
             </a:fld>
             <a:endParaRPr lang="ko-KR" altLang="en-US"/>
           </a:p>
@@ -7020,7 +6828,7 @@
 </p:sld>
 </file>
 
-<file path=ppt/slides/slide16.xml><?xml version="1.0" encoding="utf-8"?>
+<file path=ppt/slides/slide15.xml><?xml version="1.0" encoding="utf-8"?>
 <p:sld xmlns:a="http://schemas.openxmlformats.org/drawingml/2006/main" xmlns:r="http://schemas.openxmlformats.org/officeDocument/2006/relationships" xmlns:p="http://schemas.openxmlformats.org/presentationml/2006/main">
   <p:cSld>
     <p:spTree>
@@ -7122,7 +6930,7 @@
           <a:p>
             <a:fld id="{083A2CE0-18CD-4102-B738-4ACFF9E68BA4}" type="slidenum">
               <a:rPr lang="ko-KR" altLang="en-US" smtClean="0"/>
-              <a:t>16</a:t>
+              <a:t>15</a:t>
             </a:fld>
             <a:endParaRPr lang="ko-KR" altLang="en-US"/>
           </a:p>
@@ -7345,7 +7153,7 @@
 </p:sld>
 </file>
 
-<file path=ppt/slides/slide17.xml><?xml version="1.0" encoding="utf-8"?>
+<file path=ppt/slides/slide16.xml><?xml version="1.0" encoding="utf-8"?>
 <p:sld xmlns:a="http://schemas.openxmlformats.org/drawingml/2006/main" xmlns:r="http://schemas.openxmlformats.org/officeDocument/2006/relationships" xmlns:p="http://schemas.openxmlformats.org/presentationml/2006/main">
   <p:cSld>
     <p:spTree>
@@ -7364,260 +7172,6 @@
       </p:grpSpPr>
       <p:sp>
         <p:nvSpPr>
-          <p:cNvPr id="4" name="날짜 개체 틀 3">
-            <a:extLst>
-              <a:ext uri="{FF2B5EF4-FFF2-40B4-BE49-F238E27FC236}">
-                <a16:creationId xmlns:a16="http://schemas.microsoft.com/office/drawing/2014/main" id="{8F058E69-2519-5C7B-E619-FCE4F8E785F7}"/>
-              </a:ext>
-            </a:extLst>
-          </p:cNvPr>
-          <p:cNvSpPr>
-            <a:spLocks noGrp="1"/>
-          </p:cNvSpPr>
-          <p:nvPr>
-            <p:ph type="dt" sz="half" idx="10"/>
-          </p:nvPr>
-        </p:nvSpPr>
-        <p:spPr/>
-        <p:txBody>
-          <a:bodyPr/>
-          <a:lstStyle/>
-          <a:p>
-            <a:fld id="{499F60AA-9663-4C10-96A7-DFE487A1DFF7}" type="datetime6">
-              <a:rPr lang="ko-KR" altLang="en-US" smtClean="0"/>
-              <a:t>2024년 8월</a:t>
-            </a:fld>
-            <a:endParaRPr lang="ko-KR" altLang="en-US"/>
-          </a:p>
-        </p:txBody>
-      </p:sp>
-      <p:sp>
-        <p:nvSpPr>
-          <p:cNvPr id="5" name="슬라이드 번호 개체 틀 4">
-            <a:extLst>
-              <a:ext uri="{FF2B5EF4-FFF2-40B4-BE49-F238E27FC236}">
-                <a16:creationId xmlns:a16="http://schemas.microsoft.com/office/drawing/2014/main" id="{4A2D925E-B075-9DDE-125B-43171B9E6A97}"/>
-              </a:ext>
-            </a:extLst>
-          </p:cNvPr>
-          <p:cNvSpPr>
-            <a:spLocks noGrp="1"/>
-          </p:cNvSpPr>
-          <p:nvPr>
-            <p:ph type="sldNum" sz="quarter" idx="12"/>
-          </p:nvPr>
-        </p:nvSpPr>
-        <p:spPr/>
-        <p:txBody>
-          <a:bodyPr/>
-          <a:lstStyle/>
-          <a:p>
-            <a:fld id="{083A2CE0-18CD-4102-B738-4ACFF9E68BA4}" type="slidenum">
-              <a:rPr lang="ko-KR" altLang="en-US" smtClean="0"/>
-              <a:t>17</a:t>
-            </a:fld>
-            <a:endParaRPr lang="ko-KR" altLang="en-US"/>
-          </a:p>
-        </p:txBody>
-      </p:sp>
-      <p:sp>
-        <p:nvSpPr>
-          <p:cNvPr id="2" name="제목 1">
-            <a:extLst>
-              <a:ext uri="{FF2B5EF4-FFF2-40B4-BE49-F238E27FC236}">
-                <a16:creationId xmlns:a16="http://schemas.microsoft.com/office/drawing/2014/main" id="{DEEAE432-154C-1C3F-A5EC-16DFF73F5EC7}"/>
-              </a:ext>
-            </a:extLst>
-          </p:cNvPr>
-          <p:cNvSpPr>
-            <a:spLocks noGrp="1"/>
-          </p:cNvSpPr>
-          <p:nvPr>
-            <p:ph type="title"/>
-          </p:nvPr>
-        </p:nvSpPr>
-        <p:spPr/>
-        <p:txBody>
-          <a:bodyPr/>
-          <a:lstStyle/>
-          <a:p>
-            <a:r>
-              <a:rPr lang="en-US" altLang="ko-KR" dirty="0"/>
-              <a:t>filter() </a:t>
-            </a:r>
-            <a:r>
-              <a:rPr lang="ko-KR" altLang="en-US" dirty="0"/>
-              <a:t>응용</a:t>
-            </a:r>
-          </a:p>
-        </p:txBody>
-      </p:sp>
-      <p:pic>
-        <p:nvPicPr>
-          <p:cNvPr id="10" name="그림 9">
-            <a:extLst>
-              <a:ext uri="{FF2B5EF4-FFF2-40B4-BE49-F238E27FC236}">
-                <a16:creationId xmlns:a16="http://schemas.microsoft.com/office/drawing/2014/main" id="{FC0EB19B-C0C6-4EE2-71CC-D431A634BFE3}"/>
-              </a:ext>
-            </a:extLst>
-          </p:cNvPr>
-          <p:cNvPicPr>
-            <a:picLocks noChangeAspect="1"/>
-          </p:cNvPicPr>
-          <p:nvPr/>
-        </p:nvPicPr>
-        <p:blipFill>
-          <a:blip r:embed="rId3"/>
-          <a:stretch>
-            <a:fillRect/>
-          </a:stretch>
-        </p:blipFill>
-        <p:spPr>
-          <a:xfrm>
-            <a:off x="586613" y="1214051"/>
-            <a:ext cx="11018774" cy="4787183"/>
-          </a:xfrm>
-          <a:prstGeom prst="rect">
-            <a:avLst/>
-          </a:prstGeom>
-        </p:spPr>
-      </p:pic>
-      <p:sp>
-        <p:nvSpPr>
-          <p:cNvPr id="13" name="직사각형 12">
-            <a:extLst>
-              <a:ext uri="{FF2B5EF4-FFF2-40B4-BE49-F238E27FC236}">
-                <a16:creationId xmlns:a16="http://schemas.microsoft.com/office/drawing/2014/main" id="{2E775F9E-EA2C-FD91-9B4F-4BA95A07505D}"/>
-              </a:ext>
-            </a:extLst>
-          </p:cNvPr>
-          <p:cNvSpPr/>
-          <p:nvPr/>
-        </p:nvSpPr>
-        <p:spPr>
-          <a:xfrm>
-            <a:off x="635620" y="2587083"/>
-            <a:ext cx="6322741" cy="1115122"/>
-          </a:xfrm>
-          <a:prstGeom prst="rect">
-            <a:avLst/>
-          </a:prstGeom>
-          <a:noFill/>
-          <a:ln w="38100">
-            <a:solidFill>
-              <a:schemeClr val="accent5"/>
-            </a:solidFill>
-          </a:ln>
-        </p:spPr>
-        <p:style>
-          <a:lnRef idx="2">
-            <a:schemeClr val="accent1">
-              <a:shade val="50000"/>
-            </a:schemeClr>
-          </a:lnRef>
-          <a:fillRef idx="1">
-            <a:schemeClr val="accent1"/>
-          </a:fillRef>
-          <a:effectRef idx="0">
-            <a:schemeClr val="accent1"/>
-          </a:effectRef>
-          <a:fontRef idx="minor">
-            <a:schemeClr val="lt1"/>
-          </a:fontRef>
-        </p:style>
-        <p:txBody>
-          <a:bodyPr rtlCol="0" anchor="ctr"/>
-          <a:lstStyle/>
-          <a:p>
-            <a:pPr algn="ctr"/>
-            <a:endParaRPr lang="ko-KR" altLang="en-US" dirty="0"/>
-          </a:p>
-        </p:txBody>
-      </p:sp>
-      <p:sp>
-        <p:nvSpPr>
-          <p:cNvPr id="16" name="직사각형 15">
-            <a:extLst>
-              <a:ext uri="{FF2B5EF4-FFF2-40B4-BE49-F238E27FC236}">
-                <a16:creationId xmlns:a16="http://schemas.microsoft.com/office/drawing/2014/main" id="{DA0AC4FB-083D-982A-0BE5-18B0ED76F017}"/>
-              </a:ext>
-            </a:extLst>
-          </p:cNvPr>
-          <p:cNvSpPr/>
-          <p:nvPr/>
-        </p:nvSpPr>
-        <p:spPr>
-          <a:xfrm>
-            <a:off x="5207621" y="4916257"/>
-            <a:ext cx="4241180" cy="347120"/>
-          </a:xfrm>
-          <a:prstGeom prst="rect">
-            <a:avLst/>
-          </a:prstGeom>
-          <a:noFill/>
-          <a:ln w="38100">
-            <a:solidFill>
-              <a:schemeClr val="accent5"/>
-            </a:solidFill>
-          </a:ln>
-        </p:spPr>
-        <p:style>
-          <a:lnRef idx="2">
-            <a:schemeClr val="accent1">
-              <a:shade val="50000"/>
-            </a:schemeClr>
-          </a:lnRef>
-          <a:fillRef idx="1">
-            <a:schemeClr val="accent1"/>
-          </a:fillRef>
-          <a:effectRef idx="0">
-            <a:schemeClr val="accent1"/>
-          </a:effectRef>
-          <a:fontRef idx="minor">
-            <a:schemeClr val="lt1"/>
-          </a:fontRef>
-        </p:style>
-        <p:txBody>
-          <a:bodyPr rtlCol="0" anchor="ctr"/>
-          <a:lstStyle/>
-          <a:p>
-            <a:pPr algn="ctr"/>
-            <a:endParaRPr lang="ko-KR" altLang="en-US" dirty="0"/>
-          </a:p>
-        </p:txBody>
-      </p:sp>
-    </p:spTree>
-    <p:extLst>
-      <p:ext uri="{BB962C8B-B14F-4D97-AF65-F5344CB8AC3E}">
-        <p14:creationId xmlns:p14="http://schemas.microsoft.com/office/powerpoint/2010/main" val="2495203983"/>
-      </p:ext>
-    </p:extLst>
-  </p:cSld>
-  <p:clrMapOvr>
-    <a:masterClrMapping/>
-  </p:clrMapOvr>
-</p:sld>
-</file>
-
-<file path=ppt/slides/slide18.xml><?xml version="1.0" encoding="utf-8"?>
-<p:sld xmlns:a="http://schemas.openxmlformats.org/drawingml/2006/main" xmlns:r="http://schemas.openxmlformats.org/officeDocument/2006/relationships" xmlns:p="http://schemas.openxmlformats.org/presentationml/2006/main">
-  <p:cSld>
-    <p:spTree>
-      <p:nvGrpSpPr>
-        <p:cNvPr id="1" name=""/>
-        <p:cNvGrpSpPr/>
-        <p:nvPr/>
-      </p:nvGrpSpPr>
-      <p:grpSpPr>
-        <a:xfrm>
-          <a:off x="0" y="0"/>
-          <a:ext cx="0" cy="0"/>
-          <a:chOff x="0" y="0"/>
-          <a:chExt cx="0" cy="0"/>
-        </a:xfrm>
-      </p:grpSpPr>
-      <p:sp>
-        <p:nvSpPr>
           <p:cNvPr id="13" name="내용 개체 틀 2">
             <a:extLst>
               <a:ext uri="{FF2B5EF4-FFF2-40B4-BE49-F238E27FC236}">
@@ -7680,7 +7234,7 @@
           <a:p>
             <a:fld id="{0F78D9C4-20C1-4B15-A116-16DC77AD9A1E}" type="datetime1">
               <a:rPr lang="ko-KR" altLang="en-US" smtClean="0"/>
-              <a:t>2024-08-05</a:t>
+              <a:t>2024-08-06</a:t>
             </a:fld>
             <a:endParaRPr lang="ko-KR" altLang="en-US"/>
           </a:p>
@@ -7709,7 +7263,7 @@
           <a:p>
             <a:fld id="{083A2CE0-18CD-4102-B738-4ACFF9E68BA4}" type="slidenum">
               <a:rPr lang="ko-KR" altLang="en-US" smtClean="0"/>
-              <a:t>18</a:t>
+              <a:t>16</a:t>
             </a:fld>
             <a:endParaRPr lang="ko-KR" altLang="en-US"/>
           </a:p>
